--- a/PPTs/FirstReview.pptx
+++ b/PPTs/FirstReview.pptx
@@ -6,17 +6,18 @@
   </p:sldMasterIdLst>
   <p:sldIdLst>
     <p:sldId id="256" r:id="rId2"/>
-    <p:sldId id="287" r:id="rId3"/>
-    <p:sldId id="257" r:id="rId4"/>
-    <p:sldId id="286" r:id="rId5"/>
-    <p:sldId id="278" r:id="rId6"/>
-    <p:sldId id="260" r:id="rId7"/>
-    <p:sldId id="279" r:id="rId8"/>
-    <p:sldId id="280" r:id="rId9"/>
-    <p:sldId id="288" r:id="rId10"/>
-    <p:sldId id="281" r:id="rId11"/>
-    <p:sldId id="282" r:id="rId12"/>
-    <p:sldId id="270" r:id="rId13"/>
+    <p:sldId id="279" r:id="rId3"/>
+    <p:sldId id="278" r:id="rId4"/>
+    <p:sldId id="260" r:id="rId5"/>
+    <p:sldId id="289" r:id="rId6"/>
+    <p:sldId id="280" r:id="rId7"/>
+    <p:sldId id="288" r:id="rId8"/>
+    <p:sldId id="287" r:id="rId9"/>
+    <p:sldId id="257" r:id="rId10"/>
+    <p:sldId id="286" r:id="rId11"/>
+    <p:sldId id="281" r:id="rId12"/>
+    <p:sldId id="282" r:id="rId13"/>
+    <p:sldId id="270" r:id="rId14"/>
   </p:sldIdLst>
   <p:sldSz cx="12192000" cy="6858000"/>
   <p:notesSz cx="6858000" cy="9144000"/>
@@ -638,7 +639,7 @@
           <a:p>
             <a:fld id="{97BFF81C-1FCB-4DBA-8044-F1A0FCFD45A6}" type="datetime1">
               <a:rPr lang="en-US" smtClean="0"/>
-              <a:t>9/5/2022</a:t>
+              <a:t>9/7/2022</a:t>
             </a:fld>
             <a:endParaRPr lang="en-US" dirty="0"/>
           </a:p>
@@ -1237,7 +1238,7 @@
           <a:p>
             <a:fld id="{FB9092B3-2D87-4CDF-B84B-C46E5F5D31F7}" type="datetime1">
               <a:rPr lang="en-US" smtClean="0"/>
-              <a:t>9/5/2022</a:t>
+              <a:t>9/7/2022</a:t>
             </a:fld>
             <a:endParaRPr lang="en-US" dirty="0"/>
           </a:p>
@@ -1846,7 +1847,7 @@
           <a:p>
             <a:fld id="{3D769E57-47B1-47B0-B526-3153E4B1E729}" type="datetime1">
               <a:rPr lang="en-US" smtClean="0"/>
-              <a:t>9/5/2022</a:t>
+              <a:t>9/7/2022</a:t>
             </a:fld>
             <a:endParaRPr lang="en-US" dirty="0"/>
           </a:p>
@@ -2445,7 +2446,7 @@
           <a:p>
             <a:fld id="{5A87773D-8987-489A-A650-3D6F7D5C7C38}" type="datetime1">
               <a:rPr lang="en-US" smtClean="0"/>
-              <a:t>9/5/2022</a:t>
+              <a:t>9/7/2022</a:t>
             </a:fld>
             <a:endParaRPr lang="en-US" dirty="0"/>
           </a:p>
@@ -3120,7 +3121,7 @@
           <a:p>
             <a:fld id="{97E150C1-1D78-4D80-810D-E9E86F6E88AB}" type="datetime1">
               <a:rPr lang="en-US" smtClean="0"/>
-              <a:t>9/5/2022</a:t>
+              <a:t>9/7/2022</a:t>
             </a:fld>
             <a:endParaRPr lang="en-US" dirty="0"/>
           </a:p>
@@ -3781,7 +3782,7 @@
           <a:p>
             <a:fld id="{29E9CBD8-1588-4B6B-B74D-87480DDE94C0}" type="datetime1">
               <a:rPr lang="en-US" smtClean="0"/>
-              <a:t>9/5/2022</a:t>
+              <a:t>9/7/2022</a:t>
             </a:fld>
             <a:endParaRPr lang="en-US" dirty="0"/>
           </a:p>
@@ -4577,7 +4578,7 @@
           <a:p>
             <a:fld id="{AD794440-721C-4D75-BD4F-4CFB3D51CDCA}" type="datetime1">
               <a:rPr lang="en-US" smtClean="0"/>
-              <a:t>9/5/2022</a:t>
+              <a:t>9/7/2022</a:t>
             </a:fld>
             <a:endParaRPr lang="en-US" dirty="0"/>
           </a:p>
@@ -5124,7 +5125,7 @@
           <a:p>
             <a:fld id="{B2701A64-483B-4532-94FB-D8F90CB6DEE0}" type="datetime1">
               <a:rPr lang="en-US" smtClean="0"/>
-              <a:t>9/5/2022</a:t>
+              <a:t>9/7/2022</a:t>
             </a:fld>
             <a:endParaRPr lang="en-US" dirty="0"/>
           </a:p>
@@ -5648,7 +5649,7 @@
           <a:p>
             <a:fld id="{6F18FB39-20FB-4E2E-B861-45B709B9C3C5}" type="datetime1">
               <a:rPr lang="en-US" smtClean="0"/>
-              <a:t>9/5/2022</a:t>
+              <a:t>9/7/2022</a:t>
             </a:fld>
             <a:endParaRPr lang="en-US" dirty="0"/>
           </a:p>
@@ -6354,7 +6355,7 @@
           <a:p>
             <a:fld id="{AC48AC19-8BD6-476C-9770-8884373BCF00}" type="datetime1">
               <a:rPr lang="en-US" smtClean="0"/>
-              <a:t>9/5/2022</a:t>
+              <a:t>9/7/2022</a:t>
             </a:fld>
             <a:endParaRPr lang="en-US"/>
           </a:p>
@@ -7040,7 +7041,7 @@
           <a:p>
             <a:fld id="{F3F68C53-8AD1-4F09-9486-FB3406B99CFA}" type="datetime1">
               <a:rPr lang="en-US" smtClean="0"/>
-              <a:t>9/5/2022</a:t>
+              <a:t>9/7/2022</a:t>
             </a:fld>
             <a:endParaRPr lang="en-US" dirty="0"/>
           </a:p>
@@ -7306,7 +7307,7 @@
           <a:p>
             <a:fld id="{BA543EDD-D0D2-447F-B24F-3717AF4B109D}" type="datetime1">
               <a:rPr lang="en-US" smtClean="0"/>
-              <a:t>9/5/2022</a:t>
+              <a:t>9/7/2022</a:t>
             </a:fld>
             <a:endParaRPr lang="en-US" dirty="0"/>
           </a:p>
@@ -8164,2166 +8165,6 @@
                 </a:solidFill>
               </a:rPr>
               <a:t>09</a:t>
-            </a:r>
-            <a:endParaRPr lang="en-IN" sz="1400" dirty="0">
-              <a:solidFill>
-                <a:schemeClr val="tx1">
-                  <a:lumMod val="50000"/>
-                  <a:lumOff val="50000"/>
-                </a:schemeClr>
-              </a:solidFill>
-            </a:endParaRPr>
-          </a:p>
-        </p:txBody>
-      </p:sp>
-      <p:sp>
-        <p:nvSpPr>
-          <p:cNvPr id="2" name="TextBox 1"/>
-          <p:cNvSpPr txBox="1"/>
-          <p:nvPr/>
-        </p:nvSpPr>
-        <p:spPr>
-          <a:xfrm>
-            <a:off x="0" y="661851"/>
-            <a:ext cx="12191999" cy="584775"/>
-          </a:xfrm>
-          <a:prstGeom prst="rect">
-            <a:avLst/>
-          </a:prstGeom>
-          <a:noFill/>
-        </p:spPr>
-        <p:txBody>
-          <a:bodyPr wrap="square" rtlCol="0">
-            <a:spAutoFit/>
-          </a:bodyPr>
-          <a:lstStyle/>
-          <a:p>
-            <a:pPr algn="ctr"/>
-            <a:r>
-              <a:rPr lang="en-US" sz="3200" dirty="0">
-                <a:solidFill>
-                  <a:srgbClr val="002060"/>
-                </a:solidFill>
-                <a:latin typeface="Times New Roman" panose="02020603050405020304" pitchFamily="18" charset="0"/>
-                <a:cs typeface="Times New Roman" panose="02020603050405020304" pitchFamily="18" charset="0"/>
-              </a:rPr>
-              <a:t>SOFTWARE REQUIREMENT</a:t>
-            </a:r>
-            <a:endParaRPr lang="en-IN" sz="3200" dirty="0">
-              <a:solidFill>
-                <a:srgbClr val="002060"/>
-              </a:solidFill>
-              <a:latin typeface="Times New Roman" panose="02020603050405020304" pitchFamily="18" charset="0"/>
-              <a:cs typeface="Times New Roman" panose="02020603050405020304" pitchFamily="18" charset="0"/>
-            </a:endParaRPr>
-          </a:p>
-        </p:txBody>
-      </p:sp>
-      <p:sp>
-        <p:nvSpPr>
-          <p:cNvPr id="4" name="TextBox 3">
-            <a:extLst>
-              <a:ext uri="{FF2B5EF4-FFF2-40B4-BE49-F238E27FC236}">
-                <a16:creationId xmlns:a16="http://schemas.microsoft.com/office/drawing/2014/main" id="{CEE22EFF-FEF0-2830-53DC-79D5A424A36B}"/>
-              </a:ext>
-            </a:extLst>
-          </p:cNvPr>
-          <p:cNvSpPr txBox="1"/>
-          <p:nvPr/>
-        </p:nvSpPr>
-        <p:spPr>
-          <a:xfrm>
-            <a:off x="4521664" y="2102712"/>
-            <a:ext cx="1788254" cy="2957861"/>
-          </a:xfrm>
-          <a:prstGeom prst="rect">
-            <a:avLst/>
-          </a:prstGeom>
-          <a:noFill/>
-        </p:spPr>
-        <p:txBody>
-          <a:bodyPr wrap="square" rtlCol="0">
-            <a:spAutoFit/>
-          </a:bodyPr>
-          <a:lstStyle/>
-          <a:p>
-            <a:pPr marL="285750" indent="-285750" algn="just">
-              <a:lnSpc>
-                <a:spcPct val="150000"/>
-              </a:lnSpc>
-              <a:buClr>
-                <a:schemeClr val="bg2">
-                  <a:lumMod val="25000"/>
-                </a:schemeClr>
-              </a:buClr>
-              <a:buFont typeface="Wingdings" panose="05000000000000000000" pitchFamily="2" charset="2"/>
-              <a:buChar char="Ø"/>
-            </a:pPr>
-            <a:r>
-              <a:rPr lang="en-US" dirty="0">
-                <a:latin typeface="Calibri" panose="020F0502020204030204" pitchFamily="34" charset="0"/>
-                <a:cs typeface="Calibri" panose="020F0502020204030204" pitchFamily="34" charset="0"/>
-              </a:rPr>
-              <a:t>HTML</a:t>
-            </a:r>
-          </a:p>
-          <a:p>
-            <a:pPr marL="285750" indent="-285750" algn="just">
-              <a:lnSpc>
-                <a:spcPct val="150000"/>
-              </a:lnSpc>
-              <a:buClr>
-                <a:schemeClr val="bg2">
-                  <a:lumMod val="25000"/>
-                </a:schemeClr>
-              </a:buClr>
-              <a:buFont typeface="Wingdings" panose="05000000000000000000" pitchFamily="2" charset="2"/>
-              <a:buChar char="Ø"/>
-            </a:pPr>
-            <a:r>
-              <a:rPr lang="en-US" dirty="0">
-                <a:latin typeface="Calibri" panose="020F0502020204030204" pitchFamily="34" charset="0"/>
-                <a:cs typeface="Calibri" panose="020F0502020204030204" pitchFamily="34" charset="0"/>
-              </a:rPr>
-              <a:t>CSS</a:t>
-            </a:r>
-          </a:p>
-          <a:p>
-            <a:pPr marL="285750" indent="-285750" algn="just">
-              <a:lnSpc>
-                <a:spcPct val="150000"/>
-              </a:lnSpc>
-              <a:buClr>
-                <a:schemeClr val="bg2">
-                  <a:lumMod val="25000"/>
-                </a:schemeClr>
-              </a:buClr>
-              <a:buFont typeface="Wingdings" panose="05000000000000000000" pitchFamily="2" charset="2"/>
-              <a:buChar char="Ø"/>
-            </a:pPr>
-            <a:r>
-              <a:rPr lang="en-US" dirty="0">
-                <a:latin typeface="Calibri" panose="020F0502020204030204" pitchFamily="34" charset="0"/>
-                <a:cs typeface="Calibri" panose="020F0502020204030204" pitchFamily="34" charset="0"/>
-              </a:rPr>
-              <a:t>JavaScript</a:t>
-            </a:r>
-          </a:p>
-          <a:p>
-            <a:pPr marL="285750" indent="-285750" algn="just">
-              <a:lnSpc>
-                <a:spcPct val="150000"/>
-              </a:lnSpc>
-              <a:buClr>
-                <a:schemeClr val="bg2">
-                  <a:lumMod val="25000"/>
-                </a:schemeClr>
-              </a:buClr>
-              <a:buFont typeface="Wingdings" panose="05000000000000000000" pitchFamily="2" charset="2"/>
-              <a:buChar char="Ø"/>
-            </a:pPr>
-            <a:r>
-              <a:rPr lang="en-US" dirty="0">
-                <a:latin typeface="Calibri" panose="020F0502020204030204" pitchFamily="34" charset="0"/>
-                <a:cs typeface="Calibri" panose="020F0502020204030204" pitchFamily="34" charset="0"/>
-              </a:rPr>
-              <a:t>NodeJS</a:t>
-            </a:r>
-          </a:p>
-          <a:p>
-            <a:pPr marL="285750" indent="-285750" algn="just">
-              <a:lnSpc>
-                <a:spcPct val="150000"/>
-              </a:lnSpc>
-              <a:buClr>
-                <a:schemeClr val="bg2">
-                  <a:lumMod val="25000"/>
-                </a:schemeClr>
-              </a:buClr>
-              <a:buFont typeface="Wingdings" panose="05000000000000000000" pitchFamily="2" charset="2"/>
-              <a:buChar char="Ø"/>
-            </a:pPr>
-            <a:r>
-              <a:rPr lang="en-US" dirty="0">
-                <a:latin typeface="Calibri" panose="020F0502020204030204" pitchFamily="34" charset="0"/>
-                <a:cs typeface="Calibri" panose="020F0502020204030204" pitchFamily="34" charset="0"/>
-              </a:rPr>
-              <a:t>Express</a:t>
-            </a:r>
-          </a:p>
-          <a:p>
-            <a:pPr marL="285750" indent="-285750" algn="just">
-              <a:lnSpc>
-                <a:spcPct val="150000"/>
-              </a:lnSpc>
-              <a:buClr>
-                <a:schemeClr val="bg2">
-                  <a:lumMod val="25000"/>
-                </a:schemeClr>
-              </a:buClr>
-              <a:buFont typeface="Wingdings" panose="05000000000000000000" pitchFamily="2" charset="2"/>
-              <a:buChar char="Ø"/>
-            </a:pPr>
-            <a:r>
-              <a:rPr lang="en-US" dirty="0">
-                <a:latin typeface="Calibri" panose="020F0502020204030204" pitchFamily="34" charset="0"/>
-                <a:cs typeface="Calibri" panose="020F0502020204030204" pitchFamily="34" charset="0"/>
-              </a:rPr>
-              <a:t>VS Code</a:t>
-            </a:r>
-          </a:p>
-          <a:p>
-            <a:pPr marL="285750" indent="-285750" algn="just">
-              <a:lnSpc>
-                <a:spcPct val="150000"/>
-              </a:lnSpc>
-              <a:buClr>
-                <a:schemeClr val="bg2">
-                  <a:lumMod val="25000"/>
-                </a:schemeClr>
-              </a:buClr>
-              <a:buFont typeface="Wingdings" panose="05000000000000000000" pitchFamily="2" charset="2"/>
-              <a:buChar char="Ø"/>
-            </a:pPr>
-            <a:r>
-              <a:rPr lang="en-US" dirty="0">
-                <a:latin typeface="Calibri" panose="020F0502020204030204" pitchFamily="34" charset="0"/>
-                <a:cs typeface="Calibri" panose="020F0502020204030204" pitchFamily="34" charset="0"/>
-              </a:rPr>
-              <a:t>Netlify</a:t>
-            </a:r>
-            <a:endParaRPr lang="en-IN" dirty="0">
-              <a:latin typeface="Calibri" panose="020F0502020204030204" pitchFamily="34" charset="0"/>
-              <a:cs typeface="Calibri" panose="020F0502020204030204" pitchFamily="34" charset="0"/>
-            </a:endParaRPr>
-          </a:p>
-        </p:txBody>
-      </p:sp>
-      <p:sp>
-        <p:nvSpPr>
-          <p:cNvPr id="5" name="Right Brace 4">
-            <a:extLst>
-              <a:ext uri="{FF2B5EF4-FFF2-40B4-BE49-F238E27FC236}">
-                <a16:creationId xmlns:a16="http://schemas.microsoft.com/office/drawing/2014/main" id="{0DE91303-3E01-C7CC-B58F-B507E981DDC7}"/>
-              </a:ext>
-            </a:extLst>
-          </p:cNvPr>
-          <p:cNvSpPr/>
-          <p:nvPr/>
-        </p:nvSpPr>
-        <p:spPr>
-          <a:xfrm>
-            <a:off x="6207854" y="2265028"/>
-            <a:ext cx="102064" cy="939566"/>
-          </a:xfrm>
-          <a:prstGeom prst="rightBrace">
-            <a:avLst/>
-          </a:prstGeom>
-          <a:ln>
-            <a:solidFill>
-              <a:schemeClr val="bg2">
-                <a:lumMod val="10000"/>
-              </a:schemeClr>
-            </a:solidFill>
-          </a:ln>
-        </p:spPr>
-        <p:style>
-          <a:lnRef idx="1">
-            <a:schemeClr val="accent3"/>
-          </a:lnRef>
-          <a:fillRef idx="0">
-            <a:schemeClr val="accent3"/>
-          </a:fillRef>
-          <a:effectRef idx="0">
-            <a:schemeClr val="accent3"/>
-          </a:effectRef>
-          <a:fontRef idx="minor">
-            <a:schemeClr val="tx1"/>
-          </a:fontRef>
-        </p:style>
-        <p:txBody>
-          <a:bodyPr rtlCol="0" anchor="ctr"/>
-          <a:lstStyle/>
-          <a:p>
-            <a:pPr algn="ctr"/>
-            <a:endParaRPr lang="en-IN"/>
-          </a:p>
-        </p:txBody>
-      </p:sp>
-      <p:sp>
-        <p:nvSpPr>
-          <p:cNvPr id="11" name="Right Brace 10">
-            <a:extLst>
-              <a:ext uri="{FF2B5EF4-FFF2-40B4-BE49-F238E27FC236}">
-                <a16:creationId xmlns:a16="http://schemas.microsoft.com/office/drawing/2014/main" id="{23E6EF8D-D6E1-A292-62B9-BA997D8D879A}"/>
-              </a:ext>
-            </a:extLst>
-          </p:cNvPr>
-          <p:cNvSpPr/>
-          <p:nvPr/>
-        </p:nvSpPr>
-        <p:spPr>
-          <a:xfrm>
-            <a:off x="6209951" y="3536900"/>
-            <a:ext cx="99967" cy="507002"/>
-          </a:xfrm>
-          <a:prstGeom prst="rightBrace">
-            <a:avLst/>
-          </a:prstGeom>
-          <a:ln>
-            <a:solidFill>
-              <a:schemeClr val="bg2">
-                <a:lumMod val="10000"/>
-              </a:schemeClr>
-            </a:solidFill>
-          </a:ln>
-        </p:spPr>
-        <p:style>
-          <a:lnRef idx="1">
-            <a:schemeClr val="accent3"/>
-          </a:lnRef>
-          <a:fillRef idx="0">
-            <a:schemeClr val="accent3"/>
-          </a:fillRef>
-          <a:effectRef idx="0">
-            <a:schemeClr val="accent3"/>
-          </a:effectRef>
-          <a:fontRef idx="minor">
-            <a:schemeClr val="tx1"/>
-          </a:fontRef>
-        </p:style>
-        <p:txBody>
-          <a:bodyPr rtlCol="0" anchor="ctr"/>
-          <a:lstStyle/>
-          <a:p>
-            <a:pPr algn="ctr"/>
-            <a:endParaRPr lang="en-IN"/>
-          </a:p>
-        </p:txBody>
-      </p:sp>
-      <p:sp>
-        <p:nvSpPr>
-          <p:cNvPr id="12" name="Right Brace 11">
-            <a:extLst>
-              <a:ext uri="{FF2B5EF4-FFF2-40B4-BE49-F238E27FC236}">
-                <a16:creationId xmlns:a16="http://schemas.microsoft.com/office/drawing/2014/main" id="{6A76BA60-EDD2-29E7-8122-91C397494579}"/>
-              </a:ext>
-            </a:extLst>
-          </p:cNvPr>
-          <p:cNvSpPr/>
-          <p:nvPr/>
-        </p:nvSpPr>
-        <p:spPr>
-          <a:xfrm>
-            <a:off x="6202260" y="4349070"/>
-            <a:ext cx="99967" cy="147429"/>
-          </a:xfrm>
-          <a:prstGeom prst="rightBrace">
-            <a:avLst/>
-          </a:prstGeom>
-          <a:ln>
-            <a:solidFill>
-              <a:schemeClr val="bg2">
-                <a:lumMod val="10000"/>
-              </a:schemeClr>
-            </a:solidFill>
-          </a:ln>
-        </p:spPr>
-        <p:style>
-          <a:lnRef idx="1">
-            <a:schemeClr val="accent3"/>
-          </a:lnRef>
-          <a:fillRef idx="0">
-            <a:schemeClr val="accent3"/>
-          </a:fillRef>
-          <a:effectRef idx="0">
-            <a:schemeClr val="accent3"/>
-          </a:effectRef>
-          <a:fontRef idx="minor">
-            <a:schemeClr val="tx1"/>
-          </a:fontRef>
-        </p:style>
-        <p:txBody>
-          <a:bodyPr rtlCol="0" anchor="ctr"/>
-          <a:lstStyle/>
-          <a:p>
-            <a:pPr algn="ctr"/>
-            <a:endParaRPr lang="en-IN"/>
-          </a:p>
-        </p:txBody>
-      </p:sp>
-      <p:sp>
-        <p:nvSpPr>
-          <p:cNvPr id="15" name="Right Brace 14">
-            <a:extLst>
-              <a:ext uri="{FF2B5EF4-FFF2-40B4-BE49-F238E27FC236}">
-                <a16:creationId xmlns:a16="http://schemas.microsoft.com/office/drawing/2014/main" id="{649FBE4C-2CA2-F569-8CB2-9E4547C46775}"/>
-              </a:ext>
-            </a:extLst>
-          </p:cNvPr>
-          <p:cNvSpPr/>
-          <p:nvPr/>
-        </p:nvSpPr>
-        <p:spPr>
-          <a:xfrm>
-            <a:off x="6202260" y="4783511"/>
-            <a:ext cx="99967" cy="147429"/>
-          </a:xfrm>
-          <a:prstGeom prst="rightBrace">
-            <a:avLst/>
-          </a:prstGeom>
-          <a:ln>
-            <a:solidFill>
-              <a:schemeClr val="bg2">
-                <a:lumMod val="10000"/>
-              </a:schemeClr>
-            </a:solidFill>
-          </a:ln>
-        </p:spPr>
-        <p:style>
-          <a:lnRef idx="1">
-            <a:schemeClr val="accent3"/>
-          </a:lnRef>
-          <a:fillRef idx="0">
-            <a:schemeClr val="accent3"/>
-          </a:fillRef>
-          <a:effectRef idx="0">
-            <a:schemeClr val="accent3"/>
-          </a:effectRef>
-          <a:fontRef idx="minor">
-            <a:schemeClr val="tx1"/>
-          </a:fontRef>
-        </p:style>
-        <p:txBody>
-          <a:bodyPr rtlCol="0" anchor="ctr"/>
-          <a:lstStyle/>
-          <a:p>
-            <a:pPr algn="ctr"/>
-            <a:endParaRPr lang="en-IN"/>
-          </a:p>
-        </p:txBody>
-      </p:sp>
-      <p:sp>
-        <p:nvSpPr>
-          <p:cNvPr id="16" name="TextBox 15">
-            <a:extLst>
-              <a:ext uri="{FF2B5EF4-FFF2-40B4-BE49-F238E27FC236}">
-                <a16:creationId xmlns:a16="http://schemas.microsoft.com/office/drawing/2014/main" id="{4568E3A7-A6A2-5444-6B29-EA4A27541182}"/>
-              </a:ext>
-            </a:extLst>
-          </p:cNvPr>
-          <p:cNvSpPr txBox="1"/>
-          <p:nvPr/>
-        </p:nvSpPr>
-        <p:spPr>
-          <a:xfrm>
-            <a:off x="6442745" y="2608976"/>
-            <a:ext cx="1510018" cy="276999"/>
-          </a:xfrm>
-          <a:prstGeom prst="rect">
-            <a:avLst/>
-          </a:prstGeom>
-          <a:noFill/>
-        </p:spPr>
-        <p:txBody>
-          <a:bodyPr wrap="square" rtlCol="0">
-            <a:spAutoFit/>
-          </a:bodyPr>
-          <a:lstStyle/>
-          <a:p>
-            <a:r>
-              <a:rPr lang="en-US" sz="1200" dirty="0"/>
-              <a:t>Front end</a:t>
-            </a:r>
-            <a:endParaRPr lang="en-IN" sz="1200" dirty="0"/>
-          </a:p>
-        </p:txBody>
-      </p:sp>
-      <p:sp>
-        <p:nvSpPr>
-          <p:cNvPr id="17" name="TextBox 16">
-            <a:extLst>
-              <a:ext uri="{FF2B5EF4-FFF2-40B4-BE49-F238E27FC236}">
-                <a16:creationId xmlns:a16="http://schemas.microsoft.com/office/drawing/2014/main" id="{F192CDD9-D2CF-5CFC-EB28-61BB5C8BFE45}"/>
-              </a:ext>
-            </a:extLst>
-          </p:cNvPr>
-          <p:cNvSpPr txBox="1"/>
-          <p:nvPr/>
-        </p:nvSpPr>
-        <p:spPr>
-          <a:xfrm>
-            <a:off x="6488187" y="3656679"/>
-            <a:ext cx="1510018" cy="276999"/>
-          </a:xfrm>
-          <a:prstGeom prst="rect">
-            <a:avLst/>
-          </a:prstGeom>
-          <a:noFill/>
-        </p:spPr>
-        <p:txBody>
-          <a:bodyPr wrap="square" rtlCol="0">
-            <a:spAutoFit/>
-          </a:bodyPr>
-          <a:lstStyle/>
-          <a:p>
-            <a:r>
-              <a:rPr lang="en-US" sz="1200" dirty="0"/>
-              <a:t>Back end</a:t>
-            </a:r>
-            <a:endParaRPr lang="en-IN" sz="1200" dirty="0"/>
-          </a:p>
-        </p:txBody>
-      </p:sp>
-      <p:sp>
-        <p:nvSpPr>
-          <p:cNvPr id="18" name="TextBox 17">
-            <a:extLst>
-              <a:ext uri="{FF2B5EF4-FFF2-40B4-BE49-F238E27FC236}">
-                <a16:creationId xmlns:a16="http://schemas.microsoft.com/office/drawing/2014/main" id="{6FFCCE52-B166-E641-FE75-BA81BE693030}"/>
-              </a:ext>
-            </a:extLst>
-          </p:cNvPr>
-          <p:cNvSpPr txBox="1"/>
-          <p:nvPr/>
-        </p:nvSpPr>
-        <p:spPr>
-          <a:xfrm>
-            <a:off x="6442745" y="4275895"/>
-            <a:ext cx="1510018" cy="276999"/>
-          </a:xfrm>
-          <a:prstGeom prst="rect">
-            <a:avLst/>
-          </a:prstGeom>
-          <a:noFill/>
-        </p:spPr>
-        <p:txBody>
-          <a:bodyPr wrap="square" rtlCol="0">
-            <a:spAutoFit/>
-          </a:bodyPr>
-          <a:lstStyle/>
-          <a:p>
-            <a:r>
-              <a:rPr lang="en-US" sz="1200" dirty="0"/>
-              <a:t> Code editor</a:t>
-            </a:r>
-            <a:endParaRPr lang="en-IN" sz="1200" dirty="0"/>
-          </a:p>
-        </p:txBody>
-      </p:sp>
-      <p:sp>
-        <p:nvSpPr>
-          <p:cNvPr id="19" name="TextBox 18">
-            <a:extLst>
-              <a:ext uri="{FF2B5EF4-FFF2-40B4-BE49-F238E27FC236}">
-                <a16:creationId xmlns:a16="http://schemas.microsoft.com/office/drawing/2014/main" id="{34FA0350-2845-CA40-CD85-4B59E8330875}"/>
-              </a:ext>
-            </a:extLst>
-          </p:cNvPr>
-          <p:cNvSpPr txBox="1"/>
-          <p:nvPr/>
-        </p:nvSpPr>
-        <p:spPr>
-          <a:xfrm>
-            <a:off x="6488187" y="4706841"/>
-            <a:ext cx="1510018" cy="276999"/>
-          </a:xfrm>
-          <a:prstGeom prst="rect">
-            <a:avLst/>
-          </a:prstGeom>
-          <a:noFill/>
-        </p:spPr>
-        <p:txBody>
-          <a:bodyPr wrap="square" rtlCol="0">
-            <a:spAutoFit/>
-          </a:bodyPr>
-          <a:lstStyle/>
-          <a:p>
-            <a:r>
-              <a:rPr lang="en-US" sz="1200" dirty="0"/>
-              <a:t>to deploy</a:t>
-            </a:r>
-            <a:endParaRPr lang="en-IN" sz="1200" dirty="0"/>
-          </a:p>
-        </p:txBody>
-      </p:sp>
-    </p:spTree>
-    <p:extLst>
-      <p:ext uri="{BB962C8B-B14F-4D97-AF65-F5344CB8AC3E}">
-        <p14:creationId xmlns:p14="http://schemas.microsoft.com/office/powerpoint/2010/main" val="1143028413"/>
-      </p:ext>
-    </p:extLst>
-  </p:cSld>
-  <p:clrMapOvr>
-    <a:masterClrMapping/>
-  </p:clrMapOvr>
-</p:sld>
-</file>
-
-<file path=ppt/slides/slide11.xml><?xml version="1.0" encoding="utf-8"?>
-<p:sld xmlns:a="http://schemas.openxmlformats.org/drawingml/2006/main" xmlns:r="http://schemas.openxmlformats.org/officeDocument/2006/relationships" xmlns:p="http://schemas.openxmlformats.org/presentationml/2006/main">
-  <p:cSld>
-    <p:spTree>
-      <p:nvGrpSpPr>
-        <p:cNvPr id="1" name=""/>
-        <p:cNvGrpSpPr/>
-        <p:nvPr/>
-      </p:nvGrpSpPr>
-      <p:grpSpPr>
-        <a:xfrm>
-          <a:off x="0" y="0"/>
-          <a:ext cx="0" cy="0"/>
-          <a:chOff x="0" y="0"/>
-          <a:chExt cx="0" cy="0"/>
-        </a:xfrm>
-      </p:grpSpPr>
-      <p:sp>
-        <p:nvSpPr>
-          <p:cNvPr id="10" name="Rectangle 9"/>
-          <p:cNvSpPr/>
-          <p:nvPr/>
-        </p:nvSpPr>
-        <p:spPr>
-          <a:xfrm>
-            <a:off x="0" y="6509857"/>
-            <a:ext cx="12191999" cy="348143"/>
-          </a:xfrm>
-          <a:prstGeom prst="rect">
-            <a:avLst/>
-          </a:prstGeom>
-          <a:solidFill>
-            <a:schemeClr val="accent3">
-              <a:alpha val="50000"/>
-            </a:schemeClr>
-          </a:solidFill>
-          <a:ln>
-            <a:noFill/>
-          </a:ln>
-        </p:spPr>
-        <p:style>
-          <a:lnRef idx="0">
-            <a:scrgbClr r="0" g="0" b="0"/>
-          </a:lnRef>
-          <a:fillRef idx="0">
-            <a:scrgbClr r="0" g="0" b="0"/>
-          </a:fillRef>
-          <a:effectRef idx="0">
-            <a:scrgbClr r="0" g="0" b="0"/>
-          </a:effectRef>
-          <a:fontRef idx="minor">
-            <a:schemeClr val="lt1"/>
-          </a:fontRef>
-        </p:style>
-        <p:txBody>
-          <a:bodyPr rtlCol="0" anchor="ctr"/>
-          <a:lstStyle/>
-          <a:p>
-            <a:pPr algn="ctr"/>
-            <a:endParaRPr lang="en-IN"/>
-          </a:p>
-        </p:txBody>
-      </p:sp>
-      <p:sp>
-        <p:nvSpPr>
-          <p:cNvPr id="13" name="TextBox 12"/>
-          <p:cNvSpPr txBox="1"/>
-          <p:nvPr/>
-        </p:nvSpPr>
-        <p:spPr>
-          <a:xfrm>
-            <a:off x="0" y="6550223"/>
-            <a:ext cx="12191999" cy="307777"/>
-          </a:xfrm>
-          <a:prstGeom prst="rect">
-            <a:avLst/>
-          </a:prstGeom>
-          <a:noFill/>
-        </p:spPr>
-        <p:txBody>
-          <a:bodyPr wrap="square" rtlCol="0">
-            <a:spAutoFit/>
-          </a:bodyPr>
-          <a:lstStyle/>
-          <a:p>
-            <a:pPr algn="ctr"/>
-            <a:r>
-              <a:rPr lang="en-US" sz="1400" dirty="0">
-                <a:solidFill>
-                  <a:schemeClr val="tx1">
-                    <a:lumMod val="50000"/>
-                    <a:lumOff val="50000"/>
-                  </a:schemeClr>
-                </a:solidFill>
-              </a:rPr>
-              <a:t>10</a:t>
-            </a:r>
-            <a:endParaRPr lang="en-IN" sz="1400" dirty="0">
-              <a:solidFill>
-                <a:schemeClr val="tx1">
-                  <a:lumMod val="50000"/>
-                  <a:lumOff val="50000"/>
-                </a:schemeClr>
-              </a:solidFill>
-            </a:endParaRPr>
-          </a:p>
-        </p:txBody>
-      </p:sp>
-      <p:sp>
-        <p:nvSpPr>
-          <p:cNvPr id="2" name="TextBox 1"/>
-          <p:cNvSpPr txBox="1"/>
-          <p:nvPr/>
-        </p:nvSpPr>
-        <p:spPr>
-          <a:xfrm>
-            <a:off x="0" y="661851"/>
-            <a:ext cx="12191999" cy="584775"/>
-          </a:xfrm>
-          <a:prstGeom prst="rect">
-            <a:avLst/>
-          </a:prstGeom>
-          <a:noFill/>
-        </p:spPr>
-        <p:txBody>
-          <a:bodyPr wrap="square" rtlCol="0">
-            <a:spAutoFit/>
-          </a:bodyPr>
-          <a:lstStyle/>
-          <a:p>
-            <a:pPr algn="ctr"/>
-            <a:r>
-              <a:rPr lang="en-US" sz="3200" dirty="0">
-                <a:solidFill>
-                  <a:srgbClr val="002060"/>
-                </a:solidFill>
-                <a:latin typeface="Times New Roman" panose="02020603050405020304" pitchFamily="18" charset="0"/>
-                <a:cs typeface="Times New Roman" panose="02020603050405020304" pitchFamily="18" charset="0"/>
-              </a:rPr>
-              <a:t>PROJECT PLAN</a:t>
-            </a:r>
-            <a:endParaRPr lang="en-IN" sz="3200" dirty="0">
-              <a:solidFill>
-                <a:srgbClr val="002060"/>
-              </a:solidFill>
-              <a:latin typeface="Times New Roman" panose="02020603050405020304" pitchFamily="18" charset="0"/>
-              <a:cs typeface="Times New Roman" panose="02020603050405020304" pitchFamily="18" charset="0"/>
-            </a:endParaRPr>
-          </a:p>
-        </p:txBody>
-      </p:sp>
-      <p:sp>
-        <p:nvSpPr>
-          <p:cNvPr id="3" name="TextBox 2"/>
-          <p:cNvSpPr txBox="1"/>
-          <p:nvPr/>
-        </p:nvSpPr>
-        <p:spPr>
-          <a:xfrm>
-            <a:off x="2893963" y="2010433"/>
-            <a:ext cx="7445828" cy="2957861"/>
-          </a:xfrm>
-          <a:prstGeom prst="rect">
-            <a:avLst/>
-          </a:prstGeom>
-          <a:noFill/>
-        </p:spPr>
-        <p:txBody>
-          <a:bodyPr wrap="square" rtlCol="0">
-            <a:spAutoFit/>
-          </a:bodyPr>
-          <a:lstStyle/>
-          <a:p>
-            <a:pPr marL="285750" indent="-285750" algn="just">
-              <a:lnSpc>
-                <a:spcPct val="150000"/>
-              </a:lnSpc>
-              <a:buClr>
-                <a:schemeClr val="bg2">
-                  <a:lumMod val="25000"/>
-                </a:schemeClr>
-              </a:buClr>
-              <a:buFont typeface="Wingdings" panose="05000000000000000000" pitchFamily="2" charset="2"/>
-              <a:buChar char="§"/>
-            </a:pPr>
-            <a:r>
-              <a:rPr lang="en-US" dirty="0">
-                <a:latin typeface="Calibri" panose="020F0502020204030204" pitchFamily="34" charset="0"/>
-                <a:cs typeface="Calibri" panose="020F0502020204030204" pitchFamily="34" charset="0"/>
-              </a:rPr>
-              <a:t>Phase-I</a:t>
-            </a:r>
-          </a:p>
-          <a:p>
-            <a:pPr marL="342900" indent="-342900" algn="just">
-              <a:lnSpc>
-                <a:spcPct val="150000"/>
-              </a:lnSpc>
-              <a:buClr>
-                <a:schemeClr val="bg2">
-                  <a:lumMod val="25000"/>
-                </a:schemeClr>
-              </a:buClr>
-              <a:buFont typeface="+mj-lt"/>
-              <a:buAutoNum type="alphaLcParenR"/>
-            </a:pPr>
-            <a:r>
-              <a:rPr lang="en-US" dirty="0">
-                <a:latin typeface="Calibri" panose="020F0502020204030204" pitchFamily="34" charset="0"/>
-                <a:cs typeface="Calibri" panose="020F0502020204030204" pitchFamily="34" charset="0"/>
-              </a:rPr>
-              <a:t>Website development</a:t>
-            </a:r>
-          </a:p>
-          <a:p>
-            <a:pPr algn="just">
-              <a:lnSpc>
-                <a:spcPct val="150000"/>
-              </a:lnSpc>
-              <a:buClr>
-                <a:schemeClr val="bg2">
-                  <a:lumMod val="25000"/>
-                </a:schemeClr>
-              </a:buClr>
-            </a:pPr>
-            <a:endParaRPr lang="en-US" dirty="0">
-              <a:latin typeface="Calibri" panose="020F0502020204030204" pitchFamily="34" charset="0"/>
-              <a:cs typeface="Calibri" panose="020F0502020204030204" pitchFamily="34" charset="0"/>
-            </a:endParaRPr>
-          </a:p>
-          <a:p>
-            <a:pPr marL="285750" indent="-285750" algn="just">
-              <a:lnSpc>
-                <a:spcPct val="150000"/>
-              </a:lnSpc>
-              <a:buClr>
-                <a:schemeClr val="bg2">
-                  <a:lumMod val="25000"/>
-                </a:schemeClr>
-              </a:buClr>
-              <a:buFont typeface="Wingdings" panose="05000000000000000000" pitchFamily="2" charset="2"/>
-              <a:buChar char="§"/>
-            </a:pPr>
-            <a:r>
-              <a:rPr lang="en-US" dirty="0">
-                <a:latin typeface="Calibri" panose="020F0502020204030204" pitchFamily="34" charset="0"/>
-                <a:cs typeface="Calibri" panose="020F0502020204030204" pitchFamily="34" charset="0"/>
-              </a:rPr>
-              <a:t>Phase-II</a:t>
-            </a:r>
-          </a:p>
-          <a:p>
-            <a:pPr marL="342900" indent="-342900" algn="just">
-              <a:lnSpc>
-                <a:spcPct val="150000"/>
-              </a:lnSpc>
-              <a:buClr>
-                <a:schemeClr val="bg2">
-                  <a:lumMod val="25000"/>
-                </a:schemeClr>
-              </a:buClr>
-              <a:buFont typeface="+mj-lt"/>
-              <a:buAutoNum type="alphaLcParenR"/>
-            </a:pPr>
-            <a:r>
-              <a:rPr lang="en-US" dirty="0">
-                <a:latin typeface="Calibri" panose="020F0502020204030204" pitchFamily="34" charset="0"/>
-                <a:cs typeface="Calibri" panose="020F0502020204030204" pitchFamily="34" charset="0"/>
-              </a:rPr>
-              <a:t>Sentiment Analysis on user reviews using ML</a:t>
-            </a:r>
-          </a:p>
-          <a:p>
-            <a:pPr marL="342900" indent="-342900" algn="just">
-              <a:lnSpc>
-                <a:spcPct val="150000"/>
-              </a:lnSpc>
-              <a:buClr>
-                <a:schemeClr val="bg2">
-                  <a:lumMod val="25000"/>
-                </a:schemeClr>
-              </a:buClr>
-              <a:buFont typeface="+mj-lt"/>
-              <a:buAutoNum type="alphaLcParenR"/>
-            </a:pPr>
-            <a:r>
-              <a:rPr lang="en-US" dirty="0">
-                <a:latin typeface="Calibri" panose="020F0502020204030204" pitchFamily="34" charset="0"/>
-                <a:cs typeface="Calibri" panose="020F0502020204030204" pitchFamily="34" charset="0"/>
-              </a:rPr>
-              <a:t>Paperwork</a:t>
-            </a:r>
-          </a:p>
-          <a:p>
-            <a:pPr algn="just">
-              <a:lnSpc>
-                <a:spcPct val="150000"/>
-              </a:lnSpc>
-              <a:buClr>
-                <a:schemeClr val="bg2">
-                  <a:lumMod val="25000"/>
-                </a:schemeClr>
-              </a:buClr>
-            </a:pPr>
-            <a:endParaRPr lang="en-IN" dirty="0">
-              <a:latin typeface="Calibri" panose="020F0502020204030204" pitchFamily="34" charset="0"/>
-              <a:cs typeface="Calibri" panose="020F0502020204030204" pitchFamily="34" charset="0"/>
-            </a:endParaRPr>
-          </a:p>
-        </p:txBody>
-      </p:sp>
-    </p:spTree>
-    <p:extLst>
-      <p:ext uri="{BB962C8B-B14F-4D97-AF65-F5344CB8AC3E}">
-        <p14:creationId xmlns:p14="http://schemas.microsoft.com/office/powerpoint/2010/main" val="3699375884"/>
-      </p:ext>
-    </p:extLst>
-  </p:cSld>
-  <p:clrMapOvr>
-    <a:masterClrMapping/>
-  </p:clrMapOvr>
-</p:sld>
-</file>
-
-<file path=ppt/slides/slide12.xml><?xml version="1.0" encoding="utf-8"?>
-<p:sld xmlns:a="http://schemas.openxmlformats.org/drawingml/2006/main" xmlns:r="http://schemas.openxmlformats.org/officeDocument/2006/relationships" xmlns:p="http://schemas.openxmlformats.org/presentationml/2006/main">
-  <p:cSld>
-    <p:spTree>
-      <p:nvGrpSpPr>
-        <p:cNvPr id="1" name=""/>
-        <p:cNvGrpSpPr/>
-        <p:nvPr/>
-      </p:nvGrpSpPr>
-      <p:grpSpPr>
-        <a:xfrm>
-          <a:off x="0" y="0"/>
-          <a:ext cx="0" cy="0"/>
-          <a:chOff x="0" y="0"/>
-          <a:chExt cx="0" cy="0"/>
-        </a:xfrm>
-      </p:grpSpPr>
-      <p:sp>
-        <p:nvSpPr>
-          <p:cNvPr id="10" name="Rectangle 9"/>
-          <p:cNvSpPr/>
-          <p:nvPr/>
-        </p:nvSpPr>
-        <p:spPr>
-          <a:xfrm>
-            <a:off x="0" y="6509857"/>
-            <a:ext cx="12191999" cy="348143"/>
-          </a:xfrm>
-          <a:prstGeom prst="rect">
-            <a:avLst/>
-          </a:prstGeom>
-          <a:solidFill>
-            <a:schemeClr val="accent3">
-              <a:alpha val="50000"/>
-            </a:schemeClr>
-          </a:solidFill>
-          <a:ln>
-            <a:noFill/>
-          </a:ln>
-        </p:spPr>
-        <p:style>
-          <a:lnRef idx="0">
-            <a:scrgbClr r="0" g="0" b="0"/>
-          </a:lnRef>
-          <a:fillRef idx="0">
-            <a:scrgbClr r="0" g="0" b="0"/>
-          </a:fillRef>
-          <a:effectRef idx="0">
-            <a:scrgbClr r="0" g="0" b="0"/>
-          </a:effectRef>
-          <a:fontRef idx="minor">
-            <a:schemeClr val="lt1"/>
-          </a:fontRef>
-        </p:style>
-        <p:txBody>
-          <a:bodyPr rtlCol="0" anchor="ctr"/>
-          <a:lstStyle/>
-          <a:p>
-            <a:pPr algn="ctr"/>
-            <a:endParaRPr lang="en-IN"/>
-          </a:p>
-        </p:txBody>
-      </p:sp>
-      <p:sp>
-        <p:nvSpPr>
-          <p:cNvPr id="13" name="TextBox 12"/>
-          <p:cNvSpPr txBox="1"/>
-          <p:nvPr/>
-        </p:nvSpPr>
-        <p:spPr>
-          <a:xfrm>
-            <a:off x="0" y="6550223"/>
-            <a:ext cx="12191999" cy="306705"/>
-          </a:xfrm>
-          <a:prstGeom prst="rect">
-            <a:avLst/>
-          </a:prstGeom>
-          <a:noFill/>
-        </p:spPr>
-        <p:txBody>
-          <a:bodyPr wrap="square" rtlCol="0">
-            <a:spAutoFit/>
-          </a:bodyPr>
-          <a:lstStyle/>
-          <a:p>
-            <a:pPr algn="ctr"/>
-            <a:r>
-              <a:rPr lang="en-US" sz="1400" dirty="0">
-                <a:solidFill>
-                  <a:schemeClr val="tx1">
-                    <a:lumMod val="50000"/>
-                    <a:lumOff val="50000"/>
-                  </a:schemeClr>
-                </a:solidFill>
-              </a:rPr>
-              <a:t>11</a:t>
-            </a:r>
-            <a:endParaRPr lang="en-IN" sz="1400" dirty="0">
-              <a:solidFill>
-                <a:schemeClr val="tx1">
-                  <a:lumMod val="50000"/>
-                  <a:lumOff val="50000"/>
-                </a:schemeClr>
-              </a:solidFill>
-            </a:endParaRPr>
-          </a:p>
-        </p:txBody>
-      </p:sp>
-      <p:sp>
-        <p:nvSpPr>
-          <p:cNvPr id="2" name="TextBox 1"/>
-          <p:cNvSpPr txBox="1"/>
-          <p:nvPr/>
-        </p:nvSpPr>
-        <p:spPr>
-          <a:xfrm>
-            <a:off x="0" y="2692874"/>
-            <a:ext cx="12191999" cy="584775"/>
-          </a:xfrm>
-          <a:prstGeom prst="rect">
-            <a:avLst/>
-          </a:prstGeom>
-          <a:noFill/>
-        </p:spPr>
-        <p:txBody>
-          <a:bodyPr wrap="square" rtlCol="0">
-            <a:spAutoFit/>
-          </a:bodyPr>
-          <a:lstStyle/>
-          <a:p>
-            <a:pPr algn="ctr"/>
-            <a:r>
-              <a:rPr lang="en-US" sz="3200" dirty="0">
-                <a:solidFill>
-                  <a:srgbClr val="002060"/>
-                </a:solidFill>
-                <a:latin typeface="Times New Roman" panose="02020603050405020304" pitchFamily="18" charset="0"/>
-                <a:cs typeface="Times New Roman" panose="02020603050405020304" pitchFamily="18" charset="0"/>
-              </a:rPr>
-              <a:t>THANKS</a:t>
-            </a:r>
-            <a:endParaRPr lang="en-IN" sz="3200" dirty="0">
-              <a:solidFill>
-                <a:srgbClr val="002060"/>
-              </a:solidFill>
-              <a:latin typeface="Times New Roman" panose="02020603050405020304" pitchFamily="18" charset="0"/>
-              <a:cs typeface="Times New Roman" panose="02020603050405020304" pitchFamily="18" charset="0"/>
-            </a:endParaRPr>
-          </a:p>
-        </p:txBody>
-      </p:sp>
-    </p:spTree>
-  </p:cSld>
-  <p:clrMapOvr>
-    <a:masterClrMapping/>
-  </p:clrMapOvr>
-</p:sld>
-</file>
-
-<file path=ppt/slides/slide2.xml><?xml version="1.0" encoding="utf-8"?>
-<p:sld xmlns:a="http://schemas.openxmlformats.org/drawingml/2006/main" xmlns:r="http://schemas.openxmlformats.org/officeDocument/2006/relationships" xmlns:p="http://schemas.openxmlformats.org/presentationml/2006/main">
-  <p:cSld>
-    <p:spTree>
-      <p:nvGrpSpPr>
-        <p:cNvPr id="1" name=""/>
-        <p:cNvGrpSpPr/>
-        <p:nvPr/>
-      </p:nvGrpSpPr>
-      <p:grpSpPr>
-        <a:xfrm>
-          <a:off x="0" y="0"/>
-          <a:ext cx="0" cy="0"/>
-          <a:chOff x="0" y="0"/>
-          <a:chExt cx="0" cy="0"/>
-        </a:xfrm>
-      </p:grpSpPr>
-      <p:sp>
-        <p:nvSpPr>
-          <p:cNvPr id="10" name="Rectangle 9"/>
-          <p:cNvSpPr/>
-          <p:nvPr/>
-        </p:nvSpPr>
-        <p:spPr>
-          <a:xfrm>
-            <a:off x="0" y="6509857"/>
-            <a:ext cx="12191999" cy="348143"/>
-          </a:xfrm>
-          <a:prstGeom prst="rect">
-            <a:avLst/>
-          </a:prstGeom>
-          <a:solidFill>
-            <a:schemeClr val="accent3">
-              <a:alpha val="50000"/>
-            </a:schemeClr>
-          </a:solidFill>
-          <a:ln>
-            <a:noFill/>
-          </a:ln>
-        </p:spPr>
-        <p:style>
-          <a:lnRef idx="0">
-            <a:scrgbClr r="0" g="0" b="0"/>
-          </a:lnRef>
-          <a:fillRef idx="0">
-            <a:scrgbClr r="0" g="0" b="0"/>
-          </a:fillRef>
-          <a:effectRef idx="0">
-            <a:scrgbClr r="0" g="0" b="0"/>
-          </a:effectRef>
-          <a:fontRef idx="minor">
-            <a:schemeClr val="lt1"/>
-          </a:fontRef>
-        </p:style>
-        <p:txBody>
-          <a:bodyPr rtlCol="0" anchor="ctr"/>
-          <a:lstStyle/>
-          <a:p>
-            <a:pPr algn="ctr"/>
-            <a:endParaRPr lang="en-IN"/>
-          </a:p>
-        </p:txBody>
-      </p:sp>
-      <p:sp>
-        <p:nvSpPr>
-          <p:cNvPr id="13" name="TextBox 12"/>
-          <p:cNvSpPr txBox="1"/>
-          <p:nvPr/>
-        </p:nvSpPr>
-        <p:spPr>
-          <a:xfrm>
-            <a:off x="0" y="6550223"/>
-            <a:ext cx="12191999" cy="307777"/>
-          </a:xfrm>
-          <a:prstGeom prst="rect">
-            <a:avLst/>
-          </a:prstGeom>
-          <a:noFill/>
-        </p:spPr>
-        <p:txBody>
-          <a:bodyPr wrap="square" rtlCol="0">
-            <a:spAutoFit/>
-          </a:bodyPr>
-          <a:lstStyle/>
-          <a:p>
-            <a:pPr algn="ctr"/>
-            <a:r>
-              <a:rPr lang="en-US" sz="1400" dirty="0">
-                <a:solidFill>
-                  <a:schemeClr val="tx1">
-                    <a:lumMod val="50000"/>
-                    <a:lumOff val="50000"/>
-                  </a:schemeClr>
-                </a:solidFill>
-              </a:rPr>
-              <a:t>03</a:t>
-            </a:r>
-            <a:endParaRPr lang="en-IN" sz="1400" dirty="0">
-              <a:solidFill>
-                <a:schemeClr val="tx1">
-                  <a:lumMod val="50000"/>
-                  <a:lumOff val="50000"/>
-                </a:schemeClr>
-              </a:solidFill>
-            </a:endParaRPr>
-          </a:p>
-        </p:txBody>
-      </p:sp>
-      <p:sp>
-        <p:nvSpPr>
-          <p:cNvPr id="2" name="TextBox 1"/>
-          <p:cNvSpPr txBox="1"/>
-          <p:nvPr/>
-        </p:nvSpPr>
-        <p:spPr>
-          <a:xfrm>
-            <a:off x="0" y="661851"/>
-            <a:ext cx="12191999" cy="584775"/>
-          </a:xfrm>
-          <a:prstGeom prst="rect">
-            <a:avLst/>
-          </a:prstGeom>
-          <a:noFill/>
-        </p:spPr>
-        <p:txBody>
-          <a:bodyPr wrap="square" rtlCol="0">
-            <a:spAutoFit/>
-          </a:bodyPr>
-          <a:lstStyle/>
-          <a:p>
-            <a:pPr algn="ctr"/>
-            <a:r>
-              <a:rPr lang="en-US" sz="3200" dirty="0">
-                <a:solidFill>
-                  <a:srgbClr val="002060"/>
-                </a:solidFill>
-                <a:latin typeface="Times New Roman" panose="02020603050405020304" pitchFamily="18" charset="0"/>
-                <a:cs typeface="Times New Roman" panose="02020603050405020304" pitchFamily="18" charset="0"/>
-              </a:rPr>
-              <a:t>LITERATURE SURVEY</a:t>
-            </a:r>
-            <a:endParaRPr lang="en-IN" sz="3200" dirty="0">
-              <a:solidFill>
-                <a:srgbClr val="002060"/>
-              </a:solidFill>
-              <a:latin typeface="Times New Roman" panose="02020603050405020304" pitchFamily="18" charset="0"/>
-              <a:cs typeface="Times New Roman" panose="02020603050405020304" pitchFamily="18" charset="0"/>
-            </a:endParaRPr>
-          </a:p>
-        </p:txBody>
-      </p:sp>
-      <p:graphicFrame>
-        <p:nvGraphicFramePr>
-          <p:cNvPr id="5" name="Table 5">
-            <a:extLst>
-              <a:ext uri="{FF2B5EF4-FFF2-40B4-BE49-F238E27FC236}">
-                <a16:creationId xmlns:a16="http://schemas.microsoft.com/office/drawing/2014/main" id="{F788887B-3D28-1226-16C8-E6EDAC6CDFDD}"/>
-              </a:ext>
-            </a:extLst>
-          </p:cNvPr>
-          <p:cNvGraphicFramePr>
-            <a:graphicFrameLocks noGrp="1"/>
-          </p:cNvGraphicFramePr>
-          <p:nvPr>
-            <p:extLst>
-              <p:ext uri="{D42A27DB-BD31-4B8C-83A1-F6EECF244321}">
-                <p14:modId xmlns:p14="http://schemas.microsoft.com/office/powerpoint/2010/main" val="4287286393"/>
-              </p:ext>
-            </p:extLst>
-          </p:nvPr>
-        </p:nvGraphicFramePr>
-        <p:xfrm>
-          <a:off x="1818640" y="1710266"/>
-          <a:ext cx="8757920" cy="3434906"/>
-        </p:xfrm>
-        <a:graphic>
-          <a:graphicData uri="http://schemas.openxmlformats.org/drawingml/2006/table">
-            <a:tbl>
-              <a:tblPr firstRow="1" bandRow="1">
-                <a:tableStyleId>{8799B23B-EC83-4686-B30A-512413B5E67A}</a:tableStyleId>
-              </a:tblPr>
-              <a:tblGrid>
-                <a:gridCol w="4378960">
-                  <a:extLst>
-                    <a:ext uri="{9D8B030D-6E8A-4147-A177-3AD203B41FA5}">
-                      <a16:colId xmlns:a16="http://schemas.microsoft.com/office/drawing/2014/main" val="3659069085"/>
-                    </a:ext>
-                  </a:extLst>
-                </a:gridCol>
-                <a:gridCol w="4378960">
-                  <a:extLst>
-                    <a:ext uri="{9D8B030D-6E8A-4147-A177-3AD203B41FA5}">
-                      <a16:colId xmlns:a16="http://schemas.microsoft.com/office/drawing/2014/main" val="3409503166"/>
-                    </a:ext>
-                  </a:extLst>
-                </a:gridCol>
-              </a:tblGrid>
-              <a:tr h="748454">
-                <a:tc>
-                  <a:txBody>
-                    <a:bodyPr/>
-                    <a:lstStyle/>
-                    <a:p>
-                      <a:pPr algn="ctr"/>
-                      <a:r>
-                        <a:rPr lang="en-US" dirty="0">
-                          <a:solidFill>
-                            <a:schemeClr val="tx1">
-                              <a:lumMod val="85000"/>
-                              <a:lumOff val="15000"/>
-                            </a:schemeClr>
-                          </a:solidFill>
-                          <a:latin typeface="Calibri" panose="020F0502020204030204" pitchFamily="34" charset="0"/>
-                          <a:cs typeface="Calibri" panose="020F0502020204030204" pitchFamily="34" charset="0"/>
-                        </a:rPr>
-                        <a:t>Paper Details</a:t>
-                      </a:r>
-                      <a:endParaRPr lang="en-IN" dirty="0">
-                        <a:solidFill>
-                          <a:schemeClr val="tx1">
-                            <a:lumMod val="85000"/>
-                            <a:lumOff val="15000"/>
-                          </a:schemeClr>
-                        </a:solidFill>
-                        <a:latin typeface="Calibri" panose="020F0502020204030204" pitchFamily="34" charset="0"/>
-                        <a:cs typeface="Calibri" panose="020F0502020204030204" pitchFamily="34" charset="0"/>
-                      </a:endParaRPr>
-                    </a:p>
-                  </a:txBody>
-                  <a:tcPr anchor="ctr"/>
-                </a:tc>
-                <a:tc>
-                  <a:txBody>
-                    <a:bodyPr/>
-                    <a:lstStyle/>
-                    <a:p>
-                      <a:pPr algn="ctr"/>
-                      <a:r>
-                        <a:rPr lang="en-US" dirty="0">
-                          <a:solidFill>
-                            <a:schemeClr val="tx1">
-                              <a:lumMod val="85000"/>
-                              <a:lumOff val="15000"/>
-                            </a:schemeClr>
-                          </a:solidFill>
-                          <a:latin typeface="Calibri" panose="020F0502020204030204" pitchFamily="34" charset="0"/>
-                          <a:cs typeface="Calibri" panose="020F0502020204030204" pitchFamily="34" charset="0"/>
-                        </a:rPr>
-                        <a:t>Existing Work</a:t>
-                      </a:r>
-                      <a:endParaRPr lang="en-IN" dirty="0">
-                        <a:solidFill>
-                          <a:schemeClr val="tx1">
-                            <a:lumMod val="85000"/>
-                            <a:lumOff val="15000"/>
-                          </a:schemeClr>
-                        </a:solidFill>
-                        <a:latin typeface="Calibri" panose="020F0502020204030204" pitchFamily="34" charset="0"/>
-                        <a:cs typeface="Calibri" panose="020F0502020204030204" pitchFamily="34" charset="0"/>
-                      </a:endParaRPr>
-                    </a:p>
-                  </a:txBody>
-                  <a:tcPr anchor="ctr"/>
-                </a:tc>
-                <a:extLst>
-                  <a:ext uri="{0D108BD9-81ED-4DB2-BD59-A6C34878D82A}">
-                    <a16:rowId xmlns:a16="http://schemas.microsoft.com/office/drawing/2014/main" val="2884168137"/>
-                  </a:ext>
-                </a:extLst>
-              </a:tr>
-              <a:tr h="1343226">
-                <a:tc>
-                  <a:txBody>
-                    <a:bodyPr/>
-                    <a:lstStyle/>
-                    <a:p>
-                      <a:r>
-                        <a:rPr lang="en-US" sz="1400" b="1" kern="1200" dirty="0">
-                          <a:solidFill>
-                            <a:schemeClr val="tx1"/>
-                          </a:solidFill>
-                          <a:effectLst/>
-                          <a:latin typeface="Calibri" panose="020F0502020204030204" pitchFamily="34" charset="0"/>
-                          <a:ea typeface="+mn-ea"/>
-                          <a:cs typeface="Calibri" panose="020F0502020204030204" pitchFamily="34" charset="0"/>
-                        </a:rPr>
-                        <a:t>“</a:t>
-                      </a:r>
-                      <a:r>
-                        <a:rPr lang="en-IN" sz="1400" b="1" i="0" kern="1200" dirty="0">
-                          <a:solidFill>
-                            <a:schemeClr val="tx1"/>
-                          </a:solidFill>
-                          <a:effectLst/>
-                          <a:latin typeface="Calibri" panose="020F0502020204030204" pitchFamily="34" charset="0"/>
-                          <a:ea typeface="+mn-ea"/>
-                          <a:cs typeface="Calibri" panose="020F0502020204030204" pitchFamily="34" charset="0"/>
-                        </a:rPr>
-                        <a:t>Smart Local Shopping System</a:t>
-                      </a:r>
-                      <a:r>
-                        <a:rPr lang="en-US" sz="1400" b="1" kern="1200" dirty="0">
-                          <a:solidFill>
-                            <a:schemeClr val="tx1"/>
-                          </a:solidFill>
-                          <a:effectLst/>
-                          <a:latin typeface="Calibri" panose="020F0502020204030204" pitchFamily="34" charset="0"/>
-                          <a:ea typeface="+mn-ea"/>
-                          <a:cs typeface="Calibri" panose="020F0502020204030204" pitchFamily="34" charset="0"/>
-                        </a:rPr>
-                        <a:t>”</a:t>
-                      </a:r>
-                      <a:r>
-                        <a:rPr lang="en-US" sz="1400" kern="1200" dirty="0">
-                          <a:solidFill>
-                            <a:schemeClr val="tx1"/>
-                          </a:solidFill>
-                          <a:effectLst/>
-                          <a:latin typeface="Calibri" panose="020F0502020204030204" pitchFamily="34" charset="0"/>
-                          <a:ea typeface="+mn-ea"/>
-                          <a:cs typeface="Calibri" panose="020F0502020204030204" pitchFamily="34" charset="0"/>
-                        </a:rPr>
-                        <a:t>, </a:t>
-                      </a:r>
-                      <a:r>
-                        <a:rPr lang="en-IN" sz="1400" kern="1200" dirty="0">
-                          <a:solidFill>
-                            <a:schemeClr val="tx1"/>
-                          </a:solidFill>
-                          <a:effectLst/>
-                          <a:latin typeface="Calibri" panose="020F0502020204030204" pitchFamily="34" charset="0"/>
-                          <a:ea typeface="+mn-ea"/>
-                          <a:cs typeface="Calibri" panose="020F0502020204030204" pitchFamily="34" charset="0"/>
-                        </a:rPr>
-                        <a:t>Rohan </a:t>
-                      </a:r>
-                      <a:r>
-                        <a:rPr lang="en-IN" sz="1400" kern="1200" dirty="0" err="1">
-                          <a:solidFill>
-                            <a:schemeClr val="tx1"/>
-                          </a:solidFill>
-                          <a:effectLst/>
-                          <a:latin typeface="Calibri" panose="020F0502020204030204" pitchFamily="34" charset="0"/>
-                          <a:ea typeface="+mn-ea"/>
-                          <a:cs typeface="Calibri" panose="020F0502020204030204" pitchFamily="34" charset="0"/>
-                        </a:rPr>
-                        <a:t>Padaya</a:t>
-                      </a:r>
-                      <a:r>
-                        <a:rPr lang="en-IN" sz="1400" kern="1200" dirty="0">
-                          <a:solidFill>
-                            <a:schemeClr val="tx1"/>
-                          </a:solidFill>
-                          <a:effectLst/>
-                          <a:latin typeface="Calibri" panose="020F0502020204030204" pitchFamily="34" charset="0"/>
-                          <a:ea typeface="+mn-ea"/>
-                          <a:cs typeface="Calibri" panose="020F0502020204030204" pitchFamily="34" charset="0"/>
-                        </a:rPr>
-                        <a:t>, IEEE(2018).</a:t>
-                      </a:r>
-                      <a:endParaRPr lang="en-IN" sz="1400" dirty="0">
-                        <a:latin typeface="Calibri" panose="020F0502020204030204" pitchFamily="34" charset="0"/>
-                        <a:cs typeface="Calibri" panose="020F0502020204030204" pitchFamily="34" charset="0"/>
-                      </a:endParaRPr>
-                    </a:p>
-                  </a:txBody>
-                  <a:tcPr anchor="ctr"/>
-                </a:tc>
-                <a:tc>
-                  <a:txBody>
-                    <a:bodyPr/>
-                    <a:lstStyle/>
-                    <a:p>
-                      <a:pPr algn="just"/>
-                      <a:r>
-                        <a:rPr lang="en-US" sz="1400" b="0" dirty="0"/>
-                        <a:t>This paper's goal is to improve e-commerce marketing and push delivery using huge data from recent consumer search texts. In this work, the Word2vector technique is employed to analyze the big data.</a:t>
-                      </a:r>
-                      <a:endParaRPr lang="en-IN" sz="1400" b="0" dirty="0"/>
-                    </a:p>
-                  </a:txBody>
-                  <a:tcPr anchor="ctr"/>
-                </a:tc>
-                <a:extLst>
-                  <a:ext uri="{0D108BD9-81ED-4DB2-BD59-A6C34878D82A}">
-                    <a16:rowId xmlns:a16="http://schemas.microsoft.com/office/drawing/2014/main" val="877463710"/>
-                  </a:ext>
-                </a:extLst>
-              </a:tr>
-              <a:tr h="1343226">
-                <a:tc>
-                  <a:txBody>
-                    <a:bodyPr/>
-                    <a:lstStyle/>
-                    <a:p>
-                      <a:r>
-                        <a:rPr lang="en-US" sz="1400" b="1" kern="1200" dirty="0">
-                          <a:solidFill>
-                            <a:schemeClr val="tx1"/>
-                          </a:solidFill>
-                          <a:effectLst/>
-                          <a:latin typeface="Calibri" panose="020F0502020204030204" pitchFamily="34" charset="0"/>
-                          <a:ea typeface="+mn-ea"/>
-                          <a:cs typeface="Calibri" panose="020F0502020204030204" pitchFamily="34" charset="0"/>
-                        </a:rPr>
-                        <a:t>“Design and implementation of e-commerce system based on the Web”</a:t>
-                      </a:r>
-                      <a:r>
-                        <a:rPr lang="en-US" sz="1400" kern="1200" dirty="0">
-                          <a:solidFill>
-                            <a:schemeClr val="tx1"/>
-                          </a:solidFill>
-                          <a:effectLst/>
-                          <a:latin typeface="Calibri" panose="020F0502020204030204" pitchFamily="34" charset="0"/>
-                          <a:ea typeface="+mn-ea"/>
-                          <a:cs typeface="Calibri" panose="020F0502020204030204" pitchFamily="34" charset="0"/>
-                        </a:rPr>
-                        <a:t>,</a:t>
-                      </a:r>
-                      <a:r>
-                        <a:rPr lang="en-IN" sz="1400" kern="1200" dirty="0">
-                          <a:solidFill>
-                            <a:schemeClr val="tx1"/>
-                          </a:solidFill>
-                          <a:effectLst/>
-                          <a:latin typeface="Calibri" panose="020F0502020204030204" pitchFamily="34" charset="0"/>
-                          <a:ea typeface="+mn-ea"/>
-                          <a:cs typeface="Calibri" panose="020F0502020204030204" pitchFamily="34" charset="0"/>
-                        </a:rPr>
-                        <a:t> He </a:t>
-                      </a:r>
-                      <a:r>
-                        <a:rPr lang="en-IN" sz="1400" kern="1200" dirty="0" err="1">
-                          <a:solidFill>
-                            <a:schemeClr val="tx1"/>
-                          </a:solidFill>
-                          <a:effectLst/>
-                          <a:latin typeface="Calibri" panose="020F0502020204030204" pitchFamily="34" charset="0"/>
-                          <a:ea typeface="+mn-ea"/>
-                          <a:cs typeface="Calibri" panose="020F0502020204030204" pitchFamily="34" charset="0"/>
-                        </a:rPr>
-                        <a:t>JunHua</a:t>
-                      </a:r>
-                      <a:r>
-                        <a:rPr lang="en-IN" sz="1400" kern="1200" dirty="0">
-                          <a:solidFill>
-                            <a:schemeClr val="tx1"/>
-                          </a:solidFill>
-                          <a:effectLst/>
-                          <a:latin typeface="Calibri" panose="020F0502020204030204" pitchFamily="34" charset="0"/>
-                          <a:ea typeface="+mn-ea"/>
-                          <a:cs typeface="Calibri" panose="020F0502020204030204" pitchFamily="34" charset="0"/>
-                        </a:rPr>
-                        <a:t> , IEEE(2022).</a:t>
-                      </a:r>
-                      <a:endParaRPr lang="en-IN" sz="1400" dirty="0">
-                        <a:latin typeface="Calibri" panose="020F0502020204030204" pitchFamily="34" charset="0"/>
-                        <a:cs typeface="Calibri" panose="020F0502020204030204" pitchFamily="34" charset="0"/>
-                      </a:endParaRPr>
-                    </a:p>
-                  </a:txBody>
-                  <a:tcPr anchor="ctr"/>
-                </a:tc>
-                <a:tc>
-                  <a:txBody>
-                    <a:bodyPr/>
-                    <a:lstStyle/>
-                    <a:p>
-                      <a:pPr algn="just"/>
-                      <a:r>
-                        <a:rPr lang="en-US" sz="1400" b="0" dirty="0"/>
-                        <a:t>The proposal is a platform for store owners to advertise their goods and services to regular customers. This is a middleware solution between store owners and customers that serves as a  system of recommendations.</a:t>
-                      </a:r>
-                      <a:endParaRPr lang="en-IN" sz="1400" b="0" dirty="0"/>
-                    </a:p>
-                  </a:txBody>
-                  <a:tcPr anchor="ctr"/>
-                </a:tc>
-                <a:extLst>
-                  <a:ext uri="{0D108BD9-81ED-4DB2-BD59-A6C34878D82A}">
-                    <a16:rowId xmlns:a16="http://schemas.microsoft.com/office/drawing/2014/main" val="28950705"/>
-                  </a:ext>
-                </a:extLst>
-              </a:tr>
-            </a:tbl>
-          </a:graphicData>
-        </a:graphic>
-      </p:graphicFrame>
-    </p:spTree>
-    <p:extLst>
-      <p:ext uri="{BB962C8B-B14F-4D97-AF65-F5344CB8AC3E}">
-        <p14:creationId xmlns:p14="http://schemas.microsoft.com/office/powerpoint/2010/main" val="3101795224"/>
-      </p:ext>
-    </p:extLst>
-  </p:cSld>
-  <p:clrMapOvr>
-    <a:masterClrMapping/>
-  </p:clrMapOvr>
-</p:sld>
-</file>
-
-<file path=ppt/slides/slide3.xml><?xml version="1.0" encoding="utf-8"?>
-<p:sld xmlns:a="http://schemas.openxmlformats.org/drawingml/2006/main" xmlns:r="http://schemas.openxmlformats.org/officeDocument/2006/relationships" xmlns:p="http://schemas.openxmlformats.org/presentationml/2006/main">
-  <p:cSld>
-    <p:spTree>
-      <p:nvGrpSpPr>
-        <p:cNvPr id="1" name=""/>
-        <p:cNvGrpSpPr/>
-        <p:nvPr/>
-      </p:nvGrpSpPr>
-      <p:grpSpPr>
-        <a:xfrm>
-          <a:off x="0" y="0"/>
-          <a:ext cx="0" cy="0"/>
-          <a:chOff x="0" y="0"/>
-          <a:chExt cx="0" cy="0"/>
-        </a:xfrm>
-      </p:grpSpPr>
-      <p:sp>
-        <p:nvSpPr>
-          <p:cNvPr id="10" name="Rectangle 9"/>
-          <p:cNvSpPr/>
-          <p:nvPr/>
-        </p:nvSpPr>
-        <p:spPr>
-          <a:xfrm>
-            <a:off x="0" y="6509857"/>
-            <a:ext cx="12191999" cy="348143"/>
-          </a:xfrm>
-          <a:prstGeom prst="rect">
-            <a:avLst/>
-          </a:prstGeom>
-          <a:solidFill>
-            <a:schemeClr val="accent3">
-              <a:alpha val="50000"/>
-            </a:schemeClr>
-          </a:solidFill>
-          <a:ln>
-            <a:noFill/>
-          </a:ln>
-        </p:spPr>
-        <p:style>
-          <a:lnRef idx="0">
-            <a:scrgbClr r="0" g="0" b="0"/>
-          </a:lnRef>
-          <a:fillRef idx="0">
-            <a:scrgbClr r="0" g="0" b="0"/>
-          </a:fillRef>
-          <a:effectRef idx="0">
-            <a:scrgbClr r="0" g="0" b="0"/>
-          </a:effectRef>
-          <a:fontRef idx="minor">
-            <a:schemeClr val="lt1"/>
-          </a:fontRef>
-        </p:style>
-        <p:txBody>
-          <a:bodyPr rtlCol="0" anchor="ctr"/>
-          <a:lstStyle/>
-          <a:p>
-            <a:pPr algn="ctr"/>
-            <a:endParaRPr lang="en-IN"/>
-          </a:p>
-        </p:txBody>
-      </p:sp>
-      <p:sp>
-        <p:nvSpPr>
-          <p:cNvPr id="13" name="TextBox 12"/>
-          <p:cNvSpPr txBox="1"/>
-          <p:nvPr/>
-        </p:nvSpPr>
-        <p:spPr>
-          <a:xfrm>
-            <a:off x="0" y="6550223"/>
-            <a:ext cx="12191999" cy="307777"/>
-          </a:xfrm>
-          <a:prstGeom prst="rect">
-            <a:avLst/>
-          </a:prstGeom>
-          <a:noFill/>
-        </p:spPr>
-        <p:txBody>
-          <a:bodyPr wrap="square" rtlCol="0">
-            <a:spAutoFit/>
-          </a:bodyPr>
-          <a:lstStyle/>
-          <a:p>
-            <a:pPr algn="ctr"/>
-            <a:r>
-              <a:rPr lang="en-US" sz="1400" dirty="0">
-                <a:solidFill>
-                  <a:schemeClr val="tx1">
-                    <a:lumMod val="50000"/>
-                    <a:lumOff val="50000"/>
-                  </a:schemeClr>
-                </a:solidFill>
-              </a:rPr>
-              <a:t>01</a:t>
-            </a:r>
-            <a:endParaRPr lang="en-IN" sz="1400" dirty="0">
-              <a:solidFill>
-                <a:schemeClr val="tx1">
-                  <a:lumMod val="50000"/>
-                  <a:lumOff val="50000"/>
-                </a:schemeClr>
-              </a:solidFill>
-            </a:endParaRPr>
-          </a:p>
-        </p:txBody>
-      </p:sp>
-      <p:sp>
-        <p:nvSpPr>
-          <p:cNvPr id="2" name="TextBox 1"/>
-          <p:cNvSpPr txBox="1"/>
-          <p:nvPr/>
-        </p:nvSpPr>
-        <p:spPr>
-          <a:xfrm>
-            <a:off x="0" y="661851"/>
-            <a:ext cx="12191999" cy="584775"/>
-          </a:xfrm>
-          <a:prstGeom prst="rect">
-            <a:avLst/>
-          </a:prstGeom>
-          <a:noFill/>
-        </p:spPr>
-        <p:txBody>
-          <a:bodyPr wrap="square" rtlCol="0">
-            <a:spAutoFit/>
-          </a:bodyPr>
-          <a:lstStyle/>
-          <a:p>
-            <a:pPr algn="ctr"/>
-            <a:r>
-              <a:rPr lang="en-US" sz="3200" dirty="0">
-                <a:solidFill>
-                  <a:srgbClr val="002060"/>
-                </a:solidFill>
-                <a:latin typeface="Times New Roman" panose="02020603050405020304" pitchFamily="18" charset="0"/>
-                <a:cs typeface="Times New Roman" panose="02020603050405020304" pitchFamily="18" charset="0"/>
-              </a:rPr>
-              <a:t>LITERATURE SURVEY</a:t>
-            </a:r>
-            <a:endParaRPr lang="en-IN" sz="3200" dirty="0">
-              <a:solidFill>
-                <a:srgbClr val="002060"/>
-              </a:solidFill>
-              <a:latin typeface="Times New Roman" panose="02020603050405020304" pitchFamily="18" charset="0"/>
-              <a:cs typeface="Times New Roman" panose="02020603050405020304" pitchFamily="18" charset="0"/>
-            </a:endParaRPr>
-          </a:p>
-        </p:txBody>
-      </p:sp>
-      <p:graphicFrame>
-        <p:nvGraphicFramePr>
-          <p:cNvPr id="5" name="Table 5">
-            <a:extLst>
-              <a:ext uri="{FF2B5EF4-FFF2-40B4-BE49-F238E27FC236}">
-                <a16:creationId xmlns:a16="http://schemas.microsoft.com/office/drawing/2014/main" id="{F788887B-3D28-1226-16C8-E6EDAC6CDFDD}"/>
-              </a:ext>
-            </a:extLst>
-          </p:cNvPr>
-          <p:cNvGraphicFramePr>
-            <a:graphicFrameLocks noGrp="1"/>
-          </p:cNvGraphicFramePr>
-          <p:nvPr>
-            <p:extLst>
-              <p:ext uri="{D42A27DB-BD31-4B8C-83A1-F6EECF244321}">
-                <p14:modId xmlns:p14="http://schemas.microsoft.com/office/powerpoint/2010/main" val="3262349484"/>
-              </p:ext>
-            </p:extLst>
-          </p:nvPr>
-        </p:nvGraphicFramePr>
-        <p:xfrm>
-          <a:off x="1818640" y="1710266"/>
-          <a:ext cx="8757920" cy="3434906"/>
-        </p:xfrm>
-        <a:graphic>
-          <a:graphicData uri="http://schemas.openxmlformats.org/drawingml/2006/table">
-            <a:tbl>
-              <a:tblPr firstRow="1" bandRow="1">
-                <a:tableStyleId>{8799B23B-EC83-4686-B30A-512413B5E67A}</a:tableStyleId>
-              </a:tblPr>
-              <a:tblGrid>
-                <a:gridCol w="4378960">
-                  <a:extLst>
-                    <a:ext uri="{9D8B030D-6E8A-4147-A177-3AD203B41FA5}">
-                      <a16:colId xmlns:a16="http://schemas.microsoft.com/office/drawing/2014/main" val="3659069085"/>
-                    </a:ext>
-                  </a:extLst>
-                </a:gridCol>
-                <a:gridCol w="4378960">
-                  <a:extLst>
-                    <a:ext uri="{9D8B030D-6E8A-4147-A177-3AD203B41FA5}">
-                      <a16:colId xmlns:a16="http://schemas.microsoft.com/office/drawing/2014/main" val="3409503166"/>
-                    </a:ext>
-                  </a:extLst>
-                </a:gridCol>
-              </a:tblGrid>
-              <a:tr h="748454">
-                <a:tc>
-                  <a:txBody>
-                    <a:bodyPr/>
-                    <a:lstStyle/>
-                    <a:p>
-                      <a:pPr algn="ctr"/>
-                      <a:r>
-                        <a:rPr lang="en-US" dirty="0">
-                          <a:solidFill>
-                            <a:schemeClr val="tx1">
-                              <a:lumMod val="85000"/>
-                              <a:lumOff val="15000"/>
-                            </a:schemeClr>
-                          </a:solidFill>
-                          <a:latin typeface="Calibri" panose="020F0502020204030204" pitchFamily="34" charset="0"/>
-                          <a:cs typeface="Calibri" panose="020F0502020204030204" pitchFamily="34" charset="0"/>
-                        </a:rPr>
-                        <a:t>Paper Details</a:t>
-                      </a:r>
-                      <a:endParaRPr lang="en-IN" dirty="0">
-                        <a:solidFill>
-                          <a:schemeClr val="tx1">
-                            <a:lumMod val="85000"/>
-                            <a:lumOff val="15000"/>
-                          </a:schemeClr>
-                        </a:solidFill>
-                        <a:latin typeface="Calibri" panose="020F0502020204030204" pitchFamily="34" charset="0"/>
-                        <a:cs typeface="Calibri" panose="020F0502020204030204" pitchFamily="34" charset="0"/>
-                      </a:endParaRPr>
-                    </a:p>
-                  </a:txBody>
-                  <a:tcPr anchor="ctr"/>
-                </a:tc>
-                <a:tc>
-                  <a:txBody>
-                    <a:bodyPr/>
-                    <a:lstStyle/>
-                    <a:p>
-                      <a:pPr algn="ctr"/>
-                      <a:r>
-                        <a:rPr lang="en-US" dirty="0">
-                          <a:solidFill>
-                            <a:schemeClr val="tx1">
-                              <a:lumMod val="85000"/>
-                              <a:lumOff val="15000"/>
-                            </a:schemeClr>
-                          </a:solidFill>
-                          <a:latin typeface="Calibri" panose="020F0502020204030204" pitchFamily="34" charset="0"/>
-                          <a:cs typeface="Calibri" panose="020F0502020204030204" pitchFamily="34" charset="0"/>
-                        </a:rPr>
-                        <a:t>Existing Work</a:t>
-                      </a:r>
-                      <a:endParaRPr lang="en-IN" dirty="0">
-                        <a:solidFill>
-                          <a:schemeClr val="tx1">
-                            <a:lumMod val="85000"/>
-                            <a:lumOff val="15000"/>
-                          </a:schemeClr>
-                        </a:solidFill>
-                        <a:latin typeface="Calibri" panose="020F0502020204030204" pitchFamily="34" charset="0"/>
-                        <a:cs typeface="Calibri" panose="020F0502020204030204" pitchFamily="34" charset="0"/>
-                      </a:endParaRPr>
-                    </a:p>
-                  </a:txBody>
-                  <a:tcPr anchor="ctr"/>
-                </a:tc>
-                <a:extLst>
-                  <a:ext uri="{0D108BD9-81ED-4DB2-BD59-A6C34878D82A}">
-                    <a16:rowId xmlns:a16="http://schemas.microsoft.com/office/drawing/2014/main" val="2884168137"/>
-                  </a:ext>
-                </a:extLst>
-              </a:tr>
-              <a:tr h="1343226">
-                <a:tc>
-                  <a:txBody>
-                    <a:bodyPr/>
-                    <a:lstStyle/>
-                    <a:p>
-                      <a:r>
-                        <a:rPr lang="en-US" sz="1400" b="1" kern="1200" dirty="0">
-                          <a:solidFill>
-                            <a:schemeClr val="tx1"/>
-                          </a:solidFill>
-                          <a:effectLst/>
-                          <a:latin typeface="Calibri" panose="020F0502020204030204" pitchFamily="34" charset="0"/>
-                          <a:ea typeface="+mn-ea"/>
-                          <a:cs typeface="Calibri" panose="020F0502020204030204" pitchFamily="34" charset="0"/>
-                        </a:rPr>
-                        <a:t>“Accurate delivery analysis of distributed e-commerce </a:t>
-                      </a:r>
-                      <a:endParaRPr lang="en-US" sz="1400" b="1" dirty="0">
-                        <a:latin typeface="Calibri" panose="020F0502020204030204" pitchFamily="34" charset="0"/>
-                        <a:cs typeface="Calibri" panose="020F0502020204030204" pitchFamily="34" charset="0"/>
-                      </a:endParaRPr>
-                    </a:p>
-                    <a:p>
-                      <a:r>
-                        <a:rPr lang="en-US" sz="1400" b="1" kern="1200" dirty="0">
-                          <a:solidFill>
-                            <a:schemeClr val="tx1"/>
-                          </a:solidFill>
-                          <a:effectLst/>
-                          <a:latin typeface="Calibri" panose="020F0502020204030204" pitchFamily="34" charset="0"/>
-                          <a:ea typeface="+mn-ea"/>
-                          <a:cs typeface="Calibri" panose="020F0502020204030204" pitchFamily="34" charset="0"/>
-                        </a:rPr>
-                        <a:t>based on Word2vector”</a:t>
-                      </a:r>
-                      <a:r>
-                        <a:rPr lang="en-US" sz="1400" kern="1200" dirty="0">
-                          <a:solidFill>
-                            <a:schemeClr val="tx1"/>
-                          </a:solidFill>
-                          <a:effectLst/>
-                          <a:latin typeface="Calibri" panose="020F0502020204030204" pitchFamily="34" charset="0"/>
-                          <a:ea typeface="+mn-ea"/>
-                          <a:cs typeface="Calibri" panose="020F0502020204030204" pitchFamily="34" charset="0"/>
-                        </a:rPr>
-                        <a:t>, </a:t>
-                      </a:r>
-                      <a:r>
-                        <a:rPr lang="en-IN" sz="1400" kern="1200" dirty="0">
-                          <a:solidFill>
-                            <a:schemeClr val="tx1"/>
-                          </a:solidFill>
-                          <a:effectLst/>
-                          <a:latin typeface="Calibri" panose="020F0502020204030204" pitchFamily="34" charset="0"/>
-                          <a:ea typeface="+mn-ea"/>
-                          <a:cs typeface="Calibri" panose="020F0502020204030204" pitchFamily="34" charset="0"/>
-                        </a:rPr>
-                        <a:t>Lin Long, IEEE(2019).</a:t>
-                      </a:r>
-                      <a:endParaRPr lang="en-IN" sz="1400" dirty="0">
-                        <a:latin typeface="Calibri" panose="020F0502020204030204" pitchFamily="34" charset="0"/>
-                        <a:cs typeface="Calibri" panose="020F0502020204030204" pitchFamily="34" charset="0"/>
-                      </a:endParaRPr>
-                    </a:p>
-                  </a:txBody>
-                  <a:tcPr anchor="ctr"/>
-                </a:tc>
-                <a:tc>
-                  <a:txBody>
-                    <a:bodyPr/>
-                    <a:lstStyle/>
-                    <a:p>
-                      <a:pPr algn="just"/>
-                      <a:r>
-                        <a:rPr lang="en-US" sz="1400" b="0" dirty="0"/>
-                        <a:t>This paper's goal is to improve e-commerce marketing and push delivery using huge data from recent consumer search texts. In this work, the Word2vector technique is employed to analyze the big data.</a:t>
-                      </a:r>
-                      <a:endParaRPr lang="en-IN" sz="1400" b="0" dirty="0"/>
-                    </a:p>
-                  </a:txBody>
-                  <a:tcPr anchor="ctr"/>
-                </a:tc>
-                <a:extLst>
-                  <a:ext uri="{0D108BD9-81ED-4DB2-BD59-A6C34878D82A}">
-                    <a16:rowId xmlns:a16="http://schemas.microsoft.com/office/drawing/2014/main" val="877463710"/>
-                  </a:ext>
-                </a:extLst>
-              </a:tr>
-              <a:tr h="1343226">
-                <a:tc>
-                  <a:txBody>
-                    <a:bodyPr/>
-                    <a:lstStyle/>
-                    <a:p>
-                      <a:r>
-                        <a:rPr lang="en-US" sz="1400" b="1" kern="1200" dirty="0">
-                          <a:solidFill>
-                            <a:schemeClr val="tx1"/>
-                          </a:solidFill>
-                          <a:effectLst/>
-                          <a:latin typeface="Calibri" panose="020F0502020204030204" pitchFamily="34" charset="0"/>
-                          <a:ea typeface="+mn-ea"/>
-                          <a:cs typeface="Calibri" panose="020F0502020204030204" pitchFamily="34" charset="0"/>
-                        </a:rPr>
-                        <a:t>“Customer Demanding Products In Online Shopping</a:t>
-                      </a:r>
-                      <a:endParaRPr lang="en-US" sz="1400" b="1" dirty="0">
-                        <a:latin typeface="Calibri" panose="020F0502020204030204" pitchFamily="34" charset="0"/>
-                        <a:cs typeface="Calibri" panose="020F0502020204030204" pitchFamily="34" charset="0"/>
-                      </a:endParaRPr>
-                    </a:p>
-                    <a:p>
-                      <a:r>
-                        <a:rPr lang="en-US" sz="1400" b="1" kern="1200" dirty="0">
-                          <a:solidFill>
-                            <a:schemeClr val="tx1"/>
-                          </a:solidFill>
-                          <a:effectLst/>
-                          <a:latin typeface="Calibri" panose="020F0502020204030204" pitchFamily="34" charset="0"/>
-                          <a:ea typeface="+mn-ea"/>
-                          <a:cs typeface="Calibri" panose="020F0502020204030204" pitchFamily="34" charset="0"/>
-                        </a:rPr>
-                        <a:t>A Novel Framework ”</a:t>
-                      </a:r>
-                      <a:r>
-                        <a:rPr lang="en-US" sz="1400" kern="1200" dirty="0">
-                          <a:solidFill>
-                            <a:schemeClr val="tx1"/>
-                          </a:solidFill>
-                          <a:effectLst/>
-                          <a:latin typeface="Calibri" panose="020F0502020204030204" pitchFamily="34" charset="0"/>
-                          <a:ea typeface="+mn-ea"/>
-                          <a:cs typeface="Calibri" panose="020F0502020204030204" pitchFamily="34" charset="0"/>
-                        </a:rPr>
-                        <a:t>,</a:t>
-                      </a:r>
-                      <a:r>
-                        <a:rPr lang="en-IN" sz="1800" kern="1200" dirty="0">
-                          <a:solidFill>
-                            <a:schemeClr val="tx1"/>
-                          </a:solidFill>
-                          <a:effectLst/>
-                          <a:latin typeface="+mn-lt"/>
-                          <a:ea typeface="+mn-ea"/>
-                          <a:cs typeface="+mn-cs"/>
-                        </a:rPr>
-                        <a:t> </a:t>
-                      </a:r>
-                      <a:r>
-                        <a:rPr lang="en-IN" sz="1400" kern="1200" dirty="0" err="1">
-                          <a:solidFill>
-                            <a:schemeClr val="tx1"/>
-                          </a:solidFill>
-                          <a:effectLst/>
-                          <a:latin typeface="Calibri" panose="020F0502020204030204" pitchFamily="34" charset="0"/>
-                          <a:ea typeface="+mn-ea"/>
-                          <a:cs typeface="Calibri" panose="020F0502020204030204" pitchFamily="34" charset="0"/>
-                        </a:rPr>
-                        <a:t>Yogananth</a:t>
-                      </a:r>
-                      <a:r>
-                        <a:rPr lang="en-IN" sz="1400" kern="1200" dirty="0">
-                          <a:solidFill>
-                            <a:schemeClr val="tx1"/>
-                          </a:solidFill>
-                          <a:effectLst/>
-                          <a:latin typeface="Calibri" panose="020F0502020204030204" pitchFamily="34" charset="0"/>
-                          <a:ea typeface="+mn-ea"/>
-                          <a:cs typeface="Calibri" panose="020F0502020204030204" pitchFamily="34" charset="0"/>
-                        </a:rPr>
-                        <a:t>, IEEE(2017).</a:t>
-                      </a:r>
-                      <a:endParaRPr lang="en-IN" sz="1400" dirty="0">
-                        <a:latin typeface="Calibri" panose="020F0502020204030204" pitchFamily="34" charset="0"/>
-                        <a:cs typeface="Calibri" panose="020F0502020204030204" pitchFamily="34" charset="0"/>
-                      </a:endParaRPr>
-                    </a:p>
-                  </a:txBody>
-                  <a:tcPr anchor="ctr"/>
-                </a:tc>
-                <a:tc>
-                  <a:txBody>
-                    <a:bodyPr/>
-                    <a:lstStyle/>
-                    <a:p>
-                      <a:pPr algn="just"/>
-                      <a:r>
-                        <a:rPr lang="en-US" sz="1400" b="0" dirty="0"/>
-                        <a:t>The goal of the task is to develop an interface that will allow users to shop online by placing bids on the items they want to buy and then buying those items. Any seller that receives a sufficient bid rate may sell the item.</a:t>
-                      </a:r>
-                      <a:endParaRPr lang="en-IN" sz="1400" b="0" dirty="0"/>
-                    </a:p>
-                  </a:txBody>
-                  <a:tcPr anchor="ctr"/>
-                </a:tc>
-                <a:extLst>
-                  <a:ext uri="{0D108BD9-81ED-4DB2-BD59-A6C34878D82A}">
-                    <a16:rowId xmlns:a16="http://schemas.microsoft.com/office/drawing/2014/main" val="28950705"/>
-                  </a:ext>
-                </a:extLst>
-              </a:tr>
-            </a:tbl>
-          </a:graphicData>
-        </a:graphic>
-      </p:graphicFrame>
-    </p:spTree>
-  </p:cSld>
-  <p:clrMapOvr>
-    <a:masterClrMapping/>
-  </p:clrMapOvr>
-</p:sld>
-</file>
-
-<file path=ppt/slides/slide4.xml><?xml version="1.0" encoding="utf-8"?>
-<p:sld xmlns:a="http://schemas.openxmlformats.org/drawingml/2006/main" xmlns:r="http://schemas.openxmlformats.org/officeDocument/2006/relationships" xmlns:p="http://schemas.openxmlformats.org/presentationml/2006/main">
-  <p:cSld>
-    <p:spTree>
-      <p:nvGrpSpPr>
-        <p:cNvPr id="1" name=""/>
-        <p:cNvGrpSpPr/>
-        <p:nvPr/>
-      </p:nvGrpSpPr>
-      <p:grpSpPr>
-        <a:xfrm>
-          <a:off x="0" y="0"/>
-          <a:ext cx="0" cy="0"/>
-          <a:chOff x="0" y="0"/>
-          <a:chExt cx="0" cy="0"/>
-        </a:xfrm>
-      </p:grpSpPr>
-      <p:sp>
-        <p:nvSpPr>
-          <p:cNvPr id="10" name="Rectangle 9"/>
-          <p:cNvSpPr/>
-          <p:nvPr/>
-        </p:nvSpPr>
-        <p:spPr>
-          <a:xfrm>
-            <a:off x="0" y="6509857"/>
-            <a:ext cx="12191999" cy="348143"/>
-          </a:xfrm>
-          <a:prstGeom prst="rect">
-            <a:avLst/>
-          </a:prstGeom>
-          <a:solidFill>
-            <a:schemeClr val="accent3">
-              <a:alpha val="50000"/>
-            </a:schemeClr>
-          </a:solidFill>
-          <a:ln>
-            <a:noFill/>
-          </a:ln>
-        </p:spPr>
-        <p:style>
-          <a:lnRef idx="0">
-            <a:scrgbClr r="0" g="0" b="0"/>
-          </a:lnRef>
-          <a:fillRef idx="0">
-            <a:scrgbClr r="0" g="0" b="0"/>
-          </a:fillRef>
-          <a:effectRef idx="0">
-            <a:scrgbClr r="0" g="0" b="0"/>
-          </a:effectRef>
-          <a:fontRef idx="minor">
-            <a:schemeClr val="lt1"/>
-          </a:fontRef>
-        </p:style>
-        <p:txBody>
-          <a:bodyPr rtlCol="0" anchor="ctr"/>
-          <a:lstStyle/>
-          <a:p>
-            <a:pPr algn="ctr"/>
-            <a:endParaRPr lang="en-IN"/>
-          </a:p>
-        </p:txBody>
-      </p:sp>
-      <p:sp>
-        <p:nvSpPr>
-          <p:cNvPr id="13" name="TextBox 12"/>
-          <p:cNvSpPr txBox="1"/>
-          <p:nvPr/>
-        </p:nvSpPr>
-        <p:spPr>
-          <a:xfrm>
-            <a:off x="0" y="6550223"/>
-            <a:ext cx="12191999" cy="307777"/>
-          </a:xfrm>
-          <a:prstGeom prst="rect">
-            <a:avLst/>
-          </a:prstGeom>
-          <a:noFill/>
-        </p:spPr>
-        <p:txBody>
-          <a:bodyPr wrap="square" rtlCol="0">
-            <a:spAutoFit/>
-          </a:bodyPr>
-          <a:lstStyle/>
-          <a:p>
-            <a:pPr algn="ctr"/>
-            <a:r>
-              <a:rPr lang="en-US" sz="1400" dirty="0">
-                <a:solidFill>
-                  <a:schemeClr val="tx1">
-                    <a:lumMod val="50000"/>
-                    <a:lumOff val="50000"/>
-                  </a:schemeClr>
-                </a:solidFill>
-              </a:rPr>
-              <a:t>02</a:t>
             </a:r>
             <a:endParaRPr lang="en-IN" sz="1400" dirty="0">
               <a:solidFill>
@@ -10747,7 +8588,7 @@
 </p:sld>
 </file>
 
-<file path=ppt/slides/slide5.xml><?xml version="1.0" encoding="utf-8"?>
+<file path=ppt/slides/slide11.xml><?xml version="1.0" encoding="utf-8"?>
 <p:sld xmlns:a="http://schemas.openxmlformats.org/drawingml/2006/main" xmlns:r="http://schemas.openxmlformats.org/officeDocument/2006/relationships" xmlns:p="http://schemas.openxmlformats.org/presentationml/2006/main">
   <p:cSld>
     <p:spTree>
@@ -10842,7 +8683,7 @@
                   </a:schemeClr>
                 </a:solidFill>
               </a:rPr>
-              <a:t>04</a:t>
+              <a:t>10</a:t>
             </a:r>
             <a:endParaRPr lang="en-IN" sz="1400" dirty="0">
               <a:solidFill>
@@ -10886,7 +8727,7 @@
                 <a:latin typeface="Times New Roman" panose="02020603050405020304" pitchFamily="18" charset="0"/>
                 <a:cs typeface="Times New Roman" panose="02020603050405020304" pitchFamily="18" charset="0"/>
               </a:rPr>
-              <a:t>EXISTING SYSTEMS</a:t>
+              <a:t>SOFTWARE REQUIREMENT</a:t>
             </a:r>
             <a:endParaRPr lang="en-IN" sz="3200" dirty="0">
               <a:solidFill>
@@ -10900,10 +8741,10 @@
       </p:sp>
       <p:sp>
         <p:nvSpPr>
-          <p:cNvPr id="3" name="TextBox 2">
+          <p:cNvPr id="4" name="TextBox 3">
             <a:extLst>
               <a:ext uri="{FF2B5EF4-FFF2-40B4-BE49-F238E27FC236}">
-                <a16:creationId xmlns:a16="http://schemas.microsoft.com/office/drawing/2014/main" id="{B42FFAFD-2B00-FAA9-9A5B-455B139FA55B}"/>
+                <a16:creationId xmlns:a16="http://schemas.microsoft.com/office/drawing/2014/main" id="{CEE22EFF-FEF0-2830-53DC-79D5A424A36B}"/>
               </a:ext>
             </a:extLst>
           </p:cNvPr>
@@ -10912,8 +8753,8 @@
         </p:nvSpPr>
         <p:spPr>
           <a:xfrm>
-            <a:off x="2508069" y="2203380"/>
-            <a:ext cx="7445828" cy="2126864"/>
+            <a:off x="4118995" y="1926543"/>
+            <a:ext cx="2325147" cy="3373359"/>
           </a:xfrm>
           <a:prstGeom prst="rect">
             <a:avLst/>
@@ -10936,45 +8777,15 @@
                 </a:schemeClr>
               </a:buClr>
               <a:buFont typeface="Wingdings" panose="05000000000000000000" pitchFamily="2" charset="2"/>
-              <a:buChar char="§"/>
+              <a:buChar char="Ø"/>
             </a:pPr>
             <a:r>
-              <a:rPr lang="en-US" sz="1800" dirty="0">
+              <a:rPr lang="en-US" dirty="0">
                 <a:latin typeface="Calibri" panose="020F0502020204030204" pitchFamily="34" charset="0"/>
                 <a:cs typeface="Calibri" panose="020F0502020204030204" pitchFamily="34" charset="0"/>
               </a:rPr>
-              <a:t>We can develop and manage e-commerce websites using open technologies such as WordPress, </a:t>
-            </a:r>
-            <a:r>
-              <a:rPr lang="en-US" sz="1800" dirty="0" err="1">
-                <a:latin typeface="Calibri" panose="020F0502020204030204" pitchFamily="34" charset="0"/>
-                <a:cs typeface="Calibri" panose="020F0502020204030204" pitchFamily="34" charset="0"/>
-              </a:rPr>
-              <a:t>Wix</a:t>
-            </a:r>
-            <a:r>
-              <a:rPr lang="en-US" sz="1800" dirty="0">
-                <a:latin typeface="Calibri" panose="020F0502020204030204" pitchFamily="34" charset="0"/>
-                <a:cs typeface="Calibri" panose="020F0502020204030204" pitchFamily="34" charset="0"/>
-              </a:rPr>
-              <a:t>, woo-commerce, and others.</a:t>
-            </a:r>
-          </a:p>
-          <a:p>
-            <a:pPr algn="just">
-              <a:lnSpc>
-                <a:spcPct val="150000"/>
-              </a:lnSpc>
-              <a:buClr>
-                <a:schemeClr val="bg2">
-                  <a:lumMod val="25000"/>
-                </a:schemeClr>
-              </a:buClr>
-            </a:pPr>
-            <a:endParaRPr lang="en-US" sz="1800" dirty="0">
-              <a:latin typeface="Calibri" panose="020F0502020204030204" pitchFamily="34" charset="0"/>
-              <a:cs typeface="Calibri" panose="020F0502020204030204" pitchFamily="34" charset="0"/>
-            </a:endParaRPr>
+              <a:t>HTML</a:t>
+            </a:r>
           </a:p>
           <a:p>
             <a:pPr marL="285750" indent="-285750" algn="just">
@@ -10987,22 +8798,587 @@
                 </a:schemeClr>
               </a:buClr>
               <a:buFont typeface="Wingdings" panose="05000000000000000000" pitchFamily="2" charset="2"/>
-              <a:buChar char="§"/>
+              <a:buChar char="Ø"/>
             </a:pPr>
             <a:r>
-              <a:rPr lang="en-US" sz="1800" dirty="0">
+              <a:rPr lang="en-US" dirty="0">
                 <a:latin typeface="Calibri" panose="020F0502020204030204" pitchFamily="34" charset="0"/>
                 <a:cs typeface="Calibri" panose="020F0502020204030204" pitchFamily="34" charset="0"/>
               </a:rPr>
-              <a:t>We can list and sell our products on e-commerce sites like Flipkart and Amazon.</a:t>
-            </a:r>
+              <a:t>CSS</a:t>
+            </a:r>
+          </a:p>
+          <a:p>
+            <a:pPr marL="285750" indent="-285750" algn="just">
+              <a:lnSpc>
+                <a:spcPct val="150000"/>
+              </a:lnSpc>
+              <a:buClr>
+                <a:schemeClr val="bg2">
+                  <a:lumMod val="25000"/>
+                </a:schemeClr>
+              </a:buClr>
+              <a:buFont typeface="Wingdings" panose="05000000000000000000" pitchFamily="2" charset="2"/>
+              <a:buChar char="Ø"/>
+            </a:pPr>
+            <a:r>
+              <a:rPr lang="en-US" dirty="0">
+                <a:latin typeface="Calibri" panose="020F0502020204030204" pitchFamily="34" charset="0"/>
+                <a:cs typeface="Calibri" panose="020F0502020204030204" pitchFamily="34" charset="0"/>
+              </a:rPr>
+              <a:t>JavaScript</a:t>
+            </a:r>
+          </a:p>
+          <a:p>
+            <a:pPr marL="285750" indent="-285750" algn="just">
+              <a:lnSpc>
+                <a:spcPct val="150000"/>
+              </a:lnSpc>
+              <a:buClr>
+                <a:schemeClr val="bg2">
+                  <a:lumMod val="25000"/>
+                </a:schemeClr>
+              </a:buClr>
+              <a:buFont typeface="Wingdings" panose="05000000000000000000" pitchFamily="2" charset="2"/>
+              <a:buChar char="Ø"/>
+            </a:pPr>
+            <a:r>
+              <a:rPr lang="en-US" dirty="0">
+                <a:latin typeface="Calibri" panose="020F0502020204030204" pitchFamily="34" charset="0"/>
+                <a:cs typeface="Calibri" panose="020F0502020204030204" pitchFamily="34" charset="0"/>
+              </a:rPr>
+              <a:t>NodeJS</a:t>
+            </a:r>
+          </a:p>
+          <a:p>
+            <a:pPr marL="285750" indent="-285750" algn="just">
+              <a:lnSpc>
+                <a:spcPct val="150000"/>
+              </a:lnSpc>
+              <a:buClr>
+                <a:schemeClr val="bg2">
+                  <a:lumMod val="25000"/>
+                </a:schemeClr>
+              </a:buClr>
+              <a:buFont typeface="Wingdings" panose="05000000000000000000" pitchFamily="2" charset="2"/>
+              <a:buChar char="Ø"/>
+            </a:pPr>
+            <a:r>
+              <a:rPr lang="en-US" dirty="0">
+                <a:latin typeface="Calibri" panose="020F0502020204030204" pitchFamily="34" charset="0"/>
+                <a:cs typeface="Calibri" panose="020F0502020204030204" pitchFamily="34" charset="0"/>
+              </a:rPr>
+              <a:t>Express</a:t>
+            </a:r>
+          </a:p>
+          <a:p>
+            <a:pPr marL="285750" indent="-285750" algn="just">
+              <a:lnSpc>
+                <a:spcPct val="150000"/>
+              </a:lnSpc>
+              <a:buClr>
+                <a:schemeClr val="bg2">
+                  <a:lumMod val="25000"/>
+                </a:schemeClr>
+              </a:buClr>
+              <a:buFont typeface="Wingdings" panose="05000000000000000000" pitchFamily="2" charset="2"/>
+              <a:buChar char="Ø"/>
+            </a:pPr>
+            <a:r>
+              <a:rPr lang="en-US" dirty="0">
+                <a:latin typeface="Calibri" panose="020F0502020204030204" pitchFamily="34" charset="0"/>
+                <a:cs typeface="Calibri" panose="020F0502020204030204" pitchFamily="34" charset="0"/>
+              </a:rPr>
+              <a:t>VS Code</a:t>
+            </a:r>
+          </a:p>
+          <a:p>
+            <a:pPr marL="285750" indent="-285750" algn="just">
+              <a:lnSpc>
+                <a:spcPct val="150000"/>
+              </a:lnSpc>
+              <a:buClr>
+                <a:schemeClr val="bg2">
+                  <a:lumMod val="25000"/>
+                </a:schemeClr>
+              </a:buClr>
+              <a:buFont typeface="Wingdings" panose="05000000000000000000" pitchFamily="2" charset="2"/>
+              <a:buChar char="Ø"/>
+            </a:pPr>
+            <a:r>
+              <a:rPr lang="en-US" dirty="0">
+                <a:latin typeface="Calibri" panose="020F0502020204030204" pitchFamily="34" charset="0"/>
+                <a:cs typeface="Calibri" panose="020F0502020204030204" pitchFamily="34" charset="0"/>
+              </a:rPr>
+              <a:t>Netlify</a:t>
+            </a:r>
+          </a:p>
+          <a:p>
+            <a:pPr marL="285750" indent="-285750" algn="just">
+              <a:lnSpc>
+                <a:spcPct val="150000"/>
+              </a:lnSpc>
+              <a:buClr>
+                <a:schemeClr val="bg2">
+                  <a:lumMod val="25000"/>
+                </a:schemeClr>
+              </a:buClr>
+              <a:buFont typeface="Wingdings" panose="05000000000000000000" pitchFamily="2" charset="2"/>
+              <a:buChar char="Ø"/>
+            </a:pPr>
+            <a:r>
+              <a:rPr lang="en-US" dirty="0">
+                <a:latin typeface="Calibri" panose="020F0502020204030204" pitchFamily="34" charset="0"/>
+                <a:cs typeface="Calibri" panose="020F0502020204030204" pitchFamily="34" charset="0"/>
+              </a:rPr>
+              <a:t>Machine Learning</a:t>
+            </a:r>
+            <a:endParaRPr lang="en-IN" dirty="0">
+              <a:latin typeface="Calibri" panose="020F0502020204030204" pitchFamily="34" charset="0"/>
+              <a:cs typeface="Calibri" panose="020F0502020204030204" pitchFamily="34" charset="0"/>
+            </a:endParaRPr>
+          </a:p>
+        </p:txBody>
+      </p:sp>
+      <p:sp>
+        <p:nvSpPr>
+          <p:cNvPr id="5" name="Right Brace 4">
+            <a:extLst>
+              <a:ext uri="{FF2B5EF4-FFF2-40B4-BE49-F238E27FC236}">
+                <a16:creationId xmlns:a16="http://schemas.microsoft.com/office/drawing/2014/main" id="{0DE91303-3E01-C7CC-B58F-B507E981DDC7}"/>
+              </a:ext>
+            </a:extLst>
+          </p:cNvPr>
+          <p:cNvSpPr/>
+          <p:nvPr/>
+        </p:nvSpPr>
+        <p:spPr>
+          <a:xfrm>
+            <a:off x="6342078" y="2088859"/>
+            <a:ext cx="102064" cy="939566"/>
+          </a:xfrm>
+          <a:prstGeom prst="rightBrace">
+            <a:avLst/>
+          </a:prstGeom>
+          <a:ln>
+            <a:solidFill>
+              <a:schemeClr val="bg2">
+                <a:lumMod val="10000"/>
+              </a:schemeClr>
+            </a:solidFill>
+          </a:ln>
+        </p:spPr>
+        <p:style>
+          <a:lnRef idx="1">
+            <a:schemeClr val="accent3"/>
+          </a:lnRef>
+          <a:fillRef idx="0">
+            <a:schemeClr val="accent3"/>
+          </a:fillRef>
+          <a:effectRef idx="0">
+            <a:schemeClr val="accent3"/>
+          </a:effectRef>
+          <a:fontRef idx="minor">
+            <a:schemeClr val="tx1"/>
+          </a:fontRef>
+        </p:style>
+        <p:txBody>
+          <a:bodyPr rtlCol="0" anchor="ctr"/>
+          <a:lstStyle/>
+          <a:p>
+            <a:pPr algn="ctr"/>
+            <a:endParaRPr lang="en-IN"/>
+          </a:p>
+        </p:txBody>
+      </p:sp>
+      <p:sp>
+        <p:nvSpPr>
+          <p:cNvPr id="11" name="Right Brace 10">
+            <a:extLst>
+              <a:ext uri="{FF2B5EF4-FFF2-40B4-BE49-F238E27FC236}">
+                <a16:creationId xmlns:a16="http://schemas.microsoft.com/office/drawing/2014/main" id="{23E6EF8D-D6E1-A292-62B9-BA997D8D879A}"/>
+              </a:ext>
+            </a:extLst>
+          </p:cNvPr>
+          <p:cNvSpPr/>
+          <p:nvPr/>
+        </p:nvSpPr>
+        <p:spPr>
+          <a:xfrm>
+            <a:off x="6344175" y="3360731"/>
+            <a:ext cx="99967" cy="507002"/>
+          </a:xfrm>
+          <a:prstGeom prst="rightBrace">
+            <a:avLst/>
+          </a:prstGeom>
+          <a:ln>
+            <a:solidFill>
+              <a:schemeClr val="bg2">
+                <a:lumMod val="10000"/>
+              </a:schemeClr>
+            </a:solidFill>
+          </a:ln>
+        </p:spPr>
+        <p:style>
+          <a:lnRef idx="1">
+            <a:schemeClr val="accent3"/>
+          </a:lnRef>
+          <a:fillRef idx="0">
+            <a:schemeClr val="accent3"/>
+          </a:fillRef>
+          <a:effectRef idx="0">
+            <a:schemeClr val="accent3"/>
+          </a:effectRef>
+          <a:fontRef idx="minor">
+            <a:schemeClr val="tx1"/>
+          </a:fontRef>
+        </p:style>
+        <p:txBody>
+          <a:bodyPr rtlCol="0" anchor="ctr"/>
+          <a:lstStyle/>
+          <a:p>
+            <a:pPr algn="ctr"/>
+            <a:endParaRPr lang="en-IN"/>
+          </a:p>
+        </p:txBody>
+      </p:sp>
+      <p:sp>
+        <p:nvSpPr>
+          <p:cNvPr id="12" name="Right Brace 11">
+            <a:extLst>
+              <a:ext uri="{FF2B5EF4-FFF2-40B4-BE49-F238E27FC236}">
+                <a16:creationId xmlns:a16="http://schemas.microsoft.com/office/drawing/2014/main" id="{6A76BA60-EDD2-29E7-8122-91C397494579}"/>
+              </a:ext>
+            </a:extLst>
+          </p:cNvPr>
+          <p:cNvSpPr/>
+          <p:nvPr/>
+        </p:nvSpPr>
+        <p:spPr>
+          <a:xfrm>
+            <a:off x="6336484" y="4172901"/>
+            <a:ext cx="99967" cy="147429"/>
+          </a:xfrm>
+          <a:prstGeom prst="rightBrace">
+            <a:avLst/>
+          </a:prstGeom>
+          <a:ln>
+            <a:solidFill>
+              <a:schemeClr val="bg2">
+                <a:lumMod val="10000"/>
+              </a:schemeClr>
+            </a:solidFill>
+          </a:ln>
+        </p:spPr>
+        <p:style>
+          <a:lnRef idx="1">
+            <a:schemeClr val="accent3"/>
+          </a:lnRef>
+          <a:fillRef idx="0">
+            <a:schemeClr val="accent3"/>
+          </a:fillRef>
+          <a:effectRef idx="0">
+            <a:schemeClr val="accent3"/>
+          </a:effectRef>
+          <a:fontRef idx="minor">
+            <a:schemeClr val="tx1"/>
+          </a:fontRef>
+        </p:style>
+        <p:txBody>
+          <a:bodyPr rtlCol="0" anchor="ctr"/>
+          <a:lstStyle/>
+          <a:p>
+            <a:pPr algn="ctr"/>
+            <a:endParaRPr lang="en-IN"/>
+          </a:p>
+        </p:txBody>
+      </p:sp>
+      <p:sp>
+        <p:nvSpPr>
+          <p:cNvPr id="15" name="Right Brace 14">
+            <a:extLst>
+              <a:ext uri="{FF2B5EF4-FFF2-40B4-BE49-F238E27FC236}">
+                <a16:creationId xmlns:a16="http://schemas.microsoft.com/office/drawing/2014/main" id="{649FBE4C-2CA2-F569-8CB2-9E4547C46775}"/>
+              </a:ext>
+            </a:extLst>
+          </p:cNvPr>
+          <p:cNvSpPr/>
+          <p:nvPr/>
+        </p:nvSpPr>
+        <p:spPr>
+          <a:xfrm>
+            <a:off x="6336484" y="4607342"/>
+            <a:ext cx="99967" cy="147429"/>
+          </a:xfrm>
+          <a:prstGeom prst="rightBrace">
+            <a:avLst/>
+          </a:prstGeom>
+          <a:ln>
+            <a:solidFill>
+              <a:schemeClr val="bg2">
+                <a:lumMod val="10000"/>
+              </a:schemeClr>
+            </a:solidFill>
+          </a:ln>
+        </p:spPr>
+        <p:style>
+          <a:lnRef idx="1">
+            <a:schemeClr val="accent3"/>
+          </a:lnRef>
+          <a:fillRef idx="0">
+            <a:schemeClr val="accent3"/>
+          </a:fillRef>
+          <a:effectRef idx="0">
+            <a:schemeClr val="accent3"/>
+          </a:effectRef>
+          <a:fontRef idx="minor">
+            <a:schemeClr val="tx1"/>
+          </a:fontRef>
+        </p:style>
+        <p:txBody>
+          <a:bodyPr rtlCol="0" anchor="ctr"/>
+          <a:lstStyle/>
+          <a:p>
+            <a:pPr algn="ctr"/>
+            <a:endParaRPr lang="en-IN"/>
+          </a:p>
+        </p:txBody>
+      </p:sp>
+      <p:sp>
+        <p:nvSpPr>
+          <p:cNvPr id="16" name="TextBox 15">
+            <a:extLst>
+              <a:ext uri="{FF2B5EF4-FFF2-40B4-BE49-F238E27FC236}">
+                <a16:creationId xmlns:a16="http://schemas.microsoft.com/office/drawing/2014/main" id="{4568E3A7-A6A2-5444-6B29-EA4A27541182}"/>
+              </a:ext>
+            </a:extLst>
+          </p:cNvPr>
+          <p:cNvSpPr txBox="1"/>
+          <p:nvPr/>
+        </p:nvSpPr>
+        <p:spPr>
+          <a:xfrm>
+            <a:off x="6576969" y="2432807"/>
+            <a:ext cx="1510018" cy="276999"/>
+          </a:xfrm>
+          <a:prstGeom prst="rect">
+            <a:avLst/>
+          </a:prstGeom>
+          <a:noFill/>
+        </p:spPr>
+        <p:txBody>
+          <a:bodyPr wrap="square" rtlCol="0">
+            <a:spAutoFit/>
+          </a:bodyPr>
+          <a:lstStyle/>
+          <a:p>
+            <a:r>
+              <a:rPr lang="en-US" sz="1200" dirty="0"/>
+              <a:t>front end</a:t>
+            </a:r>
+            <a:endParaRPr lang="en-IN" sz="1200" dirty="0"/>
+          </a:p>
+        </p:txBody>
+      </p:sp>
+      <p:sp>
+        <p:nvSpPr>
+          <p:cNvPr id="17" name="TextBox 16">
+            <a:extLst>
+              <a:ext uri="{FF2B5EF4-FFF2-40B4-BE49-F238E27FC236}">
+                <a16:creationId xmlns:a16="http://schemas.microsoft.com/office/drawing/2014/main" id="{F192CDD9-D2CF-5CFC-EB28-61BB5C8BFE45}"/>
+              </a:ext>
+            </a:extLst>
+          </p:cNvPr>
+          <p:cNvSpPr txBox="1"/>
+          <p:nvPr/>
+        </p:nvSpPr>
+        <p:spPr>
+          <a:xfrm>
+            <a:off x="6622411" y="3480510"/>
+            <a:ext cx="1510018" cy="276999"/>
+          </a:xfrm>
+          <a:prstGeom prst="rect">
+            <a:avLst/>
+          </a:prstGeom>
+          <a:noFill/>
+        </p:spPr>
+        <p:txBody>
+          <a:bodyPr wrap="square" rtlCol="0">
+            <a:spAutoFit/>
+          </a:bodyPr>
+          <a:lstStyle/>
+          <a:p>
+            <a:r>
+              <a:rPr lang="en-US" sz="1200" dirty="0"/>
+              <a:t>back end</a:t>
+            </a:r>
+            <a:endParaRPr lang="en-IN" sz="1200" dirty="0"/>
+          </a:p>
+        </p:txBody>
+      </p:sp>
+      <p:sp>
+        <p:nvSpPr>
+          <p:cNvPr id="18" name="TextBox 17">
+            <a:extLst>
+              <a:ext uri="{FF2B5EF4-FFF2-40B4-BE49-F238E27FC236}">
+                <a16:creationId xmlns:a16="http://schemas.microsoft.com/office/drawing/2014/main" id="{6FFCCE52-B166-E641-FE75-BA81BE693030}"/>
+              </a:ext>
+            </a:extLst>
+          </p:cNvPr>
+          <p:cNvSpPr txBox="1"/>
+          <p:nvPr/>
+        </p:nvSpPr>
+        <p:spPr>
+          <a:xfrm>
+            <a:off x="6576969" y="4099726"/>
+            <a:ext cx="1510018" cy="276999"/>
+          </a:xfrm>
+          <a:prstGeom prst="rect">
+            <a:avLst/>
+          </a:prstGeom>
+          <a:noFill/>
+        </p:spPr>
+        <p:txBody>
+          <a:bodyPr wrap="square" rtlCol="0">
+            <a:spAutoFit/>
+          </a:bodyPr>
+          <a:lstStyle/>
+          <a:p>
+            <a:r>
+              <a:rPr lang="en-US" sz="1200" dirty="0"/>
+              <a:t> code editor</a:t>
+            </a:r>
+            <a:endParaRPr lang="en-IN" sz="1200" dirty="0"/>
+          </a:p>
+        </p:txBody>
+      </p:sp>
+      <p:sp>
+        <p:nvSpPr>
+          <p:cNvPr id="19" name="TextBox 18">
+            <a:extLst>
+              <a:ext uri="{FF2B5EF4-FFF2-40B4-BE49-F238E27FC236}">
+                <a16:creationId xmlns:a16="http://schemas.microsoft.com/office/drawing/2014/main" id="{34FA0350-2845-CA40-CD85-4B59E8330875}"/>
+              </a:ext>
+            </a:extLst>
+          </p:cNvPr>
+          <p:cNvSpPr txBox="1"/>
+          <p:nvPr/>
+        </p:nvSpPr>
+        <p:spPr>
+          <a:xfrm>
+            <a:off x="6622411" y="4530672"/>
+            <a:ext cx="1510018" cy="276999"/>
+          </a:xfrm>
+          <a:prstGeom prst="rect">
+            <a:avLst/>
+          </a:prstGeom>
+          <a:noFill/>
+        </p:spPr>
+        <p:txBody>
+          <a:bodyPr wrap="square" rtlCol="0">
+            <a:spAutoFit/>
+          </a:bodyPr>
+          <a:lstStyle/>
+          <a:p>
+            <a:r>
+              <a:rPr lang="en-US" sz="1200" dirty="0"/>
+              <a:t>to deploy</a:t>
+            </a:r>
+            <a:endParaRPr lang="en-IN" sz="1200" dirty="0"/>
+          </a:p>
+        </p:txBody>
+      </p:sp>
+      <p:sp>
+        <p:nvSpPr>
+          <p:cNvPr id="3" name="Right Brace 2">
+            <a:extLst>
+              <a:ext uri="{FF2B5EF4-FFF2-40B4-BE49-F238E27FC236}">
+                <a16:creationId xmlns:a16="http://schemas.microsoft.com/office/drawing/2014/main" id="{DE676DE0-1D3C-28A4-E7BE-1599001AAAE0}"/>
+              </a:ext>
+            </a:extLst>
+          </p:cNvPr>
+          <p:cNvSpPr/>
+          <p:nvPr/>
+        </p:nvSpPr>
+        <p:spPr>
+          <a:xfrm>
+            <a:off x="6360605" y="5020598"/>
+            <a:ext cx="99967" cy="147429"/>
+          </a:xfrm>
+          <a:prstGeom prst="rightBrace">
+            <a:avLst/>
+          </a:prstGeom>
+          <a:ln>
+            <a:solidFill>
+              <a:schemeClr val="bg2">
+                <a:lumMod val="10000"/>
+              </a:schemeClr>
+            </a:solidFill>
+          </a:ln>
+        </p:spPr>
+        <p:style>
+          <a:lnRef idx="1">
+            <a:schemeClr val="accent3"/>
+          </a:lnRef>
+          <a:fillRef idx="0">
+            <a:schemeClr val="accent3"/>
+          </a:fillRef>
+          <a:effectRef idx="0">
+            <a:schemeClr val="accent3"/>
+          </a:effectRef>
+          <a:fontRef idx="minor">
+            <a:schemeClr val="tx1"/>
+          </a:fontRef>
+        </p:style>
+        <p:txBody>
+          <a:bodyPr rtlCol="0" anchor="ctr"/>
+          <a:lstStyle/>
+          <a:p>
+            <a:pPr algn="ctr"/>
+            <a:endParaRPr lang="en-IN"/>
+          </a:p>
+        </p:txBody>
+      </p:sp>
+      <p:sp>
+        <p:nvSpPr>
+          <p:cNvPr id="6" name="TextBox 5">
+            <a:extLst>
+              <a:ext uri="{FF2B5EF4-FFF2-40B4-BE49-F238E27FC236}">
+                <a16:creationId xmlns:a16="http://schemas.microsoft.com/office/drawing/2014/main" id="{1133C8C4-B75B-8CE2-DF24-32254A56CFB2}"/>
+              </a:ext>
+            </a:extLst>
+          </p:cNvPr>
+          <p:cNvSpPr txBox="1"/>
+          <p:nvPr/>
+        </p:nvSpPr>
+        <p:spPr>
+          <a:xfrm>
+            <a:off x="6622411" y="4960839"/>
+            <a:ext cx="1510018" cy="276999"/>
+          </a:xfrm>
+          <a:prstGeom prst="rect">
+            <a:avLst/>
+          </a:prstGeom>
+          <a:noFill/>
+        </p:spPr>
+        <p:txBody>
+          <a:bodyPr wrap="square" rtlCol="0">
+            <a:spAutoFit/>
+          </a:bodyPr>
+          <a:lstStyle/>
+          <a:p>
+            <a:r>
+              <a:rPr lang="en-US" sz="1200" dirty="0"/>
+              <a:t>sentiment analysis</a:t>
+            </a:r>
+            <a:endParaRPr lang="en-IN" sz="1200" dirty="0"/>
           </a:p>
         </p:txBody>
       </p:sp>
     </p:spTree>
     <p:extLst>
       <p:ext uri="{BB962C8B-B14F-4D97-AF65-F5344CB8AC3E}">
-        <p14:creationId xmlns:p14="http://schemas.microsoft.com/office/powerpoint/2010/main" val="3128007638"/>
+        <p14:creationId xmlns:p14="http://schemas.microsoft.com/office/powerpoint/2010/main" val="1143028413"/>
       </p:ext>
     </p:extLst>
   </p:cSld>
@@ -11012,7 +9388,7 @@
 </p:sld>
 </file>
 
-<file path=ppt/slides/slide6.xml><?xml version="1.0" encoding="utf-8"?>
+<file path=ppt/slides/slide12.xml><?xml version="1.0" encoding="utf-8"?>
 <p:sld xmlns:a="http://schemas.openxmlformats.org/drawingml/2006/main" xmlns:r="http://schemas.openxmlformats.org/officeDocument/2006/relationships" xmlns:p="http://schemas.openxmlformats.org/presentationml/2006/main">
   <p:cSld>
     <p:spTree>
@@ -11107,7 +9483,7 @@
                   </a:schemeClr>
                 </a:solidFill>
               </a:rPr>
-              <a:t>05</a:t>
+              <a:t>11</a:t>
             </a:r>
             <a:endParaRPr lang="en-IN" sz="1400" dirty="0">
               <a:solidFill>
@@ -11151,7 +9527,7 @@
                 <a:latin typeface="Times New Roman" panose="02020603050405020304" pitchFamily="18" charset="0"/>
                 <a:cs typeface="Times New Roman" panose="02020603050405020304" pitchFamily="18" charset="0"/>
               </a:rPr>
-              <a:t>ISSUES IN EXISTING SYSTEMS</a:t>
+              <a:t>PROJECT PLAN</a:t>
             </a:r>
             <a:endParaRPr lang="en-IN" sz="3200" dirty="0">
               <a:solidFill>
@@ -11171,7 +9547,7 @@
         </p:nvSpPr>
         <p:spPr>
           <a:xfrm>
-            <a:off x="2508069" y="2161435"/>
+            <a:off x="2893963" y="2010433"/>
             <a:ext cx="7445828" cy="2957861"/>
           </a:xfrm>
           <a:prstGeom prst="rect">
@@ -11184,111 +9560,6 @@
             <a:spAutoFit/>
           </a:bodyPr>
           <a:lstStyle/>
-          <a:p>
-            <a:pPr marL="285750" indent="-285750" algn="just">
-              <a:lnSpc>
-                <a:spcPct val="150000"/>
-              </a:lnSpc>
-              <a:buClr>
-                <a:schemeClr val="bg2">
-                  <a:lumMod val="25000"/>
-                </a:schemeClr>
-              </a:buClr>
-              <a:buFont typeface="Courier New" panose="02070309020205020404" pitchFamily="49" charset="0"/>
-              <a:buChar char="o"/>
-            </a:pPr>
-            <a:r>
-              <a:rPr lang="en-US" sz="1800" dirty="0">
-                <a:latin typeface="Calibri" panose="020F0502020204030204" pitchFamily="34" charset="0"/>
-                <a:cs typeface="Calibri" panose="020F0502020204030204" pitchFamily="34" charset="0"/>
-              </a:rPr>
-              <a:t>We can build our website with open-source software, but getting clients is difficult.</a:t>
-            </a:r>
-          </a:p>
-          <a:p>
-            <a:pPr marL="285750" indent="-285750" algn="just">
-              <a:lnSpc>
-                <a:spcPct val="150000"/>
-              </a:lnSpc>
-              <a:buClr>
-                <a:schemeClr val="bg2">
-                  <a:lumMod val="25000"/>
-                </a:schemeClr>
-              </a:buClr>
-              <a:buFont typeface="Courier New" panose="02070309020205020404" pitchFamily="49" charset="0"/>
-              <a:buChar char="o"/>
-            </a:pPr>
-            <a:r>
-              <a:rPr lang="en-US" sz="1800" dirty="0">
-                <a:latin typeface="Calibri" panose="020F0502020204030204" pitchFamily="34" charset="0"/>
-                <a:cs typeface="Calibri" panose="020F0502020204030204" pitchFamily="34" charset="0"/>
-              </a:rPr>
-              <a:t>We cannot place our trust in every seller on Flipkart or Amazon.</a:t>
-            </a:r>
-          </a:p>
-          <a:p>
-            <a:pPr marL="285750" indent="-285750" algn="just">
-              <a:lnSpc>
-                <a:spcPct val="150000"/>
-              </a:lnSpc>
-              <a:buClr>
-                <a:schemeClr val="bg2">
-                  <a:lumMod val="25000"/>
-                </a:schemeClr>
-              </a:buClr>
-              <a:buFont typeface="Courier New" panose="02070309020205020404" pitchFamily="49" charset="0"/>
-              <a:buChar char="o"/>
-            </a:pPr>
-            <a:r>
-              <a:rPr lang="en-US" sz="1800" dirty="0">
-                <a:latin typeface="Calibri" panose="020F0502020204030204" pitchFamily="34" charset="0"/>
-                <a:cs typeface="Calibri" panose="020F0502020204030204" pitchFamily="34" charset="0"/>
-              </a:rPr>
-              <a:t>Shipping fees are expensive.</a:t>
-            </a:r>
-          </a:p>
-          <a:p>
-            <a:pPr marL="285750" indent="-285750" algn="just">
-              <a:lnSpc>
-                <a:spcPct val="150000"/>
-              </a:lnSpc>
-              <a:buClr>
-                <a:schemeClr val="bg2">
-                  <a:lumMod val="25000"/>
-                </a:schemeClr>
-              </a:buClr>
-              <a:buFont typeface="Courier New" panose="02070309020205020404" pitchFamily="49" charset="0"/>
-              <a:buChar char="o"/>
-            </a:pPr>
-            <a:r>
-              <a:rPr lang="en-US" sz="1800" dirty="0">
-                <a:latin typeface="Calibri" panose="020F0502020204030204" pitchFamily="34" charset="0"/>
-                <a:cs typeface="Calibri" panose="020F0502020204030204" pitchFamily="34" charset="0"/>
-              </a:rPr>
-              <a:t>We are unable to approach sellers when the product is fake.</a:t>
-            </a:r>
-          </a:p>
-          <a:p>
-            <a:pPr marL="285750" indent="-285750" algn="just">
-              <a:lnSpc>
-                <a:spcPct val="150000"/>
-              </a:lnSpc>
-              <a:buClr>
-                <a:schemeClr val="bg2">
-                  <a:lumMod val="25000"/>
-                </a:schemeClr>
-              </a:buClr>
-              <a:buFont typeface="Courier New" panose="02070309020205020404" pitchFamily="49" charset="0"/>
-              <a:buChar char="o"/>
-            </a:pPr>
-            <a:r>
-              <a:rPr lang="en-US" sz="1800" dirty="0">
-                <a:latin typeface="Calibri" panose="020F0502020204030204" pitchFamily="34" charset="0"/>
-                <a:cs typeface="Calibri" panose="020F0502020204030204" pitchFamily="34" charset="0"/>
-              </a:rPr>
-              <a:t>delivery delay.</a:t>
-            </a:r>
-          </a:p>
           <a:p>
             <a:pPr marL="285750" indent="-285750" algn="just">
               <a:lnSpc>
@@ -11302,6 +9573,110 @@
               <a:buFont typeface="Wingdings" panose="05000000000000000000" pitchFamily="2" charset="2"/>
               <a:buChar char="§"/>
             </a:pPr>
+            <a:r>
+              <a:rPr lang="en-US" dirty="0">
+                <a:latin typeface="Calibri" panose="020F0502020204030204" pitchFamily="34" charset="0"/>
+                <a:cs typeface="Calibri" panose="020F0502020204030204" pitchFamily="34" charset="0"/>
+              </a:rPr>
+              <a:t>Phase-I</a:t>
+            </a:r>
+          </a:p>
+          <a:p>
+            <a:pPr algn="just">
+              <a:lnSpc>
+                <a:spcPct val="150000"/>
+              </a:lnSpc>
+              <a:buClr>
+                <a:schemeClr val="bg2">
+                  <a:lumMod val="25000"/>
+                </a:schemeClr>
+              </a:buClr>
+            </a:pPr>
+            <a:endParaRPr lang="en-US" dirty="0">
+              <a:latin typeface="Calibri" panose="020F0502020204030204" pitchFamily="34" charset="0"/>
+              <a:cs typeface="Calibri" panose="020F0502020204030204" pitchFamily="34" charset="0"/>
+            </a:endParaRPr>
+          </a:p>
+          <a:p>
+            <a:pPr algn="just">
+              <a:lnSpc>
+                <a:spcPct val="150000"/>
+              </a:lnSpc>
+              <a:buClr>
+                <a:schemeClr val="bg2">
+                  <a:lumMod val="25000"/>
+                </a:schemeClr>
+              </a:buClr>
+            </a:pPr>
+            <a:endParaRPr lang="en-US" dirty="0">
+              <a:latin typeface="Calibri" panose="020F0502020204030204" pitchFamily="34" charset="0"/>
+              <a:cs typeface="Calibri" panose="020F0502020204030204" pitchFamily="34" charset="0"/>
+            </a:endParaRPr>
+          </a:p>
+          <a:p>
+            <a:pPr algn="just">
+              <a:lnSpc>
+                <a:spcPct val="150000"/>
+              </a:lnSpc>
+              <a:buClr>
+                <a:schemeClr val="bg2">
+                  <a:lumMod val="25000"/>
+                </a:schemeClr>
+              </a:buClr>
+            </a:pPr>
+            <a:endParaRPr lang="en-US" dirty="0">
+              <a:latin typeface="Calibri" panose="020F0502020204030204" pitchFamily="34" charset="0"/>
+              <a:cs typeface="Calibri" panose="020F0502020204030204" pitchFamily="34" charset="0"/>
+            </a:endParaRPr>
+          </a:p>
+          <a:p>
+            <a:pPr algn="just">
+              <a:lnSpc>
+                <a:spcPct val="150000"/>
+              </a:lnSpc>
+              <a:buClr>
+                <a:schemeClr val="bg2">
+                  <a:lumMod val="25000"/>
+                </a:schemeClr>
+              </a:buClr>
+            </a:pPr>
+            <a:endParaRPr lang="en-US" dirty="0">
+              <a:latin typeface="Calibri" panose="020F0502020204030204" pitchFamily="34" charset="0"/>
+              <a:cs typeface="Calibri" panose="020F0502020204030204" pitchFamily="34" charset="0"/>
+            </a:endParaRPr>
+          </a:p>
+          <a:p>
+            <a:pPr marL="285750" indent="-285750" algn="just">
+              <a:lnSpc>
+                <a:spcPct val="150000"/>
+              </a:lnSpc>
+              <a:buClr>
+                <a:schemeClr val="bg2">
+                  <a:lumMod val="25000"/>
+                </a:schemeClr>
+              </a:buClr>
+              <a:buFont typeface="Wingdings" panose="05000000000000000000" pitchFamily="2" charset="2"/>
+              <a:buChar char="§"/>
+            </a:pPr>
+            <a:r>
+              <a:rPr lang="en-US" dirty="0">
+                <a:latin typeface="Calibri" panose="020F0502020204030204" pitchFamily="34" charset="0"/>
+                <a:cs typeface="Calibri" panose="020F0502020204030204" pitchFamily="34" charset="0"/>
+              </a:rPr>
+              <a:t>Phase- II</a:t>
+            </a:r>
+          </a:p>
+          <a:p>
+            <a:pPr algn="just">
+              <a:lnSpc>
+                <a:spcPct val="150000"/>
+              </a:lnSpc>
+              <a:buClr>
+                <a:schemeClr val="bg2">
+                  <a:lumMod val="25000"/>
+                </a:schemeClr>
+              </a:buClr>
+            </a:pPr>
             <a:endParaRPr lang="en-IN" dirty="0">
               <a:latin typeface="Calibri" panose="020F0502020204030204" pitchFamily="34" charset="0"/>
               <a:cs typeface="Calibri" panose="020F0502020204030204" pitchFamily="34" charset="0"/>
@@ -11309,7 +9684,543 @@
           </a:p>
         </p:txBody>
       </p:sp>
+      <p:graphicFrame>
+        <p:nvGraphicFramePr>
+          <p:cNvPr id="4" name="Table 4">
+            <a:extLst>
+              <a:ext uri="{FF2B5EF4-FFF2-40B4-BE49-F238E27FC236}">
+                <a16:creationId xmlns:a16="http://schemas.microsoft.com/office/drawing/2014/main" id="{5D9786A9-AE71-16B7-A1A1-7254A8475BAC}"/>
+              </a:ext>
+            </a:extLst>
+          </p:cNvPr>
+          <p:cNvGraphicFramePr>
+            <a:graphicFrameLocks noGrp="1"/>
+          </p:cNvGraphicFramePr>
+          <p:nvPr>
+            <p:extLst>
+              <p:ext uri="{D42A27DB-BD31-4B8C-83A1-F6EECF244321}">
+                <p14:modId xmlns:p14="http://schemas.microsoft.com/office/powerpoint/2010/main" val="3695892974"/>
+              </p:ext>
+            </p:extLst>
+          </p:nvPr>
+        </p:nvGraphicFramePr>
+        <p:xfrm>
+          <a:off x="5588932" y="1851534"/>
+          <a:ext cx="3974518" cy="1219200"/>
+        </p:xfrm>
+        <a:graphic>
+          <a:graphicData uri="http://schemas.openxmlformats.org/drawingml/2006/table">
+            <a:tbl>
+              <a:tblPr firstRow="1" bandRow="1">
+                <a:tableStyleId>{8799B23B-EC83-4686-B30A-512413B5E67A}</a:tableStyleId>
+              </a:tblPr>
+              <a:tblGrid>
+                <a:gridCol w="1987259">
+                  <a:extLst>
+                    <a:ext uri="{9D8B030D-6E8A-4147-A177-3AD203B41FA5}">
+                      <a16:colId xmlns:a16="http://schemas.microsoft.com/office/drawing/2014/main" val="841552173"/>
+                    </a:ext>
+                  </a:extLst>
+                </a:gridCol>
+                <a:gridCol w="1987259">
+                  <a:extLst>
+                    <a:ext uri="{9D8B030D-6E8A-4147-A177-3AD203B41FA5}">
+                      <a16:colId xmlns:a16="http://schemas.microsoft.com/office/drawing/2014/main" val="2311591390"/>
+                    </a:ext>
+                  </a:extLst>
+                </a:gridCol>
+              </a:tblGrid>
+              <a:tr h="0">
+                <a:tc>
+                  <a:txBody>
+                    <a:bodyPr/>
+                    <a:lstStyle/>
+                    <a:p>
+                      <a:r>
+                        <a:rPr lang="en-IN" sz="1400" b="0" dirty="0">
+                          <a:latin typeface="Calibri" panose="020F0502020204030204" pitchFamily="34" charset="0"/>
+                          <a:cs typeface="Calibri" panose="020F0502020204030204" pitchFamily="34" charset="0"/>
+                        </a:rPr>
+                        <a:t>September</a:t>
+                      </a:r>
+                    </a:p>
+                  </a:txBody>
+                  <a:tcPr/>
+                </a:tc>
+                <a:tc>
+                  <a:txBody>
+                    <a:bodyPr/>
+                    <a:lstStyle/>
+                    <a:p>
+                      <a:r>
+                        <a:rPr lang="en-IN" sz="1400" b="0" dirty="0"/>
+                        <a:t>Landing page</a:t>
+                      </a:r>
+                    </a:p>
+                  </a:txBody>
+                  <a:tcPr/>
+                </a:tc>
+                <a:extLst>
+                  <a:ext uri="{0D108BD9-81ED-4DB2-BD59-A6C34878D82A}">
+                    <a16:rowId xmlns:a16="http://schemas.microsoft.com/office/drawing/2014/main" val="1694609104"/>
+                  </a:ext>
+                </a:extLst>
+              </a:tr>
+              <a:tr h="288939">
+                <a:tc>
+                  <a:txBody>
+                    <a:bodyPr/>
+                    <a:lstStyle/>
+                    <a:p>
+                      <a:r>
+                        <a:rPr lang="en-IN" sz="1400" dirty="0"/>
+                        <a:t>October</a:t>
+                      </a:r>
+                    </a:p>
+                  </a:txBody>
+                  <a:tcPr/>
+                </a:tc>
+                <a:tc>
+                  <a:txBody>
+                    <a:bodyPr/>
+                    <a:lstStyle/>
+                    <a:p>
+                      <a:r>
+                        <a:rPr lang="en-IN" sz="1400" dirty="0"/>
+                        <a:t>Clients page</a:t>
+                      </a:r>
+                    </a:p>
+                  </a:txBody>
+                  <a:tcPr/>
+                </a:tc>
+                <a:extLst>
+                  <a:ext uri="{0D108BD9-81ED-4DB2-BD59-A6C34878D82A}">
+                    <a16:rowId xmlns:a16="http://schemas.microsoft.com/office/drawing/2014/main" val="4158958709"/>
+                  </a:ext>
+                </a:extLst>
+              </a:tr>
+              <a:tr h="288939">
+                <a:tc>
+                  <a:txBody>
+                    <a:bodyPr/>
+                    <a:lstStyle/>
+                    <a:p>
+                      <a:r>
+                        <a:rPr lang="en-IN" sz="1400" dirty="0"/>
+                        <a:t>November</a:t>
+                      </a:r>
+                    </a:p>
+                  </a:txBody>
+                  <a:tcPr/>
+                </a:tc>
+                <a:tc>
+                  <a:txBody>
+                    <a:bodyPr/>
+                    <a:lstStyle/>
+                    <a:p>
+                      <a:r>
+                        <a:rPr lang="en-IN" sz="1400" dirty="0"/>
+                        <a:t>User page, Admin page</a:t>
+                      </a:r>
+                    </a:p>
+                  </a:txBody>
+                  <a:tcPr/>
+                </a:tc>
+                <a:extLst>
+                  <a:ext uri="{0D108BD9-81ED-4DB2-BD59-A6C34878D82A}">
+                    <a16:rowId xmlns:a16="http://schemas.microsoft.com/office/drawing/2014/main" val="2584610655"/>
+                  </a:ext>
+                </a:extLst>
+              </a:tr>
+              <a:tr h="288939">
+                <a:tc>
+                  <a:txBody>
+                    <a:bodyPr/>
+                    <a:lstStyle/>
+                    <a:p>
+                      <a:r>
+                        <a:rPr lang="en-IN" sz="1400" dirty="0"/>
+                        <a:t>December</a:t>
+                      </a:r>
+                    </a:p>
+                  </a:txBody>
+                  <a:tcPr/>
+                </a:tc>
+                <a:tc>
+                  <a:txBody>
+                    <a:bodyPr/>
+                    <a:lstStyle/>
+                    <a:p>
+                      <a:r>
+                        <a:rPr lang="en-IN" sz="1400" dirty="0"/>
+                        <a:t>Back-end</a:t>
+                      </a:r>
+                    </a:p>
+                  </a:txBody>
+                  <a:tcPr/>
+                </a:tc>
+                <a:extLst>
+                  <a:ext uri="{0D108BD9-81ED-4DB2-BD59-A6C34878D82A}">
+                    <a16:rowId xmlns:a16="http://schemas.microsoft.com/office/drawing/2014/main" val="3421980882"/>
+                  </a:ext>
+                </a:extLst>
+              </a:tr>
+            </a:tbl>
+          </a:graphicData>
+        </a:graphic>
+      </p:graphicFrame>
+      <p:graphicFrame>
+        <p:nvGraphicFramePr>
+          <p:cNvPr id="5" name="Table 4">
+            <a:extLst>
+              <a:ext uri="{FF2B5EF4-FFF2-40B4-BE49-F238E27FC236}">
+                <a16:creationId xmlns:a16="http://schemas.microsoft.com/office/drawing/2014/main" id="{69F65371-6CE3-572D-B8EE-C7C6E03327DD}"/>
+              </a:ext>
+            </a:extLst>
+          </p:cNvPr>
+          <p:cNvGraphicFramePr>
+            <a:graphicFrameLocks noGrp="1"/>
+          </p:cNvGraphicFramePr>
+          <p:nvPr>
+            <p:extLst>
+              <p:ext uri="{D42A27DB-BD31-4B8C-83A1-F6EECF244321}">
+                <p14:modId xmlns:p14="http://schemas.microsoft.com/office/powerpoint/2010/main" val="4246563089"/>
+              </p:ext>
+            </p:extLst>
+          </p:nvPr>
+        </p:nvGraphicFramePr>
+        <p:xfrm>
+          <a:off x="5588932" y="4018691"/>
+          <a:ext cx="3974518" cy="1524000"/>
+        </p:xfrm>
+        <a:graphic>
+          <a:graphicData uri="http://schemas.openxmlformats.org/drawingml/2006/table">
+            <a:tbl>
+              <a:tblPr firstRow="1" bandRow="1">
+                <a:tableStyleId>{8799B23B-EC83-4686-B30A-512413B5E67A}</a:tableStyleId>
+              </a:tblPr>
+              <a:tblGrid>
+                <a:gridCol w="2013005">
+                  <a:extLst>
+                    <a:ext uri="{9D8B030D-6E8A-4147-A177-3AD203B41FA5}">
+                      <a16:colId xmlns:a16="http://schemas.microsoft.com/office/drawing/2014/main" val="841552173"/>
+                    </a:ext>
+                  </a:extLst>
+                </a:gridCol>
+                <a:gridCol w="1961513">
+                  <a:extLst>
+                    <a:ext uri="{9D8B030D-6E8A-4147-A177-3AD203B41FA5}">
+                      <a16:colId xmlns:a16="http://schemas.microsoft.com/office/drawing/2014/main" val="2311591390"/>
+                    </a:ext>
+                  </a:extLst>
+                </a:gridCol>
+              </a:tblGrid>
+              <a:tr h="293128">
+                <a:tc>
+                  <a:txBody>
+                    <a:bodyPr/>
+                    <a:lstStyle/>
+                    <a:p>
+                      <a:pPr algn="l"/>
+                      <a:r>
+                        <a:rPr lang="en-IN" sz="1400" b="0" dirty="0">
+                          <a:latin typeface="Calibri" panose="020F0502020204030204" pitchFamily="34" charset="0"/>
+                          <a:cs typeface="Calibri" panose="020F0502020204030204" pitchFamily="34" charset="0"/>
+                        </a:rPr>
+                        <a:t>January</a:t>
+                      </a:r>
+                    </a:p>
+                  </a:txBody>
+                  <a:tcPr/>
+                </a:tc>
+                <a:tc>
+                  <a:txBody>
+                    <a:bodyPr/>
+                    <a:lstStyle/>
+                    <a:p>
+                      <a:pPr algn="l"/>
+                      <a:r>
+                        <a:rPr lang="en-IN" sz="1400" b="0" dirty="0"/>
+                        <a:t>Back-end</a:t>
+                      </a:r>
+                    </a:p>
+                  </a:txBody>
+                  <a:tcPr/>
+                </a:tc>
+                <a:extLst>
+                  <a:ext uri="{0D108BD9-81ED-4DB2-BD59-A6C34878D82A}">
+                    <a16:rowId xmlns:a16="http://schemas.microsoft.com/office/drawing/2014/main" val="1694609104"/>
+                  </a:ext>
+                </a:extLst>
+              </a:tr>
+              <a:tr h="293128">
+                <a:tc>
+                  <a:txBody>
+                    <a:bodyPr/>
+                    <a:lstStyle/>
+                    <a:p>
+                      <a:pPr algn="l"/>
+                      <a:r>
+                        <a:rPr lang="en-IN" sz="1400" dirty="0"/>
+                        <a:t>February</a:t>
+                      </a:r>
+                    </a:p>
+                  </a:txBody>
+                  <a:tcPr/>
+                </a:tc>
+                <a:tc>
+                  <a:txBody>
+                    <a:bodyPr/>
+                    <a:lstStyle/>
+                    <a:p>
+                      <a:pPr marL="0" marR="0" lvl="0" indent="0" algn="l" defTabSz="914400" rtl="0" eaLnBrk="1" fontAlgn="auto" latinLnBrk="0" hangingPunct="1">
+                        <a:lnSpc>
+                          <a:spcPct val="100000"/>
+                        </a:lnSpc>
+                        <a:spcBef>
+                          <a:spcPts val="0"/>
+                        </a:spcBef>
+                        <a:spcAft>
+                          <a:spcPts val="0"/>
+                        </a:spcAft>
+                        <a:buClrTx/>
+                        <a:buSzTx/>
+                        <a:buFontTx/>
+                        <a:buNone/>
+                        <a:tabLst/>
+                        <a:defRPr/>
+                      </a:pPr>
+                      <a:r>
+                        <a:rPr lang="en-IN" sz="1400" dirty="0"/>
+                        <a:t>Paper work</a:t>
+                      </a:r>
+                    </a:p>
+                  </a:txBody>
+                  <a:tcPr/>
+                </a:tc>
+                <a:extLst>
+                  <a:ext uri="{0D108BD9-81ED-4DB2-BD59-A6C34878D82A}">
+                    <a16:rowId xmlns:a16="http://schemas.microsoft.com/office/drawing/2014/main" val="4158958709"/>
+                  </a:ext>
+                </a:extLst>
+              </a:tr>
+              <a:tr h="293128">
+                <a:tc>
+                  <a:txBody>
+                    <a:bodyPr/>
+                    <a:lstStyle/>
+                    <a:p>
+                      <a:pPr algn="l"/>
+                      <a:r>
+                        <a:rPr lang="en-IN" sz="1400" dirty="0"/>
+                        <a:t>March</a:t>
+                      </a:r>
+                    </a:p>
+                  </a:txBody>
+                  <a:tcPr/>
+                </a:tc>
+                <a:tc>
+                  <a:txBody>
+                    <a:bodyPr/>
+                    <a:lstStyle/>
+                    <a:p>
+                      <a:pPr marL="0" marR="0" lvl="0" indent="0" algn="l" defTabSz="914400" rtl="0" eaLnBrk="1" fontAlgn="auto" latinLnBrk="0" hangingPunct="1">
+                        <a:lnSpc>
+                          <a:spcPct val="100000"/>
+                        </a:lnSpc>
+                        <a:spcBef>
+                          <a:spcPts val="0"/>
+                        </a:spcBef>
+                        <a:spcAft>
+                          <a:spcPts val="0"/>
+                        </a:spcAft>
+                        <a:buClrTx/>
+                        <a:buSzTx/>
+                        <a:buFontTx/>
+                        <a:buNone/>
+                        <a:tabLst/>
+                        <a:defRPr/>
+                      </a:pPr>
+                      <a:r>
+                        <a:rPr lang="en-IN" sz="1400" dirty="0"/>
+                        <a:t>Paper work</a:t>
+                      </a:r>
+                    </a:p>
+                  </a:txBody>
+                  <a:tcPr/>
+                </a:tc>
+                <a:extLst>
+                  <a:ext uri="{0D108BD9-81ED-4DB2-BD59-A6C34878D82A}">
+                    <a16:rowId xmlns:a16="http://schemas.microsoft.com/office/drawing/2014/main" val="2584610655"/>
+                  </a:ext>
+                </a:extLst>
+              </a:tr>
+              <a:tr h="293128">
+                <a:tc>
+                  <a:txBody>
+                    <a:bodyPr/>
+                    <a:lstStyle/>
+                    <a:p>
+                      <a:pPr algn="l"/>
+                      <a:r>
+                        <a:rPr lang="en-IN" sz="1400" dirty="0"/>
+                        <a:t>April</a:t>
+                      </a:r>
+                    </a:p>
+                  </a:txBody>
+                  <a:tcPr/>
+                </a:tc>
+                <a:tc>
+                  <a:txBody>
+                    <a:bodyPr/>
+                    <a:lstStyle/>
+                    <a:p>
+                      <a:pPr algn="l"/>
+                      <a:r>
+                        <a:rPr lang="en-IN" sz="1400" dirty="0"/>
+                        <a:t>Paper work</a:t>
+                      </a:r>
+                    </a:p>
+                  </a:txBody>
+                  <a:tcPr/>
+                </a:tc>
+                <a:extLst>
+                  <a:ext uri="{0D108BD9-81ED-4DB2-BD59-A6C34878D82A}">
+                    <a16:rowId xmlns:a16="http://schemas.microsoft.com/office/drawing/2014/main" val="3421980882"/>
+                  </a:ext>
+                </a:extLst>
+              </a:tr>
+              <a:tr h="293128">
+                <a:tc>
+                  <a:txBody>
+                    <a:bodyPr/>
+                    <a:lstStyle/>
+                    <a:p>
+                      <a:pPr algn="l"/>
+                      <a:r>
+                        <a:rPr lang="en-IN" sz="1400" dirty="0"/>
+                        <a:t>May</a:t>
+                      </a:r>
+                    </a:p>
+                  </a:txBody>
+                  <a:tcPr/>
+                </a:tc>
+                <a:tc>
+                  <a:txBody>
+                    <a:bodyPr/>
+                    <a:lstStyle/>
+                    <a:p>
+                      <a:pPr algn="l"/>
+                      <a:r>
+                        <a:rPr lang="en-IN" sz="1400" dirty="0"/>
+                        <a:t>Paper work</a:t>
+                      </a:r>
+                    </a:p>
+                  </a:txBody>
+                  <a:tcPr/>
+                </a:tc>
+                <a:extLst>
+                  <a:ext uri="{0D108BD9-81ED-4DB2-BD59-A6C34878D82A}">
+                    <a16:rowId xmlns:a16="http://schemas.microsoft.com/office/drawing/2014/main" val="196728"/>
+                  </a:ext>
+                </a:extLst>
+              </a:tr>
+            </a:tbl>
+          </a:graphicData>
+        </a:graphic>
+      </p:graphicFrame>
+      <p:sp>
+        <p:nvSpPr>
+          <p:cNvPr id="6" name="Right Brace 5">
+            <a:extLst>
+              <a:ext uri="{FF2B5EF4-FFF2-40B4-BE49-F238E27FC236}">
+                <a16:creationId xmlns:a16="http://schemas.microsoft.com/office/drawing/2014/main" id="{17C8AC09-B065-50FC-BFA6-187EB4761E08}"/>
+              </a:ext>
+            </a:extLst>
+          </p:cNvPr>
+          <p:cNvSpPr/>
+          <p:nvPr/>
+        </p:nvSpPr>
+        <p:spPr>
+          <a:xfrm>
+            <a:off x="9808128" y="1921079"/>
+            <a:ext cx="90881" cy="727902"/>
+          </a:xfrm>
+          <a:prstGeom prst="rightBrace">
+            <a:avLst/>
+          </a:prstGeom>
+        </p:spPr>
+        <p:style>
+          <a:lnRef idx="1">
+            <a:schemeClr val="dk1"/>
+          </a:lnRef>
+          <a:fillRef idx="0">
+            <a:schemeClr val="dk1"/>
+          </a:fillRef>
+          <a:effectRef idx="0">
+            <a:schemeClr val="dk1"/>
+          </a:effectRef>
+          <a:fontRef idx="minor">
+            <a:schemeClr val="tx1"/>
+          </a:fontRef>
+        </p:style>
+        <p:txBody>
+          <a:bodyPr rtlCol="0" anchor="ctr"/>
+          <a:lstStyle/>
+          <a:p>
+            <a:pPr algn="ctr"/>
+            <a:endParaRPr lang="en-IN"/>
+          </a:p>
+        </p:txBody>
+      </p:sp>
+      <p:sp>
+        <p:nvSpPr>
+          <p:cNvPr id="8" name="TextBox 7">
+            <a:extLst>
+              <a:ext uri="{FF2B5EF4-FFF2-40B4-BE49-F238E27FC236}">
+                <a16:creationId xmlns:a16="http://schemas.microsoft.com/office/drawing/2014/main" id="{CE58CCD5-3239-0D2C-EFC3-666E5290728D}"/>
+              </a:ext>
+            </a:extLst>
+          </p:cNvPr>
+          <p:cNvSpPr txBox="1"/>
+          <p:nvPr/>
+        </p:nvSpPr>
+        <p:spPr>
+          <a:xfrm>
+            <a:off x="10016455" y="2281806"/>
+            <a:ext cx="1367406" cy="276999"/>
+          </a:xfrm>
+          <a:prstGeom prst="rect">
+            <a:avLst/>
+          </a:prstGeom>
+          <a:noFill/>
+        </p:spPr>
+        <p:txBody>
+          <a:bodyPr wrap="square" rtlCol="0">
+            <a:spAutoFit/>
+          </a:bodyPr>
+          <a:lstStyle/>
+          <a:p>
+            <a:r>
+              <a:rPr lang="en-IN" sz="1200" dirty="0">
+                <a:latin typeface="Calibri" panose="020F0502020204030204" pitchFamily="34" charset="0"/>
+                <a:cs typeface="Calibri" panose="020F0502020204030204" pitchFamily="34" charset="0"/>
+              </a:rPr>
+              <a:t>Front-end</a:t>
+            </a:r>
+            <a:endParaRPr lang="en-IN" dirty="0">
+              <a:latin typeface="Calibri" panose="020F0502020204030204" pitchFamily="34" charset="0"/>
+              <a:cs typeface="Calibri" panose="020F0502020204030204" pitchFamily="34" charset="0"/>
+            </a:endParaRPr>
+          </a:p>
+        </p:txBody>
+      </p:sp>
     </p:spTree>
+    <p:extLst>
+      <p:ext uri="{BB962C8B-B14F-4D97-AF65-F5344CB8AC3E}">
+        <p14:creationId xmlns:p14="http://schemas.microsoft.com/office/powerpoint/2010/main" val="3699375884"/>
+      </p:ext>
+    </p:extLst>
   </p:cSld>
   <p:clrMapOvr>
     <a:masterClrMapping/>
@@ -11317,7 +10228,7 @@
 </p:sld>
 </file>
 
-<file path=ppt/slides/slide7.xml><?xml version="1.0" encoding="utf-8"?>
+<file path=ppt/slides/slide13.xml><?xml version="1.0" encoding="utf-8"?>
 <p:sld xmlns:a="http://schemas.openxmlformats.org/drawingml/2006/main" xmlns:r="http://schemas.openxmlformats.org/officeDocument/2006/relationships" xmlns:p="http://schemas.openxmlformats.org/presentationml/2006/main">
   <p:cSld>
     <p:spTree>
@@ -11389,7 +10300,7 @@
         <p:spPr>
           <a:xfrm>
             <a:off x="0" y="6550223"/>
-            <a:ext cx="12191999" cy="307777"/>
+            <a:ext cx="12191999" cy="306705"/>
           </a:xfrm>
           <a:prstGeom prst="rect">
             <a:avLst/>
@@ -11412,7 +10323,7 @@
                   </a:schemeClr>
                 </a:solidFill>
               </a:rPr>
-              <a:t>06</a:t>
+              <a:t>12</a:t>
             </a:r>
             <a:endParaRPr lang="en-IN" sz="1400" dirty="0">
               <a:solidFill>
@@ -11433,7 +10344,7 @@
         </p:nvSpPr>
         <p:spPr>
           <a:xfrm>
-            <a:off x="0" y="661851"/>
+            <a:off x="0" y="2692874"/>
             <a:ext cx="12191999" cy="584775"/>
           </a:xfrm>
           <a:prstGeom prst="rect">
@@ -11456,7 +10367,7 @@
                 <a:latin typeface="Times New Roman" panose="02020603050405020304" pitchFamily="18" charset="0"/>
                 <a:cs typeface="Times New Roman" panose="02020603050405020304" pitchFamily="18" charset="0"/>
               </a:rPr>
-              <a:t>PROPOSED SYSTEM</a:t>
+              <a:t>THANKS</a:t>
             </a:r>
             <a:endParaRPr lang="en-IN" sz="3200" dirty="0">
               <a:solidFill>
@@ -11468,77 +10379,7 @@
           </a:p>
         </p:txBody>
       </p:sp>
-      <p:sp>
-        <p:nvSpPr>
-          <p:cNvPr id="3" name="TextBox 2"/>
-          <p:cNvSpPr txBox="1"/>
-          <p:nvPr/>
-        </p:nvSpPr>
-        <p:spPr>
-          <a:xfrm>
-            <a:off x="2508069" y="2203380"/>
-            <a:ext cx="7445828" cy="1711366"/>
-          </a:xfrm>
-          <a:prstGeom prst="rect">
-            <a:avLst/>
-          </a:prstGeom>
-          <a:noFill/>
-        </p:spPr>
-        <p:txBody>
-          <a:bodyPr wrap="square" rtlCol="0">
-            <a:spAutoFit/>
-          </a:bodyPr>
-          <a:lstStyle/>
-          <a:p>
-            <a:pPr marL="285750" indent="-285750" algn="just">
-              <a:lnSpc>
-                <a:spcPct val="150000"/>
-              </a:lnSpc>
-              <a:buClr>
-                <a:schemeClr val="bg2">
-                  <a:lumMod val="25000"/>
-                </a:schemeClr>
-              </a:buClr>
-              <a:buFont typeface="Wingdings" panose="05000000000000000000" pitchFamily="2" charset="2"/>
-              <a:buChar char="§"/>
-            </a:pPr>
-            <a:r>
-              <a:rPr lang="en-US" sz="1800" dirty="0">
-                <a:latin typeface="Calibri" panose="020F0502020204030204" pitchFamily="34" charset="0"/>
-                <a:cs typeface="Calibri" panose="020F0502020204030204" pitchFamily="34" charset="0"/>
-              </a:rPr>
-              <a:t>We develop a platform on which a customer may launch their own online e-commerce site.</a:t>
-            </a:r>
-          </a:p>
-          <a:p>
-            <a:pPr marL="285750" indent="-285750" algn="just">
-              <a:lnSpc>
-                <a:spcPct val="150000"/>
-              </a:lnSpc>
-              <a:buClr>
-                <a:schemeClr val="bg2">
-                  <a:lumMod val="25000"/>
-                </a:schemeClr>
-              </a:buClr>
-              <a:buFont typeface="Wingdings" panose="05000000000000000000" pitchFamily="2" charset="2"/>
-              <a:buChar char="§"/>
-            </a:pPr>
-            <a:r>
-              <a:rPr lang="en-US" sz="1800" dirty="0">
-                <a:latin typeface="Calibri" panose="020F0502020204030204" pitchFamily="34" charset="0"/>
-                <a:cs typeface="Calibri" panose="020F0502020204030204" pitchFamily="34" charset="0"/>
-              </a:rPr>
-              <a:t>Users may browse shops based on their location and purchase things from their favorite stores.</a:t>
-            </a:r>
-          </a:p>
-        </p:txBody>
-      </p:sp>
     </p:spTree>
-    <p:extLst>
-      <p:ext uri="{BB962C8B-B14F-4D97-AF65-F5344CB8AC3E}">
-        <p14:creationId xmlns:p14="http://schemas.microsoft.com/office/powerpoint/2010/main" val="977234123"/>
-      </p:ext>
-    </p:extLst>
   </p:cSld>
   <p:clrMapOvr>
     <a:masterClrMapping/>
@@ -11546,7 +10387,7 @@
 </p:sld>
 </file>
 
-<file path=ppt/slides/slide8.xml><?xml version="1.0" encoding="utf-8"?>
+<file path=ppt/slides/slide2.xml><?xml version="1.0" encoding="utf-8"?>
 <p:sld xmlns:a="http://schemas.openxmlformats.org/drawingml/2006/main" xmlns:r="http://schemas.openxmlformats.org/officeDocument/2006/relationships" xmlns:p="http://schemas.openxmlformats.org/presentationml/2006/main">
   <p:cSld>
     <p:spTree>
@@ -11641,7 +10482,1141 @@
                   </a:schemeClr>
                 </a:solidFill>
               </a:rPr>
-              <a:t>07</a:t>
+              <a:t>01</a:t>
+            </a:r>
+            <a:endParaRPr lang="en-IN" sz="1400" dirty="0">
+              <a:solidFill>
+                <a:schemeClr val="tx1">
+                  <a:lumMod val="50000"/>
+                  <a:lumOff val="50000"/>
+                </a:schemeClr>
+              </a:solidFill>
+            </a:endParaRPr>
+          </a:p>
+        </p:txBody>
+      </p:sp>
+      <p:sp>
+        <p:nvSpPr>
+          <p:cNvPr id="2" name="TextBox 1"/>
+          <p:cNvSpPr txBox="1"/>
+          <p:nvPr/>
+        </p:nvSpPr>
+        <p:spPr>
+          <a:xfrm>
+            <a:off x="0" y="661851"/>
+            <a:ext cx="12191999" cy="584775"/>
+          </a:xfrm>
+          <a:prstGeom prst="rect">
+            <a:avLst/>
+          </a:prstGeom>
+          <a:noFill/>
+        </p:spPr>
+        <p:txBody>
+          <a:bodyPr wrap="square" rtlCol="0">
+            <a:spAutoFit/>
+          </a:bodyPr>
+          <a:lstStyle/>
+          <a:p>
+            <a:pPr algn="ctr"/>
+            <a:r>
+              <a:rPr lang="en-US" sz="3200" dirty="0">
+                <a:solidFill>
+                  <a:srgbClr val="002060"/>
+                </a:solidFill>
+                <a:latin typeface="Times New Roman" panose="02020603050405020304" pitchFamily="18" charset="0"/>
+                <a:cs typeface="Times New Roman" panose="02020603050405020304" pitchFamily="18" charset="0"/>
+              </a:rPr>
+              <a:t>OBJECTIVE</a:t>
+            </a:r>
+            <a:endParaRPr lang="en-IN" sz="3200" dirty="0">
+              <a:solidFill>
+                <a:srgbClr val="002060"/>
+              </a:solidFill>
+              <a:latin typeface="Times New Roman" panose="02020603050405020304" pitchFamily="18" charset="0"/>
+              <a:cs typeface="Times New Roman" panose="02020603050405020304" pitchFamily="18" charset="0"/>
+            </a:endParaRPr>
+          </a:p>
+        </p:txBody>
+      </p:sp>
+      <p:sp>
+        <p:nvSpPr>
+          <p:cNvPr id="3" name="TextBox 2"/>
+          <p:cNvSpPr txBox="1"/>
+          <p:nvPr/>
+        </p:nvSpPr>
+        <p:spPr>
+          <a:xfrm>
+            <a:off x="2214695" y="1909765"/>
+            <a:ext cx="7919206" cy="3372590"/>
+          </a:xfrm>
+          <a:prstGeom prst="rect">
+            <a:avLst/>
+          </a:prstGeom>
+          <a:noFill/>
+        </p:spPr>
+        <p:txBody>
+          <a:bodyPr wrap="square" rtlCol="0">
+            <a:spAutoFit/>
+          </a:bodyPr>
+          <a:lstStyle/>
+          <a:p>
+            <a:pPr marL="285750" indent="-285750" algn="just">
+              <a:lnSpc>
+                <a:spcPct val="150000"/>
+              </a:lnSpc>
+              <a:buClr>
+                <a:schemeClr val="bg2">
+                  <a:lumMod val="25000"/>
+                </a:schemeClr>
+              </a:buClr>
+              <a:buFont typeface="Wingdings" panose="05000000000000000000" pitchFamily="2" charset="2"/>
+              <a:buChar char="§"/>
+            </a:pPr>
+            <a:r>
+              <a:rPr lang="en-US" dirty="0">
+                <a:effectLst/>
+                <a:latin typeface="Calibri" panose="020F0502020204030204" pitchFamily="34" charset="0"/>
+                <a:cs typeface="Calibri" panose="020F0502020204030204" pitchFamily="34" charset="0"/>
+              </a:rPr>
+              <a:t>To create a platform on which a customer can launch their own online e-commerce site of any type, such as groceries, electronics, hotels, and so on.</a:t>
+            </a:r>
+          </a:p>
+          <a:p>
+            <a:pPr algn="just">
+              <a:lnSpc>
+                <a:spcPct val="150000"/>
+              </a:lnSpc>
+              <a:buClr>
+                <a:schemeClr val="bg2">
+                  <a:lumMod val="25000"/>
+                </a:schemeClr>
+              </a:buClr>
+            </a:pPr>
+            <a:endParaRPr lang="en-US" sz="1800" dirty="0">
+              <a:latin typeface="Calibri" panose="020F0502020204030204" pitchFamily="34" charset="0"/>
+              <a:cs typeface="Calibri" panose="020F0502020204030204" pitchFamily="34" charset="0"/>
+            </a:endParaRPr>
+          </a:p>
+          <a:p>
+            <a:pPr marL="285750" indent="-285750" algn="just">
+              <a:lnSpc>
+                <a:spcPct val="150000"/>
+              </a:lnSpc>
+              <a:buClr>
+                <a:schemeClr val="bg2">
+                  <a:lumMod val="25000"/>
+                </a:schemeClr>
+              </a:buClr>
+              <a:buFont typeface="Wingdings" panose="05000000000000000000" pitchFamily="2" charset="2"/>
+              <a:buChar char="§"/>
+            </a:pPr>
+            <a:r>
+              <a:rPr lang="en-US" dirty="0">
+                <a:effectLst/>
+                <a:latin typeface="Calibri" panose="020F0502020204030204" pitchFamily="34" charset="0"/>
+                <a:cs typeface="Calibri" panose="020F0502020204030204" pitchFamily="34" charset="0"/>
+              </a:rPr>
+              <a:t>Allow users to browse stores based on their location and buy items from their </a:t>
+            </a:r>
+            <a:r>
+              <a:rPr lang="en-US" dirty="0" err="1">
+                <a:effectLst/>
+                <a:latin typeface="Calibri" panose="020F0502020204030204" pitchFamily="34" charset="0"/>
+                <a:cs typeface="Calibri" panose="020F0502020204030204" pitchFamily="34" charset="0"/>
+              </a:rPr>
+              <a:t>favourite</a:t>
+            </a:r>
+            <a:r>
+              <a:rPr lang="en-US" dirty="0">
+                <a:effectLst/>
+                <a:latin typeface="Calibri" panose="020F0502020204030204" pitchFamily="34" charset="0"/>
+                <a:cs typeface="Calibri" panose="020F0502020204030204" pitchFamily="34" charset="0"/>
+              </a:rPr>
+              <a:t> stores</a:t>
+            </a:r>
+            <a:r>
+              <a:rPr lang="en-US" sz="1800" dirty="0">
+                <a:latin typeface="Calibri" panose="020F0502020204030204" pitchFamily="34" charset="0"/>
+                <a:cs typeface="Calibri" panose="020F0502020204030204" pitchFamily="34" charset="0"/>
+              </a:rPr>
+              <a:t>.</a:t>
+            </a:r>
+          </a:p>
+          <a:p>
+            <a:pPr algn="just">
+              <a:lnSpc>
+                <a:spcPct val="150000"/>
+              </a:lnSpc>
+              <a:buClr>
+                <a:schemeClr val="bg2">
+                  <a:lumMod val="25000"/>
+                </a:schemeClr>
+              </a:buClr>
+            </a:pPr>
+            <a:endParaRPr lang="en-US" sz="1800" dirty="0">
+              <a:latin typeface="Calibri" panose="020F0502020204030204" pitchFamily="34" charset="0"/>
+              <a:cs typeface="Calibri" panose="020F0502020204030204" pitchFamily="34" charset="0"/>
+            </a:endParaRPr>
+          </a:p>
+          <a:p>
+            <a:pPr marL="285750" indent="-285750" algn="just">
+              <a:lnSpc>
+                <a:spcPct val="150000"/>
+              </a:lnSpc>
+              <a:buClr>
+                <a:schemeClr val="bg2">
+                  <a:lumMod val="25000"/>
+                </a:schemeClr>
+              </a:buClr>
+              <a:buFont typeface="Wingdings" panose="05000000000000000000" pitchFamily="2" charset="2"/>
+              <a:buChar char="§"/>
+            </a:pPr>
+            <a:r>
+              <a:rPr lang="en-US" sz="1800" dirty="0">
+                <a:latin typeface="Calibri" panose="020F0502020204030204" pitchFamily="34" charset="0"/>
+                <a:cs typeface="Calibri" panose="020F0502020204030204" pitchFamily="34" charset="0"/>
+              </a:rPr>
+              <a:t>We want to do sentiment analysis on shop reviews using Multinomial Naive Bayes.</a:t>
+            </a:r>
+          </a:p>
+        </p:txBody>
+      </p:sp>
+    </p:spTree>
+    <p:extLst>
+      <p:ext uri="{BB962C8B-B14F-4D97-AF65-F5344CB8AC3E}">
+        <p14:creationId xmlns:p14="http://schemas.microsoft.com/office/powerpoint/2010/main" val="977234123"/>
+      </p:ext>
+    </p:extLst>
+  </p:cSld>
+  <p:clrMapOvr>
+    <a:masterClrMapping/>
+  </p:clrMapOvr>
+</p:sld>
+</file>
+
+<file path=ppt/slides/slide3.xml><?xml version="1.0" encoding="utf-8"?>
+<p:sld xmlns:a="http://schemas.openxmlformats.org/drawingml/2006/main" xmlns:r="http://schemas.openxmlformats.org/officeDocument/2006/relationships" xmlns:p="http://schemas.openxmlformats.org/presentationml/2006/main">
+  <p:cSld>
+    <p:spTree>
+      <p:nvGrpSpPr>
+        <p:cNvPr id="1" name=""/>
+        <p:cNvGrpSpPr/>
+        <p:nvPr/>
+      </p:nvGrpSpPr>
+      <p:grpSpPr>
+        <a:xfrm>
+          <a:off x="0" y="0"/>
+          <a:ext cx="0" cy="0"/>
+          <a:chOff x="0" y="0"/>
+          <a:chExt cx="0" cy="0"/>
+        </a:xfrm>
+      </p:grpSpPr>
+      <p:sp>
+        <p:nvSpPr>
+          <p:cNvPr id="10" name="Rectangle 9"/>
+          <p:cNvSpPr/>
+          <p:nvPr/>
+        </p:nvSpPr>
+        <p:spPr>
+          <a:xfrm>
+            <a:off x="0" y="6509857"/>
+            <a:ext cx="12191999" cy="348143"/>
+          </a:xfrm>
+          <a:prstGeom prst="rect">
+            <a:avLst/>
+          </a:prstGeom>
+          <a:solidFill>
+            <a:schemeClr val="accent3">
+              <a:alpha val="50000"/>
+            </a:schemeClr>
+          </a:solidFill>
+          <a:ln>
+            <a:noFill/>
+          </a:ln>
+        </p:spPr>
+        <p:style>
+          <a:lnRef idx="0">
+            <a:scrgbClr r="0" g="0" b="0"/>
+          </a:lnRef>
+          <a:fillRef idx="0">
+            <a:scrgbClr r="0" g="0" b="0"/>
+          </a:fillRef>
+          <a:effectRef idx="0">
+            <a:scrgbClr r="0" g="0" b="0"/>
+          </a:effectRef>
+          <a:fontRef idx="minor">
+            <a:schemeClr val="lt1"/>
+          </a:fontRef>
+        </p:style>
+        <p:txBody>
+          <a:bodyPr rtlCol="0" anchor="ctr"/>
+          <a:lstStyle/>
+          <a:p>
+            <a:pPr algn="ctr"/>
+            <a:endParaRPr lang="en-IN"/>
+          </a:p>
+        </p:txBody>
+      </p:sp>
+      <p:sp>
+        <p:nvSpPr>
+          <p:cNvPr id="13" name="TextBox 12"/>
+          <p:cNvSpPr txBox="1"/>
+          <p:nvPr/>
+        </p:nvSpPr>
+        <p:spPr>
+          <a:xfrm>
+            <a:off x="0" y="6550223"/>
+            <a:ext cx="12191999" cy="307777"/>
+          </a:xfrm>
+          <a:prstGeom prst="rect">
+            <a:avLst/>
+          </a:prstGeom>
+          <a:noFill/>
+        </p:spPr>
+        <p:txBody>
+          <a:bodyPr wrap="square" rtlCol="0">
+            <a:spAutoFit/>
+          </a:bodyPr>
+          <a:lstStyle/>
+          <a:p>
+            <a:pPr algn="ctr"/>
+            <a:r>
+              <a:rPr lang="en-US" sz="1400" dirty="0">
+                <a:solidFill>
+                  <a:schemeClr val="tx1">
+                    <a:lumMod val="50000"/>
+                    <a:lumOff val="50000"/>
+                  </a:schemeClr>
+                </a:solidFill>
+              </a:rPr>
+              <a:t>02</a:t>
+            </a:r>
+            <a:endParaRPr lang="en-IN" sz="1400" dirty="0">
+              <a:solidFill>
+                <a:schemeClr val="tx1">
+                  <a:lumMod val="50000"/>
+                  <a:lumOff val="50000"/>
+                </a:schemeClr>
+              </a:solidFill>
+            </a:endParaRPr>
+          </a:p>
+        </p:txBody>
+      </p:sp>
+      <p:sp>
+        <p:nvSpPr>
+          <p:cNvPr id="2" name="TextBox 1"/>
+          <p:cNvSpPr txBox="1"/>
+          <p:nvPr/>
+        </p:nvSpPr>
+        <p:spPr>
+          <a:xfrm>
+            <a:off x="0" y="661851"/>
+            <a:ext cx="12191999" cy="584775"/>
+          </a:xfrm>
+          <a:prstGeom prst="rect">
+            <a:avLst/>
+          </a:prstGeom>
+          <a:noFill/>
+        </p:spPr>
+        <p:txBody>
+          <a:bodyPr wrap="square" rtlCol="0">
+            <a:spAutoFit/>
+          </a:bodyPr>
+          <a:lstStyle/>
+          <a:p>
+            <a:pPr algn="ctr"/>
+            <a:r>
+              <a:rPr lang="en-US" sz="3200" dirty="0">
+                <a:solidFill>
+                  <a:srgbClr val="002060"/>
+                </a:solidFill>
+                <a:latin typeface="Times New Roman" panose="02020603050405020304" pitchFamily="18" charset="0"/>
+                <a:cs typeface="Times New Roman" panose="02020603050405020304" pitchFamily="18" charset="0"/>
+              </a:rPr>
+              <a:t>EXISTING SYSTEMS</a:t>
+            </a:r>
+            <a:endParaRPr lang="en-IN" sz="3200" dirty="0">
+              <a:solidFill>
+                <a:srgbClr val="002060"/>
+              </a:solidFill>
+              <a:latin typeface="Times New Roman" panose="02020603050405020304" pitchFamily="18" charset="0"/>
+              <a:cs typeface="Times New Roman" panose="02020603050405020304" pitchFamily="18" charset="0"/>
+            </a:endParaRPr>
+          </a:p>
+        </p:txBody>
+      </p:sp>
+      <p:sp>
+        <p:nvSpPr>
+          <p:cNvPr id="3" name="TextBox 2">
+            <a:extLst>
+              <a:ext uri="{FF2B5EF4-FFF2-40B4-BE49-F238E27FC236}">
+                <a16:creationId xmlns:a16="http://schemas.microsoft.com/office/drawing/2014/main" id="{B42FFAFD-2B00-FAA9-9A5B-455B139FA55B}"/>
+              </a:ext>
+            </a:extLst>
+          </p:cNvPr>
+          <p:cNvSpPr txBox="1"/>
+          <p:nvPr/>
+        </p:nvSpPr>
+        <p:spPr>
+          <a:xfrm>
+            <a:off x="2508069" y="2203380"/>
+            <a:ext cx="7445828" cy="2126864"/>
+          </a:xfrm>
+          <a:prstGeom prst="rect">
+            <a:avLst/>
+          </a:prstGeom>
+          <a:noFill/>
+        </p:spPr>
+        <p:txBody>
+          <a:bodyPr wrap="square" rtlCol="0">
+            <a:spAutoFit/>
+          </a:bodyPr>
+          <a:lstStyle/>
+          <a:p>
+            <a:pPr marL="285750" indent="-285750" algn="just">
+              <a:lnSpc>
+                <a:spcPct val="150000"/>
+              </a:lnSpc>
+              <a:buClr>
+                <a:schemeClr val="bg2">
+                  <a:lumMod val="25000"/>
+                </a:schemeClr>
+              </a:buClr>
+              <a:buFont typeface="Wingdings" panose="05000000000000000000" pitchFamily="2" charset="2"/>
+              <a:buChar char="§"/>
+            </a:pPr>
+            <a:r>
+              <a:rPr lang="en-US" sz="1800" dirty="0">
+                <a:latin typeface="Calibri" panose="020F0502020204030204" pitchFamily="34" charset="0"/>
+                <a:cs typeface="Calibri" panose="020F0502020204030204" pitchFamily="34" charset="0"/>
+              </a:rPr>
+              <a:t>We can develop and manage e-commerce websites using open technologies such as WordPress, </a:t>
+            </a:r>
+            <a:r>
+              <a:rPr lang="en-US" sz="1800" dirty="0" err="1">
+                <a:latin typeface="Calibri" panose="020F0502020204030204" pitchFamily="34" charset="0"/>
+                <a:cs typeface="Calibri" panose="020F0502020204030204" pitchFamily="34" charset="0"/>
+              </a:rPr>
+              <a:t>Wix</a:t>
+            </a:r>
+            <a:r>
+              <a:rPr lang="en-US" sz="1800" dirty="0">
+                <a:latin typeface="Calibri" panose="020F0502020204030204" pitchFamily="34" charset="0"/>
+                <a:cs typeface="Calibri" panose="020F0502020204030204" pitchFamily="34" charset="0"/>
+              </a:rPr>
+              <a:t>, woo-commerce, and others.</a:t>
+            </a:r>
+          </a:p>
+          <a:p>
+            <a:pPr algn="just">
+              <a:lnSpc>
+                <a:spcPct val="150000"/>
+              </a:lnSpc>
+              <a:buClr>
+                <a:schemeClr val="bg2">
+                  <a:lumMod val="25000"/>
+                </a:schemeClr>
+              </a:buClr>
+            </a:pPr>
+            <a:endParaRPr lang="en-US" sz="1800" dirty="0">
+              <a:latin typeface="Calibri" panose="020F0502020204030204" pitchFamily="34" charset="0"/>
+              <a:cs typeface="Calibri" panose="020F0502020204030204" pitchFamily="34" charset="0"/>
+            </a:endParaRPr>
+          </a:p>
+          <a:p>
+            <a:pPr marL="285750" indent="-285750" algn="just">
+              <a:lnSpc>
+                <a:spcPct val="150000"/>
+              </a:lnSpc>
+              <a:buClr>
+                <a:schemeClr val="bg2">
+                  <a:lumMod val="25000"/>
+                </a:schemeClr>
+              </a:buClr>
+              <a:buFont typeface="Wingdings" panose="05000000000000000000" pitchFamily="2" charset="2"/>
+              <a:buChar char="§"/>
+            </a:pPr>
+            <a:r>
+              <a:rPr lang="en-US" sz="1800" dirty="0">
+                <a:latin typeface="Calibri" panose="020F0502020204030204" pitchFamily="34" charset="0"/>
+                <a:cs typeface="Calibri" panose="020F0502020204030204" pitchFamily="34" charset="0"/>
+              </a:rPr>
+              <a:t>We can list and sell our products on e-commerce sites like Flipkart and Amazon.</a:t>
+            </a:r>
+          </a:p>
+        </p:txBody>
+      </p:sp>
+    </p:spTree>
+    <p:extLst>
+      <p:ext uri="{BB962C8B-B14F-4D97-AF65-F5344CB8AC3E}">
+        <p14:creationId xmlns:p14="http://schemas.microsoft.com/office/powerpoint/2010/main" val="3128007638"/>
+      </p:ext>
+    </p:extLst>
+  </p:cSld>
+  <p:clrMapOvr>
+    <a:masterClrMapping/>
+  </p:clrMapOvr>
+</p:sld>
+</file>
+
+<file path=ppt/slides/slide4.xml><?xml version="1.0" encoding="utf-8"?>
+<p:sld xmlns:a="http://schemas.openxmlformats.org/drawingml/2006/main" xmlns:r="http://schemas.openxmlformats.org/officeDocument/2006/relationships" xmlns:p="http://schemas.openxmlformats.org/presentationml/2006/main">
+  <p:cSld>
+    <p:spTree>
+      <p:nvGrpSpPr>
+        <p:cNvPr id="1" name=""/>
+        <p:cNvGrpSpPr/>
+        <p:nvPr/>
+      </p:nvGrpSpPr>
+      <p:grpSpPr>
+        <a:xfrm>
+          <a:off x="0" y="0"/>
+          <a:ext cx="0" cy="0"/>
+          <a:chOff x="0" y="0"/>
+          <a:chExt cx="0" cy="0"/>
+        </a:xfrm>
+      </p:grpSpPr>
+      <p:sp>
+        <p:nvSpPr>
+          <p:cNvPr id="10" name="Rectangle 9"/>
+          <p:cNvSpPr/>
+          <p:nvPr/>
+        </p:nvSpPr>
+        <p:spPr>
+          <a:xfrm>
+            <a:off x="0" y="6509857"/>
+            <a:ext cx="12191999" cy="348143"/>
+          </a:xfrm>
+          <a:prstGeom prst="rect">
+            <a:avLst/>
+          </a:prstGeom>
+          <a:solidFill>
+            <a:schemeClr val="accent3">
+              <a:alpha val="50000"/>
+            </a:schemeClr>
+          </a:solidFill>
+          <a:ln>
+            <a:noFill/>
+          </a:ln>
+        </p:spPr>
+        <p:style>
+          <a:lnRef idx="0">
+            <a:scrgbClr r="0" g="0" b="0"/>
+          </a:lnRef>
+          <a:fillRef idx="0">
+            <a:scrgbClr r="0" g="0" b="0"/>
+          </a:fillRef>
+          <a:effectRef idx="0">
+            <a:scrgbClr r="0" g="0" b="0"/>
+          </a:effectRef>
+          <a:fontRef idx="minor">
+            <a:schemeClr val="lt1"/>
+          </a:fontRef>
+        </p:style>
+        <p:txBody>
+          <a:bodyPr rtlCol="0" anchor="ctr"/>
+          <a:lstStyle/>
+          <a:p>
+            <a:pPr algn="ctr"/>
+            <a:endParaRPr lang="en-IN"/>
+          </a:p>
+        </p:txBody>
+      </p:sp>
+      <p:sp>
+        <p:nvSpPr>
+          <p:cNvPr id="13" name="TextBox 12"/>
+          <p:cNvSpPr txBox="1"/>
+          <p:nvPr/>
+        </p:nvSpPr>
+        <p:spPr>
+          <a:xfrm>
+            <a:off x="0" y="6550223"/>
+            <a:ext cx="12191999" cy="307777"/>
+          </a:xfrm>
+          <a:prstGeom prst="rect">
+            <a:avLst/>
+          </a:prstGeom>
+          <a:noFill/>
+        </p:spPr>
+        <p:txBody>
+          <a:bodyPr wrap="square" rtlCol="0">
+            <a:spAutoFit/>
+          </a:bodyPr>
+          <a:lstStyle/>
+          <a:p>
+            <a:pPr algn="ctr"/>
+            <a:r>
+              <a:rPr lang="en-US" sz="1400" dirty="0">
+                <a:solidFill>
+                  <a:schemeClr val="tx1">
+                    <a:lumMod val="50000"/>
+                    <a:lumOff val="50000"/>
+                  </a:schemeClr>
+                </a:solidFill>
+              </a:rPr>
+              <a:t>03</a:t>
+            </a:r>
+            <a:endParaRPr lang="en-IN" sz="1400" dirty="0">
+              <a:solidFill>
+                <a:schemeClr val="tx1">
+                  <a:lumMod val="50000"/>
+                  <a:lumOff val="50000"/>
+                </a:schemeClr>
+              </a:solidFill>
+            </a:endParaRPr>
+          </a:p>
+        </p:txBody>
+      </p:sp>
+      <p:sp>
+        <p:nvSpPr>
+          <p:cNvPr id="2" name="TextBox 1"/>
+          <p:cNvSpPr txBox="1"/>
+          <p:nvPr/>
+        </p:nvSpPr>
+        <p:spPr>
+          <a:xfrm>
+            <a:off x="0" y="661851"/>
+            <a:ext cx="12191999" cy="584775"/>
+          </a:xfrm>
+          <a:prstGeom prst="rect">
+            <a:avLst/>
+          </a:prstGeom>
+          <a:noFill/>
+        </p:spPr>
+        <p:txBody>
+          <a:bodyPr wrap="square" rtlCol="0">
+            <a:spAutoFit/>
+          </a:bodyPr>
+          <a:lstStyle/>
+          <a:p>
+            <a:pPr algn="ctr"/>
+            <a:r>
+              <a:rPr lang="en-US" sz="3200" dirty="0">
+                <a:solidFill>
+                  <a:srgbClr val="002060"/>
+                </a:solidFill>
+                <a:latin typeface="Times New Roman" panose="02020603050405020304" pitchFamily="18" charset="0"/>
+                <a:cs typeface="Times New Roman" panose="02020603050405020304" pitchFamily="18" charset="0"/>
+              </a:rPr>
+              <a:t>ISSUES IN EXISTING SYSTEMS</a:t>
+            </a:r>
+            <a:endParaRPr lang="en-IN" sz="3200" dirty="0">
+              <a:solidFill>
+                <a:srgbClr val="002060"/>
+              </a:solidFill>
+              <a:latin typeface="Times New Roman" panose="02020603050405020304" pitchFamily="18" charset="0"/>
+              <a:cs typeface="Times New Roman" panose="02020603050405020304" pitchFamily="18" charset="0"/>
+            </a:endParaRPr>
+          </a:p>
+        </p:txBody>
+      </p:sp>
+      <p:sp>
+        <p:nvSpPr>
+          <p:cNvPr id="3" name="TextBox 2"/>
+          <p:cNvSpPr txBox="1"/>
+          <p:nvPr/>
+        </p:nvSpPr>
+        <p:spPr>
+          <a:xfrm>
+            <a:off x="2508069" y="2161435"/>
+            <a:ext cx="7445828" cy="2957861"/>
+          </a:xfrm>
+          <a:prstGeom prst="rect">
+            <a:avLst/>
+          </a:prstGeom>
+          <a:noFill/>
+        </p:spPr>
+        <p:txBody>
+          <a:bodyPr wrap="square" rtlCol="0">
+            <a:spAutoFit/>
+          </a:bodyPr>
+          <a:lstStyle/>
+          <a:p>
+            <a:pPr marL="285750" indent="-285750" algn="just">
+              <a:lnSpc>
+                <a:spcPct val="150000"/>
+              </a:lnSpc>
+              <a:buClr>
+                <a:schemeClr val="bg2">
+                  <a:lumMod val="25000"/>
+                </a:schemeClr>
+              </a:buClr>
+              <a:buFont typeface="Courier New" panose="02070309020205020404" pitchFamily="49" charset="0"/>
+              <a:buChar char="o"/>
+            </a:pPr>
+            <a:r>
+              <a:rPr lang="en-US" sz="1800" dirty="0">
+                <a:latin typeface="Calibri" panose="020F0502020204030204" pitchFamily="34" charset="0"/>
+                <a:cs typeface="Calibri" panose="020F0502020204030204" pitchFamily="34" charset="0"/>
+              </a:rPr>
+              <a:t>We can build our website with open-source software, but getting clients is difficult.</a:t>
+            </a:r>
+          </a:p>
+          <a:p>
+            <a:pPr marL="285750" indent="-285750" algn="just">
+              <a:lnSpc>
+                <a:spcPct val="150000"/>
+              </a:lnSpc>
+              <a:buClr>
+                <a:schemeClr val="bg2">
+                  <a:lumMod val="25000"/>
+                </a:schemeClr>
+              </a:buClr>
+              <a:buFont typeface="Courier New" panose="02070309020205020404" pitchFamily="49" charset="0"/>
+              <a:buChar char="o"/>
+            </a:pPr>
+            <a:r>
+              <a:rPr lang="en-US" sz="1800" dirty="0">
+                <a:latin typeface="Calibri" panose="020F0502020204030204" pitchFamily="34" charset="0"/>
+                <a:cs typeface="Calibri" panose="020F0502020204030204" pitchFamily="34" charset="0"/>
+              </a:rPr>
+              <a:t>We cannot place our trust in every seller on Flipkart or Amazon.</a:t>
+            </a:r>
+          </a:p>
+          <a:p>
+            <a:pPr marL="285750" indent="-285750" algn="just">
+              <a:lnSpc>
+                <a:spcPct val="150000"/>
+              </a:lnSpc>
+              <a:buClr>
+                <a:schemeClr val="bg2">
+                  <a:lumMod val="25000"/>
+                </a:schemeClr>
+              </a:buClr>
+              <a:buFont typeface="Courier New" panose="02070309020205020404" pitchFamily="49" charset="0"/>
+              <a:buChar char="o"/>
+            </a:pPr>
+            <a:r>
+              <a:rPr lang="en-US" sz="1800" dirty="0">
+                <a:latin typeface="Calibri" panose="020F0502020204030204" pitchFamily="34" charset="0"/>
+                <a:cs typeface="Calibri" panose="020F0502020204030204" pitchFamily="34" charset="0"/>
+              </a:rPr>
+              <a:t>Shipping fees are expensive.</a:t>
+            </a:r>
+          </a:p>
+          <a:p>
+            <a:pPr marL="285750" indent="-285750" algn="just">
+              <a:lnSpc>
+                <a:spcPct val="150000"/>
+              </a:lnSpc>
+              <a:buClr>
+                <a:schemeClr val="bg2">
+                  <a:lumMod val="25000"/>
+                </a:schemeClr>
+              </a:buClr>
+              <a:buFont typeface="Courier New" panose="02070309020205020404" pitchFamily="49" charset="0"/>
+              <a:buChar char="o"/>
+            </a:pPr>
+            <a:r>
+              <a:rPr lang="en-US" sz="1800" dirty="0">
+                <a:latin typeface="Calibri" panose="020F0502020204030204" pitchFamily="34" charset="0"/>
+                <a:cs typeface="Calibri" panose="020F0502020204030204" pitchFamily="34" charset="0"/>
+              </a:rPr>
+              <a:t>We are unable to approach sellers when the product is fake.</a:t>
+            </a:r>
+          </a:p>
+          <a:p>
+            <a:pPr marL="285750" indent="-285750" algn="just">
+              <a:lnSpc>
+                <a:spcPct val="150000"/>
+              </a:lnSpc>
+              <a:buClr>
+                <a:schemeClr val="bg2">
+                  <a:lumMod val="25000"/>
+                </a:schemeClr>
+              </a:buClr>
+              <a:buFont typeface="Courier New" panose="02070309020205020404" pitchFamily="49" charset="0"/>
+              <a:buChar char="o"/>
+            </a:pPr>
+            <a:r>
+              <a:rPr lang="en-US" sz="1800" dirty="0">
+                <a:latin typeface="Calibri" panose="020F0502020204030204" pitchFamily="34" charset="0"/>
+                <a:cs typeface="Calibri" panose="020F0502020204030204" pitchFamily="34" charset="0"/>
+              </a:rPr>
+              <a:t>delivery delay.</a:t>
+            </a:r>
+          </a:p>
+          <a:p>
+            <a:pPr marL="285750" indent="-285750" algn="just">
+              <a:lnSpc>
+                <a:spcPct val="150000"/>
+              </a:lnSpc>
+              <a:buClr>
+                <a:schemeClr val="bg2">
+                  <a:lumMod val="25000"/>
+                </a:schemeClr>
+              </a:buClr>
+              <a:buFont typeface="Wingdings" panose="05000000000000000000" pitchFamily="2" charset="2"/>
+              <a:buChar char="§"/>
+            </a:pPr>
+            <a:endParaRPr lang="en-IN" dirty="0">
+              <a:latin typeface="Calibri" panose="020F0502020204030204" pitchFamily="34" charset="0"/>
+              <a:cs typeface="Calibri" panose="020F0502020204030204" pitchFamily="34" charset="0"/>
+            </a:endParaRPr>
+          </a:p>
+        </p:txBody>
+      </p:sp>
+    </p:spTree>
+  </p:cSld>
+  <p:clrMapOvr>
+    <a:masterClrMapping/>
+  </p:clrMapOvr>
+</p:sld>
+</file>
+
+<file path=ppt/slides/slide5.xml><?xml version="1.0" encoding="utf-8"?>
+<p:sld xmlns:a="http://schemas.openxmlformats.org/drawingml/2006/main" xmlns:r="http://schemas.openxmlformats.org/officeDocument/2006/relationships" xmlns:p="http://schemas.openxmlformats.org/presentationml/2006/main">
+  <p:cSld>
+    <p:spTree>
+      <p:nvGrpSpPr>
+        <p:cNvPr id="1" name=""/>
+        <p:cNvGrpSpPr/>
+        <p:nvPr/>
+      </p:nvGrpSpPr>
+      <p:grpSpPr>
+        <a:xfrm>
+          <a:off x="0" y="0"/>
+          <a:ext cx="0" cy="0"/>
+          <a:chOff x="0" y="0"/>
+          <a:chExt cx="0" cy="0"/>
+        </a:xfrm>
+      </p:grpSpPr>
+      <p:sp>
+        <p:nvSpPr>
+          <p:cNvPr id="10" name="Rectangle 9"/>
+          <p:cNvSpPr/>
+          <p:nvPr/>
+        </p:nvSpPr>
+        <p:spPr>
+          <a:xfrm>
+            <a:off x="0" y="6509857"/>
+            <a:ext cx="12191999" cy="348143"/>
+          </a:xfrm>
+          <a:prstGeom prst="rect">
+            <a:avLst/>
+          </a:prstGeom>
+          <a:solidFill>
+            <a:schemeClr val="accent3">
+              <a:alpha val="50000"/>
+            </a:schemeClr>
+          </a:solidFill>
+          <a:ln>
+            <a:noFill/>
+          </a:ln>
+        </p:spPr>
+        <p:style>
+          <a:lnRef idx="0">
+            <a:scrgbClr r="0" g="0" b="0"/>
+          </a:lnRef>
+          <a:fillRef idx="0">
+            <a:scrgbClr r="0" g="0" b="0"/>
+          </a:fillRef>
+          <a:effectRef idx="0">
+            <a:scrgbClr r="0" g="0" b="0"/>
+          </a:effectRef>
+          <a:fontRef idx="minor">
+            <a:schemeClr val="lt1"/>
+          </a:fontRef>
+        </p:style>
+        <p:txBody>
+          <a:bodyPr rtlCol="0" anchor="ctr"/>
+          <a:lstStyle/>
+          <a:p>
+            <a:pPr algn="ctr"/>
+            <a:endParaRPr lang="en-IN"/>
+          </a:p>
+        </p:txBody>
+      </p:sp>
+      <p:sp>
+        <p:nvSpPr>
+          <p:cNvPr id="13" name="TextBox 12"/>
+          <p:cNvSpPr txBox="1"/>
+          <p:nvPr/>
+        </p:nvSpPr>
+        <p:spPr>
+          <a:xfrm>
+            <a:off x="0" y="6550223"/>
+            <a:ext cx="12191999" cy="307777"/>
+          </a:xfrm>
+          <a:prstGeom prst="rect">
+            <a:avLst/>
+          </a:prstGeom>
+          <a:noFill/>
+        </p:spPr>
+        <p:txBody>
+          <a:bodyPr wrap="square" rtlCol="0">
+            <a:spAutoFit/>
+          </a:bodyPr>
+          <a:lstStyle/>
+          <a:p>
+            <a:pPr algn="ctr"/>
+            <a:r>
+              <a:rPr lang="en-US" sz="1400" dirty="0">
+                <a:solidFill>
+                  <a:schemeClr val="tx1">
+                    <a:lumMod val="50000"/>
+                    <a:lumOff val="50000"/>
+                  </a:schemeClr>
+                </a:solidFill>
+              </a:rPr>
+              <a:t>04</a:t>
+            </a:r>
+            <a:endParaRPr lang="en-IN" sz="1400" dirty="0">
+              <a:solidFill>
+                <a:schemeClr val="tx1">
+                  <a:lumMod val="50000"/>
+                  <a:lumOff val="50000"/>
+                </a:schemeClr>
+              </a:solidFill>
+            </a:endParaRPr>
+          </a:p>
+        </p:txBody>
+      </p:sp>
+      <p:sp>
+        <p:nvSpPr>
+          <p:cNvPr id="2" name="TextBox 1"/>
+          <p:cNvSpPr txBox="1"/>
+          <p:nvPr/>
+        </p:nvSpPr>
+        <p:spPr>
+          <a:xfrm>
+            <a:off x="0" y="661851"/>
+            <a:ext cx="12191999" cy="584775"/>
+          </a:xfrm>
+          <a:prstGeom prst="rect">
+            <a:avLst/>
+          </a:prstGeom>
+          <a:noFill/>
+        </p:spPr>
+        <p:txBody>
+          <a:bodyPr wrap="square" rtlCol="0">
+            <a:spAutoFit/>
+          </a:bodyPr>
+          <a:lstStyle/>
+          <a:p>
+            <a:pPr algn="ctr"/>
+            <a:r>
+              <a:rPr lang="en-US" sz="3200" dirty="0">
+                <a:solidFill>
+                  <a:srgbClr val="002060"/>
+                </a:solidFill>
+                <a:latin typeface="Times New Roman" panose="02020603050405020304" pitchFamily="18" charset="0"/>
+                <a:cs typeface="Times New Roman" panose="02020603050405020304" pitchFamily="18" charset="0"/>
+              </a:rPr>
+              <a:t>PROPOSED SYSTEM</a:t>
+            </a:r>
+            <a:endParaRPr lang="en-IN" sz="3200" dirty="0">
+              <a:solidFill>
+                <a:srgbClr val="002060"/>
+              </a:solidFill>
+              <a:latin typeface="Times New Roman" panose="02020603050405020304" pitchFamily="18" charset="0"/>
+              <a:cs typeface="Times New Roman" panose="02020603050405020304" pitchFamily="18" charset="0"/>
+            </a:endParaRPr>
+          </a:p>
+        </p:txBody>
+      </p:sp>
+      <p:sp>
+        <p:nvSpPr>
+          <p:cNvPr id="3" name="TextBox 2"/>
+          <p:cNvSpPr txBox="1"/>
+          <p:nvPr/>
+        </p:nvSpPr>
+        <p:spPr>
+          <a:xfrm>
+            <a:off x="2508069" y="2203380"/>
+            <a:ext cx="7445828" cy="2126095"/>
+          </a:xfrm>
+          <a:prstGeom prst="rect">
+            <a:avLst/>
+          </a:prstGeom>
+          <a:noFill/>
+        </p:spPr>
+        <p:txBody>
+          <a:bodyPr wrap="square" rtlCol="0">
+            <a:spAutoFit/>
+          </a:bodyPr>
+          <a:lstStyle/>
+          <a:p>
+            <a:pPr marL="285750" indent="-285750" algn="just">
+              <a:lnSpc>
+                <a:spcPct val="150000"/>
+              </a:lnSpc>
+              <a:buClr>
+                <a:schemeClr val="bg2">
+                  <a:lumMod val="25000"/>
+                </a:schemeClr>
+              </a:buClr>
+              <a:buFont typeface="Wingdings" panose="05000000000000000000" pitchFamily="2" charset="2"/>
+              <a:buChar char="§"/>
+            </a:pPr>
+            <a:r>
+              <a:rPr lang="en-US" sz="1800" dirty="0">
+                <a:latin typeface="Calibri" panose="020F0502020204030204" pitchFamily="34" charset="0"/>
+                <a:cs typeface="Calibri" panose="020F0502020204030204" pitchFamily="34" charset="0"/>
+              </a:rPr>
+              <a:t>We develop a platform on which a customer may launch their own online e-commerce site.</a:t>
+            </a:r>
+          </a:p>
+          <a:p>
+            <a:pPr marL="285750" indent="-285750" algn="just">
+              <a:lnSpc>
+                <a:spcPct val="150000"/>
+              </a:lnSpc>
+              <a:buClr>
+                <a:schemeClr val="bg2">
+                  <a:lumMod val="25000"/>
+                </a:schemeClr>
+              </a:buClr>
+              <a:buFont typeface="Wingdings" panose="05000000000000000000" pitchFamily="2" charset="2"/>
+              <a:buChar char="§"/>
+            </a:pPr>
+            <a:r>
+              <a:rPr lang="en-US" sz="1800" dirty="0">
+                <a:latin typeface="Calibri" panose="020F0502020204030204" pitchFamily="34" charset="0"/>
+                <a:cs typeface="Calibri" panose="020F0502020204030204" pitchFamily="34" charset="0"/>
+              </a:rPr>
+              <a:t>Users may browse shops based on their location and purchase things from their favorite stores.</a:t>
+            </a:r>
+          </a:p>
+          <a:p>
+            <a:pPr marL="285750" indent="-285750" algn="just">
+              <a:lnSpc>
+                <a:spcPct val="150000"/>
+              </a:lnSpc>
+              <a:buClr>
+                <a:schemeClr val="bg2">
+                  <a:lumMod val="25000"/>
+                </a:schemeClr>
+              </a:buClr>
+              <a:buFont typeface="Wingdings" panose="05000000000000000000" pitchFamily="2" charset="2"/>
+              <a:buChar char="§"/>
+            </a:pPr>
+            <a:r>
+              <a:rPr lang="en-US" dirty="0">
+                <a:latin typeface="Calibri" panose="020F0502020204030204" pitchFamily="34" charset="0"/>
+                <a:cs typeface="Calibri" panose="020F0502020204030204" pitchFamily="34" charset="0"/>
+              </a:rPr>
+              <a:t>S</a:t>
+            </a:r>
+            <a:r>
+              <a:rPr lang="en-US" sz="1800" dirty="0">
+                <a:latin typeface="Calibri" panose="020F0502020204030204" pitchFamily="34" charset="0"/>
+                <a:cs typeface="Calibri" panose="020F0502020204030204" pitchFamily="34" charset="0"/>
+              </a:rPr>
+              <a:t>entiment analysis on shop reviews using Multinomial Naive Bayes.</a:t>
+            </a:r>
+          </a:p>
+        </p:txBody>
+      </p:sp>
+    </p:spTree>
+    <p:extLst>
+      <p:ext uri="{BB962C8B-B14F-4D97-AF65-F5344CB8AC3E}">
+        <p14:creationId xmlns:p14="http://schemas.microsoft.com/office/powerpoint/2010/main" val="3308936054"/>
+      </p:ext>
+    </p:extLst>
+  </p:cSld>
+  <p:clrMapOvr>
+    <a:masterClrMapping/>
+  </p:clrMapOvr>
+</p:sld>
+</file>
+
+<file path=ppt/slides/slide6.xml><?xml version="1.0" encoding="utf-8"?>
+<p:sld xmlns:a="http://schemas.openxmlformats.org/drawingml/2006/main" xmlns:r="http://schemas.openxmlformats.org/officeDocument/2006/relationships" xmlns:p="http://schemas.openxmlformats.org/presentationml/2006/main">
+  <p:cSld>
+    <p:spTree>
+      <p:nvGrpSpPr>
+        <p:cNvPr id="1" name=""/>
+        <p:cNvGrpSpPr/>
+        <p:nvPr/>
+      </p:nvGrpSpPr>
+      <p:grpSpPr>
+        <a:xfrm>
+          <a:off x="0" y="0"/>
+          <a:ext cx="0" cy="0"/>
+          <a:chOff x="0" y="0"/>
+          <a:chExt cx="0" cy="0"/>
+        </a:xfrm>
+      </p:grpSpPr>
+      <p:sp>
+        <p:nvSpPr>
+          <p:cNvPr id="10" name="Rectangle 9"/>
+          <p:cNvSpPr/>
+          <p:nvPr/>
+        </p:nvSpPr>
+        <p:spPr>
+          <a:xfrm>
+            <a:off x="0" y="6509857"/>
+            <a:ext cx="12191999" cy="348143"/>
+          </a:xfrm>
+          <a:prstGeom prst="rect">
+            <a:avLst/>
+          </a:prstGeom>
+          <a:solidFill>
+            <a:schemeClr val="accent3">
+              <a:alpha val="50000"/>
+            </a:schemeClr>
+          </a:solidFill>
+          <a:ln>
+            <a:noFill/>
+          </a:ln>
+        </p:spPr>
+        <p:style>
+          <a:lnRef idx="0">
+            <a:scrgbClr r="0" g="0" b="0"/>
+          </a:lnRef>
+          <a:fillRef idx="0">
+            <a:scrgbClr r="0" g="0" b="0"/>
+          </a:fillRef>
+          <a:effectRef idx="0">
+            <a:scrgbClr r="0" g="0" b="0"/>
+          </a:effectRef>
+          <a:fontRef idx="minor">
+            <a:schemeClr val="lt1"/>
+          </a:fontRef>
+        </p:style>
+        <p:txBody>
+          <a:bodyPr rtlCol="0" anchor="ctr"/>
+          <a:lstStyle/>
+          <a:p>
+            <a:pPr algn="ctr"/>
+            <a:endParaRPr lang="en-IN"/>
+          </a:p>
+        </p:txBody>
+      </p:sp>
+      <p:sp>
+        <p:nvSpPr>
+          <p:cNvPr id="13" name="TextBox 12"/>
+          <p:cNvSpPr txBox="1"/>
+          <p:nvPr/>
+        </p:nvSpPr>
+        <p:spPr>
+          <a:xfrm>
+            <a:off x="0" y="6550223"/>
+            <a:ext cx="12191999" cy="307777"/>
+          </a:xfrm>
+          <a:prstGeom prst="rect">
+            <a:avLst/>
+          </a:prstGeom>
+          <a:noFill/>
+        </p:spPr>
+        <p:txBody>
+          <a:bodyPr wrap="square" rtlCol="0">
+            <a:spAutoFit/>
+          </a:bodyPr>
+          <a:lstStyle/>
+          <a:p>
+            <a:pPr algn="ctr"/>
+            <a:r>
+              <a:rPr lang="en-US" sz="1400" dirty="0">
+                <a:solidFill>
+                  <a:schemeClr val="tx1">
+                    <a:lumMod val="50000"/>
+                    <a:lumOff val="50000"/>
+                  </a:schemeClr>
+                </a:solidFill>
+              </a:rPr>
+              <a:t>05</a:t>
             </a:r>
             <a:endParaRPr lang="en-IN" sz="1400" dirty="0">
               <a:solidFill>
@@ -11746,7 +11721,7 @@
 </p:sld>
 </file>
 
-<file path=ppt/slides/slide9.xml><?xml version="1.0" encoding="utf-8"?>
+<file path=ppt/slides/slide7.xml><?xml version="1.0" encoding="utf-8"?>
 <p:sld xmlns:a="http://schemas.openxmlformats.org/drawingml/2006/main" xmlns:r="http://schemas.openxmlformats.org/officeDocument/2006/relationships" xmlns:p="http://schemas.openxmlformats.org/presentationml/2006/main">
   <p:cSld>
     <p:spTree>
@@ -11841,7 +11816,7 @@
                   </a:schemeClr>
                 </a:solidFill>
               </a:rPr>
-              <a:t>08</a:t>
+              <a:t>06</a:t>
             </a:r>
             <a:endParaRPr lang="en-IN" sz="1400" dirty="0">
               <a:solidFill>
@@ -12014,6 +11989,991 @@
         <p14:creationId xmlns:p14="http://schemas.microsoft.com/office/powerpoint/2010/main" val="1806424294"/>
       </p:ext>
     </p:extLst>
+  </p:cSld>
+  <p:clrMapOvr>
+    <a:masterClrMapping/>
+  </p:clrMapOvr>
+</p:sld>
+</file>
+
+<file path=ppt/slides/slide8.xml><?xml version="1.0" encoding="utf-8"?>
+<p:sld xmlns:a="http://schemas.openxmlformats.org/drawingml/2006/main" xmlns:r="http://schemas.openxmlformats.org/officeDocument/2006/relationships" xmlns:p="http://schemas.openxmlformats.org/presentationml/2006/main">
+  <p:cSld>
+    <p:spTree>
+      <p:nvGrpSpPr>
+        <p:cNvPr id="1" name=""/>
+        <p:cNvGrpSpPr/>
+        <p:nvPr/>
+      </p:nvGrpSpPr>
+      <p:grpSpPr>
+        <a:xfrm>
+          <a:off x="0" y="0"/>
+          <a:ext cx="0" cy="0"/>
+          <a:chOff x="0" y="0"/>
+          <a:chExt cx="0" cy="0"/>
+        </a:xfrm>
+      </p:grpSpPr>
+      <p:sp>
+        <p:nvSpPr>
+          <p:cNvPr id="10" name="Rectangle 9"/>
+          <p:cNvSpPr/>
+          <p:nvPr/>
+        </p:nvSpPr>
+        <p:spPr>
+          <a:xfrm>
+            <a:off x="0" y="6509857"/>
+            <a:ext cx="12191999" cy="348143"/>
+          </a:xfrm>
+          <a:prstGeom prst="rect">
+            <a:avLst/>
+          </a:prstGeom>
+          <a:solidFill>
+            <a:schemeClr val="accent3">
+              <a:alpha val="50000"/>
+            </a:schemeClr>
+          </a:solidFill>
+          <a:ln>
+            <a:noFill/>
+          </a:ln>
+        </p:spPr>
+        <p:style>
+          <a:lnRef idx="0">
+            <a:scrgbClr r="0" g="0" b="0"/>
+          </a:lnRef>
+          <a:fillRef idx="0">
+            <a:scrgbClr r="0" g="0" b="0"/>
+          </a:fillRef>
+          <a:effectRef idx="0">
+            <a:scrgbClr r="0" g="0" b="0"/>
+          </a:effectRef>
+          <a:fontRef idx="minor">
+            <a:schemeClr val="lt1"/>
+          </a:fontRef>
+        </p:style>
+        <p:txBody>
+          <a:bodyPr rtlCol="0" anchor="ctr"/>
+          <a:lstStyle/>
+          <a:p>
+            <a:pPr algn="ctr"/>
+            <a:endParaRPr lang="en-IN"/>
+          </a:p>
+        </p:txBody>
+      </p:sp>
+      <p:sp>
+        <p:nvSpPr>
+          <p:cNvPr id="13" name="TextBox 12"/>
+          <p:cNvSpPr txBox="1"/>
+          <p:nvPr/>
+        </p:nvSpPr>
+        <p:spPr>
+          <a:xfrm>
+            <a:off x="0" y="6550223"/>
+            <a:ext cx="12191999" cy="307777"/>
+          </a:xfrm>
+          <a:prstGeom prst="rect">
+            <a:avLst/>
+          </a:prstGeom>
+          <a:noFill/>
+        </p:spPr>
+        <p:txBody>
+          <a:bodyPr wrap="square" rtlCol="0">
+            <a:spAutoFit/>
+          </a:bodyPr>
+          <a:lstStyle/>
+          <a:p>
+            <a:pPr algn="ctr"/>
+            <a:r>
+              <a:rPr lang="en-US" sz="1400" dirty="0">
+                <a:solidFill>
+                  <a:schemeClr val="tx1">
+                    <a:lumMod val="50000"/>
+                    <a:lumOff val="50000"/>
+                  </a:schemeClr>
+                </a:solidFill>
+              </a:rPr>
+              <a:t>07</a:t>
+            </a:r>
+            <a:endParaRPr lang="en-IN" sz="1400" dirty="0">
+              <a:solidFill>
+                <a:schemeClr val="tx1">
+                  <a:lumMod val="50000"/>
+                  <a:lumOff val="50000"/>
+                </a:schemeClr>
+              </a:solidFill>
+            </a:endParaRPr>
+          </a:p>
+        </p:txBody>
+      </p:sp>
+      <p:sp>
+        <p:nvSpPr>
+          <p:cNvPr id="2" name="TextBox 1"/>
+          <p:cNvSpPr txBox="1"/>
+          <p:nvPr/>
+        </p:nvSpPr>
+        <p:spPr>
+          <a:xfrm>
+            <a:off x="0" y="661851"/>
+            <a:ext cx="12191999" cy="584775"/>
+          </a:xfrm>
+          <a:prstGeom prst="rect">
+            <a:avLst/>
+          </a:prstGeom>
+          <a:noFill/>
+        </p:spPr>
+        <p:txBody>
+          <a:bodyPr wrap="square" rtlCol="0">
+            <a:spAutoFit/>
+          </a:bodyPr>
+          <a:lstStyle/>
+          <a:p>
+            <a:pPr algn="ctr"/>
+            <a:r>
+              <a:rPr lang="en-US" sz="3200" dirty="0">
+                <a:solidFill>
+                  <a:srgbClr val="002060"/>
+                </a:solidFill>
+                <a:latin typeface="Times New Roman" panose="02020603050405020304" pitchFamily="18" charset="0"/>
+                <a:cs typeface="Times New Roman" panose="02020603050405020304" pitchFamily="18" charset="0"/>
+              </a:rPr>
+              <a:t>LITERATURE SURVEY</a:t>
+            </a:r>
+            <a:endParaRPr lang="en-IN" sz="3200" dirty="0">
+              <a:solidFill>
+                <a:srgbClr val="002060"/>
+              </a:solidFill>
+              <a:latin typeface="Times New Roman" panose="02020603050405020304" pitchFamily="18" charset="0"/>
+              <a:cs typeface="Times New Roman" panose="02020603050405020304" pitchFamily="18" charset="0"/>
+            </a:endParaRPr>
+          </a:p>
+        </p:txBody>
+      </p:sp>
+      <p:graphicFrame>
+        <p:nvGraphicFramePr>
+          <p:cNvPr id="5" name="Table 5">
+            <a:extLst>
+              <a:ext uri="{FF2B5EF4-FFF2-40B4-BE49-F238E27FC236}">
+                <a16:creationId xmlns:a16="http://schemas.microsoft.com/office/drawing/2014/main" id="{F788887B-3D28-1226-16C8-E6EDAC6CDFDD}"/>
+              </a:ext>
+            </a:extLst>
+          </p:cNvPr>
+          <p:cNvGraphicFramePr>
+            <a:graphicFrameLocks noGrp="1"/>
+          </p:cNvGraphicFramePr>
+          <p:nvPr>
+            <p:extLst>
+              <p:ext uri="{D42A27DB-BD31-4B8C-83A1-F6EECF244321}">
+                <p14:modId xmlns:p14="http://schemas.microsoft.com/office/powerpoint/2010/main" val="4287286393"/>
+              </p:ext>
+            </p:extLst>
+          </p:nvPr>
+        </p:nvGraphicFramePr>
+        <p:xfrm>
+          <a:off x="1818640" y="1710266"/>
+          <a:ext cx="8757920" cy="3434906"/>
+        </p:xfrm>
+        <a:graphic>
+          <a:graphicData uri="http://schemas.openxmlformats.org/drawingml/2006/table">
+            <a:tbl>
+              <a:tblPr firstRow="1" bandRow="1">
+                <a:tableStyleId>{8799B23B-EC83-4686-B30A-512413B5E67A}</a:tableStyleId>
+              </a:tblPr>
+              <a:tblGrid>
+                <a:gridCol w="4378960">
+                  <a:extLst>
+                    <a:ext uri="{9D8B030D-6E8A-4147-A177-3AD203B41FA5}">
+                      <a16:colId xmlns:a16="http://schemas.microsoft.com/office/drawing/2014/main" val="3659069085"/>
+                    </a:ext>
+                  </a:extLst>
+                </a:gridCol>
+                <a:gridCol w="4378960">
+                  <a:extLst>
+                    <a:ext uri="{9D8B030D-6E8A-4147-A177-3AD203B41FA5}">
+                      <a16:colId xmlns:a16="http://schemas.microsoft.com/office/drawing/2014/main" val="3409503166"/>
+                    </a:ext>
+                  </a:extLst>
+                </a:gridCol>
+              </a:tblGrid>
+              <a:tr h="748454">
+                <a:tc>
+                  <a:txBody>
+                    <a:bodyPr/>
+                    <a:lstStyle/>
+                    <a:p>
+                      <a:pPr algn="ctr"/>
+                      <a:r>
+                        <a:rPr lang="en-US" dirty="0">
+                          <a:solidFill>
+                            <a:schemeClr val="tx1">
+                              <a:lumMod val="85000"/>
+                              <a:lumOff val="15000"/>
+                            </a:schemeClr>
+                          </a:solidFill>
+                          <a:latin typeface="Calibri" panose="020F0502020204030204" pitchFamily="34" charset="0"/>
+                          <a:cs typeface="Calibri" panose="020F0502020204030204" pitchFamily="34" charset="0"/>
+                        </a:rPr>
+                        <a:t>Paper Details</a:t>
+                      </a:r>
+                      <a:endParaRPr lang="en-IN" dirty="0">
+                        <a:solidFill>
+                          <a:schemeClr val="tx1">
+                            <a:lumMod val="85000"/>
+                            <a:lumOff val="15000"/>
+                          </a:schemeClr>
+                        </a:solidFill>
+                        <a:latin typeface="Calibri" panose="020F0502020204030204" pitchFamily="34" charset="0"/>
+                        <a:cs typeface="Calibri" panose="020F0502020204030204" pitchFamily="34" charset="0"/>
+                      </a:endParaRPr>
+                    </a:p>
+                  </a:txBody>
+                  <a:tcPr anchor="ctr"/>
+                </a:tc>
+                <a:tc>
+                  <a:txBody>
+                    <a:bodyPr/>
+                    <a:lstStyle/>
+                    <a:p>
+                      <a:pPr algn="ctr"/>
+                      <a:r>
+                        <a:rPr lang="en-US" dirty="0">
+                          <a:solidFill>
+                            <a:schemeClr val="tx1">
+                              <a:lumMod val="85000"/>
+                              <a:lumOff val="15000"/>
+                            </a:schemeClr>
+                          </a:solidFill>
+                          <a:latin typeface="Calibri" panose="020F0502020204030204" pitchFamily="34" charset="0"/>
+                          <a:cs typeface="Calibri" panose="020F0502020204030204" pitchFamily="34" charset="0"/>
+                        </a:rPr>
+                        <a:t>Existing Work</a:t>
+                      </a:r>
+                      <a:endParaRPr lang="en-IN" dirty="0">
+                        <a:solidFill>
+                          <a:schemeClr val="tx1">
+                            <a:lumMod val="85000"/>
+                            <a:lumOff val="15000"/>
+                          </a:schemeClr>
+                        </a:solidFill>
+                        <a:latin typeface="Calibri" panose="020F0502020204030204" pitchFamily="34" charset="0"/>
+                        <a:cs typeface="Calibri" panose="020F0502020204030204" pitchFamily="34" charset="0"/>
+                      </a:endParaRPr>
+                    </a:p>
+                  </a:txBody>
+                  <a:tcPr anchor="ctr"/>
+                </a:tc>
+                <a:extLst>
+                  <a:ext uri="{0D108BD9-81ED-4DB2-BD59-A6C34878D82A}">
+                    <a16:rowId xmlns:a16="http://schemas.microsoft.com/office/drawing/2014/main" val="2884168137"/>
+                  </a:ext>
+                </a:extLst>
+              </a:tr>
+              <a:tr h="1343226">
+                <a:tc>
+                  <a:txBody>
+                    <a:bodyPr/>
+                    <a:lstStyle/>
+                    <a:p>
+                      <a:r>
+                        <a:rPr lang="en-US" sz="1400" b="1" kern="1200" dirty="0">
+                          <a:solidFill>
+                            <a:schemeClr val="tx1"/>
+                          </a:solidFill>
+                          <a:effectLst/>
+                          <a:latin typeface="Calibri" panose="020F0502020204030204" pitchFamily="34" charset="0"/>
+                          <a:ea typeface="+mn-ea"/>
+                          <a:cs typeface="Calibri" panose="020F0502020204030204" pitchFamily="34" charset="0"/>
+                        </a:rPr>
+                        <a:t>“</a:t>
+                      </a:r>
+                      <a:r>
+                        <a:rPr lang="en-IN" sz="1400" b="1" i="0" kern="1200" dirty="0">
+                          <a:solidFill>
+                            <a:schemeClr val="tx1"/>
+                          </a:solidFill>
+                          <a:effectLst/>
+                          <a:latin typeface="Calibri" panose="020F0502020204030204" pitchFamily="34" charset="0"/>
+                          <a:ea typeface="+mn-ea"/>
+                          <a:cs typeface="Calibri" panose="020F0502020204030204" pitchFamily="34" charset="0"/>
+                        </a:rPr>
+                        <a:t>Smart Local Shopping System</a:t>
+                      </a:r>
+                      <a:r>
+                        <a:rPr lang="en-US" sz="1400" b="1" kern="1200" dirty="0">
+                          <a:solidFill>
+                            <a:schemeClr val="tx1"/>
+                          </a:solidFill>
+                          <a:effectLst/>
+                          <a:latin typeface="Calibri" panose="020F0502020204030204" pitchFamily="34" charset="0"/>
+                          <a:ea typeface="+mn-ea"/>
+                          <a:cs typeface="Calibri" panose="020F0502020204030204" pitchFamily="34" charset="0"/>
+                        </a:rPr>
+                        <a:t>”</a:t>
+                      </a:r>
+                      <a:r>
+                        <a:rPr lang="en-US" sz="1400" kern="1200" dirty="0">
+                          <a:solidFill>
+                            <a:schemeClr val="tx1"/>
+                          </a:solidFill>
+                          <a:effectLst/>
+                          <a:latin typeface="Calibri" panose="020F0502020204030204" pitchFamily="34" charset="0"/>
+                          <a:ea typeface="+mn-ea"/>
+                          <a:cs typeface="Calibri" panose="020F0502020204030204" pitchFamily="34" charset="0"/>
+                        </a:rPr>
+                        <a:t>, </a:t>
+                      </a:r>
+                      <a:r>
+                        <a:rPr lang="en-IN" sz="1400" kern="1200" dirty="0">
+                          <a:solidFill>
+                            <a:schemeClr val="tx1"/>
+                          </a:solidFill>
+                          <a:effectLst/>
+                          <a:latin typeface="Calibri" panose="020F0502020204030204" pitchFamily="34" charset="0"/>
+                          <a:ea typeface="+mn-ea"/>
+                          <a:cs typeface="Calibri" panose="020F0502020204030204" pitchFamily="34" charset="0"/>
+                        </a:rPr>
+                        <a:t>Rohan </a:t>
+                      </a:r>
+                      <a:r>
+                        <a:rPr lang="en-IN" sz="1400" kern="1200" dirty="0" err="1">
+                          <a:solidFill>
+                            <a:schemeClr val="tx1"/>
+                          </a:solidFill>
+                          <a:effectLst/>
+                          <a:latin typeface="Calibri" panose="020F0502020204030204" pitchFamily="34" charset="0"/>
+                          <a:ea typeface="+mn-ea"/>
+                          <a:cs typeface="Calibri" panose="020F0502020204030204" pitchFamily="34" charset="0"/>
+                        </a:rPr>
+                        <a:t>Padaya</a:t>
+                      </a:r>
+                      <a:r>
+                        <a:rPr lang="en-IN" sz="1400" kern="1200" dirty="0">
+                          <a:solidFill>
+                            <a:schemeClr val="tx1"/>
+                          </a:solidFill>
+                          <a:effectLst/>
+                          <a:latin typeface="Calibri" panose="020F0502020204030204" pitchFamily="34" charset="0"/>
+                          <a:ea typeface="+mn-ea"/>
+                          <a:cs typeface="Calibri" panose="020F0502020204030204" pitchFamily="34" charset="0"/>
+                        </a:rPr>
+                        <a:t>, IEEE(2018).</a:t>
+                      </a:r>
+                      <a:endParaRPr lang="en-IN" sz="1400" dirty="0">
+                        <a:latin typeface="Calibri" panose="020F0502020204030204" pitchFamily="34" charset="0"/>
+                        <a:cs typeface="Calibri" panose="020F0502020204030204" pitchFamily="34" charset="0"/>
+                      </a:endParaRPr>
+                    </a:p>
+                  </a:txBody>
+                  <a:tcPr anchor="ctr"/>
+                </a:tc>
+                <a:tc>
+                  <a:txBody>
+                    <a:bodyPr/>
+                    <a:lstStyle/>
+                    <a:p>
+                      <a:pPr algn="just"/>
+                      <a:r>
+                        <a:rPr lang="en-US" sz="1400" b="0" dirty="0"/>
+                        <a:t>This paper's goal is to improve e-commerce marketing and push delivery using huge data from recent consumer search texts. In this work, the Word2vector technique is employed to analyze the big data.</a:t>
+                      </a:r>
+                      <a:endParaRPr lang="en-IN" sz="1400" b="0" dirty="0"/>
+                    </a:p>
+                  </a:txBody>
+                  <a:tcPr anchor="ctr"/>
+                </a:tc>
+                <a:extLst>
+                  <a:ext uri="{0D108BD9-81ED-4DB2-BD59-A6C34878D82A}">
+                    <a16:rowId xmlns:a16="http://schemas.microsoft.com/office/drawing/2014/main" val="877463710"/>
+                  </a:ext>
+                </a:extLst>
+              </a:tr>
+              <a:tr h="1343226">
+                <a:tc>
+                  <a:txBody>
+                    <a:bodyPr/>
+                    <a:lstStyle/>
+                    <a:p>
+                      <a:r>
+                        <a:rPr lang="en-US" sz="1400" b="1" kern="1200" dirty="0">
+                          <a:solidFill>
+                            <a:schemeClr val="tx1"/>
+                          </a:solidFill>
+                          <a:effectLst/>
+                          <a:latin typeface="Calibri" panose="020F0502020204030204" pitchFamily="34" charset="0"/>
+                          <a:ea typeface="+mn-ea"/>
+                          <a:cs typeface="Calibri" panose="020F0502020204030204" pitchFamily="34" charset="0"/>
+                        </a:rPr>
+                        <a:t>“Design and implementation of e-commerce system based on the Web”</a:t>
+                      </a:r>
+                      <a:r>
+                        <a:rPr lang="en-US" sz="1400" kern="1200" dirty="0">
+                          <a:solidFill>
+                            <a:schemeClr val="tx1"/>
+                          </a:solidFill>
+                          <a:effectLst/>
+                          <a:latin typeface="Calibri" panose="020F0502020204030204" pitchFamily="34" charset="0"/>
+                          <a:ea typeface="+mn-ea"/>
+                          <a:cs typeface="Calibri" panose="020F0502020204030204" pitchFamily="34" charset="0"/>
+                        </a:rPr>
+                        <a:t>,</a:t>
+                      </a:r>
+                      <a:r>
+                        <a:rPr lang="en-IN" sz="1400" kern="1200" dirty="0">
+                          <a:solidFill>
+                            <a:schemeClr val="tx1"/>
+                          </a:solidFill>
+                          <a:effectLst/>
+                          <a:latin typeface="Calibri" panose="020F0502020204030204" pitchFamily="34" charset="0"/>
+                          <a:ea typeface="+mn-ea"/>
+                          <a:cs typeface="Calibri" panose="020F0502020204030204" pitchFamily="34" charset="0"/>
+                        </a:rPr>
+                        <a:t> He </a:t>
+                      </a:r>
+                      <a:r>
+                        <a:rPr lang="en-IN" sz="1400" kern="1200" dirty="0" err="1">
+                          <a:solidFill>
+                            <a:schemeClr val="tx1"/>
+                          </a:solidFill>
+                          <a:effectLst/>
+                          <a:latin typeface="Calibri" panose="020F0502020204030204" pitchFamily="34" charset="0"/>
+                          <a:ea typeface="+mn-ea"/>
+                          <a:cs typeface="Calibri" panose="020F0502020204030204" pitchFamily="34" charset="0"/>
+                        </a:rPr>
+                        <a:t>JunHua</a:t>
+                      </a:r>
+                      <a:r>
+                        <a:rPr lang="en-IN" sz="1400" kern="1200" dirty="0">
+                          <a:solidFill>
+                            <a:schemeClr val="tx1"/>
+                          </a:solidFill>
+                          <a:effectLst/>
+                          <a:latin typeface="Calibri" panose="020F0502020204030204" pitchFamily="34" charset="0"/>
+                          <a:ea typeface="+mn-ea"/>
+                          <a:cs typeface="Calibri" panose="020F0502020204030204" pitchFamily="34" charset="0"/>
+                        </a:rPr>
+                        <a:t> , IEEE(2022).</a:t>
+                      </a:r>
+                      <a:endParaRPr lang="en-IN" sz="1400" dirty="0">
+                        <a:latin typeface="Calibri" panose="020F0502020204030204" pitchFamily="34" charset="0"/>
+                        <a:cs typeface="Calibri" panose="020F0502020204030204" pitchFamily="34" charset="0"/>
+                      </a:endParaRPr>
+                    </a:p>
+                  </a:txBody>
+                  <a:tcPr anchor="ctr"/>
+                </a:tc>
+                <a:tc>
+                  <a:txBody>
+                    <a:bodyPr/>
+                    <a:lstStyle/>
+                    <a:p>
+                      <a:pPr algn="just"/>
+                      <a:r>
+                        <a:rPr lang="en-US" sz="1400" b="0" dirty="0"/>
+                        <a:t>The proposal is a platform for store owners to advertise their goods and services to regular customers. This is a middleware solution between store owners and customers that serves as a  system of recommendations.</a:t>
+                      </a:r>
+                      <a:endParaRPr lang="en-IN" sz="1400" b="0" dirty="0"/>
+                    </a:p>
+                  </a:txBody>
+                  <a:tcPr anchor="ctr"/>
+                </a:tc>
+                <a:extLst>
+                  <a:ext uri="{0D108BD9-81ED-4DB2-BD59-A6C34878D82A}">
+                    <a16:rowId xmlns:a16="http://schemas.microsoft.com/office/drawing/2014/main" val="28950705"/>
+                  </a:ext>
+                </a:extLst>
+              </a:tr>
+            </a:tbl>
+          </a:graphicData>
+        </a:graphic>
+      </p:graphicFrame>
+    </p:spTree>
+    <p:extLst>
+      <p:ext uri="{BB962C8B-B14F-4D97-AF65-F5344CB8AC3E}">
+        <p14:creationId xmlns:p14="http://schemas.microsoft.com/office/powerpoint/2010/main" val="3101795224"/>
+      </p:ext>
+    </p:extLst>
+  </p:cSld>
+  <p:clrMapOvr>
+    <a:masterClrMapping/>
+  </p:clrMapOvr>
+</p:sld>
+</file>
+
+<file path=ppt/slides/slide9.xml><?xml version="1.0" encoding="utf-8"?>
+<p:sld xmlns:a="http://schemas.openxmlformats.org/drawingml/2006/main" xmlns:r="http://schemas.openxmlformats.org/officeDocument/2006/relationships" xmlns:p="http://schemas.openxmlformats.org/presentationml/2006/main">
+  <p:cSld>
+    <p:spTree>
+      <p:nvGrpSpPr>
+        <p:cNvPr id="1" name=""/>
+        <p:cNvGrpSpPr/>
+        <p:nvPr/>
+      </p:nvGrpSpPr>
+      <p:grpSpPr>
+        <a:xfrm>
+          <a:off x="0" y="0"/>
+          <a:ext cx="0" cy="0"/>
+          <a:chOff x="0" y="0"/>
+          <a:chExt cx="0" cy="0"/>
+        </a:xfrm>
+      </p:grpSpPr>
+      <p:sp>
+        <p:nvSpPr>
+          <p:cNvPr id="10" name="Rectangle 9"/>
+          <p:cNvSpPr/>
+          <p:nvPr/>
+        </p:nvSpPr>
+        <p:spPr>
+          <a:xfrm>
+            <a:off x="0" y="6509857"/>
+            <a:ext cx="12191999" cy="348143"/>
+          </a:xfrm>
+          <a:prstGeom prst="rect">
+            <a:avLst/>
+          </a:prstGeom>
+          <a:solidFill>
+            <a:schemeClr val="accent3">
+              <a:alpha val="50000"/>
+            </a:schemeClr>
+          </a:solidFill>
+          <a:ln>
+            <a:noFill/>
+          </a:ln>
+        </p:spPr>
+        <p:style>
+          <a:lnRef idx="0">
+            <a:scrgbClr r="0" g="0" b="0"/>
+          </a:lnRef>
+          <a:fillRef idx="0">
+            <a:scrgbClr r="0" g="0" b="0"/>
+          </a:fillRef>
+          <a:effectRef idx="0">
+            <a:scrgbClr r="0" g="0" b="0"/>
+          </a:effectRef>
+          <a:fontRef idx="minor">
+            <a:schemeClr val="lt1"/>
+          </a:fontRef>
+        </p:style>
+        <p:txBody>
+          <a:bodyPr rtlCol="0" anchor="ctr"/>
+          <a:lstStyle/>
+          <a:p>
+            <a:pPr algn="ctr"/>
+            <a:endParaRPr lang="en-IN"/>
+          </a:p>
+        </p:txBody>
+      </p:sp>
+      <p:sp>
+        <p:nvSpPr>
+          <p:cNvPr id="13" name="TextBox 12"/>
+          <p:cNvSpPr txBox="1"/>
+          <p:nvPr/>
+        </p:nvSpPr>
+        <p:spPr>
+          <a:xfrm>
+            <a:off x="0" y="6550223"/>
+            <a:ext cx="12191999" cy="307777"/>
+          </a:xfrm>
+          <a:prstGeom prst="rect">
+            <a:avLst/>
+          </a:prstGeom>
+          <a:noFill/>
+        </p:spPr>
+        <p:txBody>
+          <a:bodyPr wrap="square" rtlCol="0">
+            <a:spAutoFit/>
+          </a:bodyPr>
+          <a:lstStyle/>
+          <a:p>
+            <a:pPr algn="ctr"/>
+            <a:r>
+              <a:rPr lang="en-US" sz="1400" dirty="0">
+                <a:solidFill>
+                  <a:schemeClr val="tx1">
+                    <a:lumMod val="50000"/>
+                    <a:lumOff val="50000"/>
+                  </a:schemeClr>
+                </a:solidFill>
+              </a:rPr>
+              <a:t>08</a:t>
+            </a:r>
+            <a:endParaRPr lang="en-IN" sz="1400" dirty="0">
+              <a:solidFill>
+                <a:schemeClr val="tx1">
+                  <a:lumMod val="50000"/>
+                  <a:lumOff val="50000"/>
+                </a:schemeClr>
+              </a:solidFill>
+            </a:endParaRPr>
+          </a:p>
+        </p:txBody>
+      </p:sp>
+      <p:sp>
+        <p:nvSpPr>
+          <p:cNvPr id="2" name="TextBox 1"/>
+          <p:cNvSpPr txBox="1"/>
+          <p:nvPr/>
+        </p:nvSpPr>
+        <p:spPr>
+          <a:xfrm>
+            <a:off x="0" y="661851"/>
+            <a:ext cx="12191999" cy="584775"/>
+          </a:xfrm>
+          <a:prstGeom prst="rect">
+            <a:avLst/>
+          </a:prstGeom>
+          <a:noFill/>
+        </p:spPr>
+        <p:txBody>
+          <a:bodyPr wrap="square" rtlCol="0">
+            <a:spAutoFit/>
+          </a:bodyPr>
+          <a:lstStyle/>
+          <a:p>
+            <a:pPr algn="ctr"/>
+            <a:r>
+              <a:rPr lang="en-US" sz="3200" dirty="0">
+                <a:solidFill>
+                  <a:srgbClr val="002060"/>
+                </a:solidFill>
+                <a:latin typeface="Times New Roman" panose="02020603050405020304" pitchFamily="18" charset="0"/>
+                <a:cs typeface="Times New Roman" panose="02020603050405020304" pitchFamily="18" charset="0"/>
+              </a:rPr>
+              <a:t>LITERATURE SURVEY</a:t>
+            </a:r>
+            <a:endParaRPr lang="en-IN" sz="3200" dirty="0">
+              <a:solidFill>
+                <a:srgbClr val="002060"/>
+              </a:solidFill>
+              <a:latin typeface="Times New Roman" panose="02020603050405020304" pitchFamily="18" charset="0"/>
+              <a:cs typeface="Times New Roman" panose="02020603050405020304" pitchFamily="18" charset="0"/>
+            </a:endParaRPr>
+          </a:p>
+        </p:txBody>
+      </p:sp>
+      <p:graphicFrame>
+        <p:nvGraphicFramePr>
+          <p:cNvPr id="5" name="Table 5">
+            <a:extLst>
+              <a:ext uri="{FF2B5EF4-FFF2-40B4-BE49-F238E27FC236}">
+                <a16:creationId xmlns:a16="http://schemas.microsoft.com/office/drawing/2014/main" id="{F788887B-3D28-1226-16C8-E6EDAC6CDFDD}"/>
+              </a:ext>
+            </a:extLst>
+          </p:cNvPr>
+          <p:cNvGraphicFramePr>
+            <a:graphicFrameLocks noGrp="1"/>
+          </p:cNvGraphicFramePr>
+          <p:nvPr>
+            <p:extLst>
+              <p:ext uri="{D42A27DB-BD31-4B8C-83A1-F6EECF244321}">
+                <p14:modId xmlns:p14="http://schemas.microsoft.com/office/powerpoint/2010/main" val="3262349484"/>
+              </p:ext>
+            </p:extLst>
+          </p:nvPr>
+        </p:nvGraphicFramePr>
+        <p:xfrm>
+          <a:off x="1818640" y="1710266"/>
+          <a:ext cx="8757920" cy="3434906"/>
+        </p:xfrm>
+        <a:graphic>
+          <a:graphicData uri="http://schemas.openxmlformats.org/drawingml/2006/table">
+            <a:tbl>
+              <a:tblPr firstRow="1" bandRow="1">
+                <a:tableStyleId>{8799B23B-EC83-4686-B30A-512413B5E67A}</a:tableStyleId>
+              </a:tblPr>
+              <a:tblGrid>
+                <a:gridCol w="4378960">
+                  <a:extLst>
+                    <a:ext uri="{9D8B030D-6E8A-4147-A177-3AD203B41FA5}">
+                      <a16:colId xmlns:a16="http://schemas.microsoft.com/office/drawing/2014/main" val="3659069085"/>
+                    </a:ext>
+                  </a:extLst>
+                </a:gridCol>
+                <a:gridCol w="4378960">
+                  <a:extLst>
+                    <a:ext uri="{9D8B030D-6E8A-4147-A177-3AD203B41FA5}">
+                      <a16:colId xmlns:a16="http://schemas.microsoft.com/office/drawing/2014/main" val="3409503166"/>
+                    </a:ext>
+                  </a:extLst>
+                </a:gridCol>
+              </a:tblGrid>
+              <a:tr h="748454">
+                <a:tc>
+                  <a:txBody>
+                    <a:bodyPr/>
+                    <a:lstStyle/>
+                    <a:p>
+                      <a:pPr algn="ctr"/>
+                      <a:r>
+                        <a:rPr lang="en-US" dirty="0">
+                          <a:solidFill>
+                            <a:schemeClr val="tx1">
+                              <a:lumMod val="85000"/>
+                              <a:lumOff val="15000"/>
+                            </a:schemeClr>
+                          </a:solidFill>
+                          <a:latin typeface="Calibri" panose="020F0502020204030204" pitchFamily="34" charset="0"/>
+                          <a:cs typeface="Calibri" panose="020F0502020204030204" pitchFamily="34" charset="0"/>
+                        </a:rPr>
+                        <a:t>Paper Details</a:t>
+                      </a:r>
+                      <a:endParaRPr lang="en-IN" dirty="0">
+                        <a:solidFill>
+                          <a:schemeClr val="tx1">
+                            <a:lumMod val="85000"/>
+                            <a:lumOff val="15000"/>
+                          </a:schemeClr>
+                        </a:solidFill>
+                        <a:latin typeface="Calibri" panose="020F0502020204030204" pitchFamily="34" charset="0"/>
+                        <a:cs typeface="Calibri" panose="020F0502020204030204" pitchFamily="34" charset="0"/>
+                      </a:endParaRPr>
+                    </a:p>
+                  </a:txBody>
+                  <a:tcPr anchor="ctr"/>
+                </a:tc>
+                <a:tc>
+                  <a:txBody>
+                    <a:bodyPr/>
+                    <a:lstStyle/>
+                    <a:p>
+                      <a:pPr algn="ctr"/>
+                      <a:r>
+                        <a:rPr lang="en-US" dirty="0">
+                          <a:solidFill>
+                            <a:schemeClr val="tx1">
+                              <a:lumMod val="85000"/>
+                              <a:lumOff val="15000"/>
+                            </a:schemeClr>
+                          </a:solidFill>
+                          <a:latin typeface="Calibri" panose="020F0502020204030204" pitchFamily="34" charset="0"/>
+                          <a:cs typeface="Calibri" panose="020F0502020204030204" pitchFamily="34" charset="0"/>
+                        </a:rPr>
+                        <a:t>Existing Work</a:t>
+                      </a:r>
+                      <a:endParaRPr lang="en-IN" dirty="0">
+                        <a:solidFill>
+                          <a:schemeClr val="tx1">
+                            <a:lumMod val="85000"/>
+                            <a:lumOff val="15000"/>
+                          </a:schemeClr>
+                        </a:solidFill>
+                        <a:latin typeface="Calibri" panose="020F0502020204030204" pitchFamily="34" charset="0"/>
+                        <a:cs typeface="Calibri" panose="020F0502020204030204" pitchFamily="34" charset="0"/>
+                      </a:endParaRPr>
+                    </a:p>
+                  </a:txBody>
+                  <a:tcPr anchor="ctr"/>
+                </a:tc>
+                <a:extLst>
+                  <a:ext uri="{0D108BD9-81ED-4DB2-BD59-A6C34878D82A}">
+                    <a16:rowId xmlns:a16="http://schemas.microsoft.com/office/drawing/2014/main" val="2884168137"/>
+                  </a:ext>
+                </a:extLst>
+              </a:tr>
+              <a:tr h="1343226">
+                <a:tc>
+                  <a:txBody>
+                    <a:bodyPr/>
+                    <a:lstStyle/>
+                    <a:p>
+                      <a:r>
+                        <a:rPr lang="en-US" sz="1400" b="1" kern="1200" dirty="0">
+                          <a:solidFill>
+                            <a:schemeClr val="tx1"/>
+                          </a:solidFill>
+                          <a:effectLst/>
+                          <a:latin typeface="Calibri" panose="020F0502020204030204" pitchFamily="34" charset="0"/>
+                          <a:ea typeface="+mn-ea"/>
+                          <a:cs typeface="Calibri" panose="020F0502020204030204" pitchFamily="34" charset="0"/>
+                        </a:rPr>
+                        <a:t>“Accurate delivery analysis of distributed e-commerce </a:t>
+                      </a:r>
+                      <a:endParaRPr lang="en-US" sz="1400" b="1" dirty="0">
+                        <a:latin typeface="Calibri" panose="020F0502020204030204" pitchFamily="34" charset="0"/>
+                        <a:cs typeface="Calibri" panose="020F0502020204030204" pitchFamily="34" charset="0"/>
+                      </a:endParaRPr>
+                    </a:p>
+                    <a:p>
+                      <a:r>
+                        <a:rPr lang="en-US" sz="1400" b="1" kern="1200" dirty="0">
+                          <a:solidFill>
+                            <a:schemeClr val="tx1"/>
+                          </a:solidFill>
+                          <a:effectLst/>
+                          <a:latin typeface="Calibri" panose="020F0502020204030204" pitchFamily="34" charset="0"/>
+                          <a:ea typeface="+mn-ea"/>
+                          <a:cs typeface="Calibri" panose="020F0502020204030204" pitchFamily="34" charset="0"/>
+                        </a:rPr>
+                        <a:t>based on Word2vector”</a:t>
+                      </a:r>
+                      <a:r>
+                        <a:rPr lang="en-US" sz="1400" kern="1200" dirty="0">
+                          <a:solidFill>
+                            <a:schemeClr val="tx1"/>
+                          </a:solidFill>
+                          <a:effectLst/>
+                          <a:latin typeface="Calibri" panose="020F0502020204030204" pitchFamily="34" charset="0"/>
+                          <a:ea typeface="+mn-ea"/>
+                          <a:cs typeface="Calibri" panose="020F0502020204030204" pitchFamily="34" charset="0"/>
+                        </a:rPr>
+                        <a:t>, </a:t>
+                      </a:r>
+                      <a:r>
+                        <a:rPr lang="en-IN" sz="1400" kern="1200" dirty="0">
+                          <a:solidFill>
+                            <a:schemeClr val="tx1"/>
+                          </a:solidFill>
+                          <a:effectLst/>
+                          <a:latin typeface="Calibri" panose="020F0502020204030204" pitchFamily="34" charset="0"/>
+                          <a:ea typeface="+mn-ea"/>
+                          <a:cs typeface="Calibri" panose="020F0502020204030204" pitchFamily="34" charset="0"/>
+                        </a:rPr>
+                        <a:t>Lin Long, IEEE(2019).</a:t>
+                      </a:r>
+                      <a:endParaRPr lang="en-IN" sz="1400" dirty="0">
+                        <a:latin typeface="Calibri" panose="020F0502020204030204" pitchFamily="34" charset="0"/>
+                        <a:cs typeface="Calibri" panose="020F0502020204030204" pitchFamily="34" charset="0"/>
+                      </a:endParaRPr>
+                    </a:p>
+                  </a:txBody>
+                  <a:tcPr anchor="ctr"/>
+                </a:tc>
+                <a:tc>
+                  <a:txBody>
+                    <a:bodyPr/>
+                    <a:lstStyle/>
+                    <a:p>
+                      <a:pPr algn="just"/>
+                      <a:r>
+                        <a:rPr lang="en-US" sz="1400" b="0" dirty="0"/>
+                        <a:t>This paper's goal is to improve e-commerce marketing and push delivery using huge data from recent consumer search texts. In this work, the Word2vector technique is employed to analyze the big data.</a:t>
+                      </a:r>
+                      <a:endParaRPr lang="en-IN" sz="1400" b="0" dirty="0"/>
+                    </a:p>
+                  </a:txBody>
+                  <a:tcPr anchor="ctr"/>
+                </a:tc>
+                <a:extLst>
+                  <a:ext uri="{0D108BD9-81ED-4DB2-BD59-A6C34878D82A}">
+                    <a16:rowId xmlns:a16="http://schemas.microsoft.com/office/drawing/2014/main" val="877463710"/>
+                  </a:ext>
+                </a:extLst>
+              </a:tr>
+              <a:tr h="1343226">
+                <a:tc>
+                  <a:txBody>
+                    <a:bodyPr/>
+                    <a:lstStyle/>
+                    <a:p>
+                      <a:r>
+                        <a:rPr lang="en-US" sz="1400" b="1" kern="1200" dirty="0">
+                          <a:solidFill>
+                            <a:schemeClr val="tx1"/>
+                          </a:solidFill>
+                          <a:effectLst/>
+                          <a:latin typeface="Calibri" panose="020F0502020204030204" pitchFamily="34" charset="0"/>
+                          <a:ea typeface="+mn-ea"/>
+                          <a:cs typeface="Calibri" panose="020F0502020204030204" pitchFamily="34" charset="0"/>
+                        </a:rPr>
+                        <a:t>“Customer Demanding Products In Online Shopping</a:t>
+                      </a:r>
+                      <a:endParaRPr lang="en-US" sz="1400" b="1" dirty="0">
+                        <a:latin typeface="Calibri" panose="020F0502020204030204" pitchFamily="34" charset="0"/>
+                        <a:cs typeface="Calibri" panose="020F0502020204030204" pitchFamily="34" charset="0"/>
+                      </a:endParaRPr>
+                    </a:p>
+                    <a:p>
+                      <a:r>
+                        <a:rPr lang="en-US" sz="1400" b="1" kern="1200" dirty="0">
+                          <a:solidFill>
+                            <a:schemeClr val="tx1"/>
+                          </a:solidFill>
+                          <a:effectLst/>
+                          <a:latin typeface="Calibri" panose="020F0502020204030204" pitchFamily="34" charset="0"/>
+                          <a:ea typeface="+mn-ea"/>
+                          <a:cs typeface="Calibri" panose="020F0502020204030204" pitchFamily="34" charset="0"/>
+                        </a:rPr>
+                        <a:t>A Novel Framework ”</a:t>
+                      </a:r>
+                      <a:r>
+                        <a:rPr lang="en-US" sz="1400" kern="1200" dirty="0">
+                          <a:solidFill>
+                            <a:schemeClr val="tx1"/>
+                          </a:solidFill>
+                          <a:effectLst/>
+                          <a:latin typeface="Calibri" panose="020F0502020204030204" pitchFamily="34" charset="0"/>
+                          <a:ea typeface="+mn-ea"/>
+                          <a:cs typeface="Calibri" panose="020F0502020204030204" pitchFamily="34" charset="0"/>
+                        </a:rPr>
+                        <a:t>,</a:t>
+                      </a:r>
+                      <a:r>
+                        <a:rPr lang="en-IN" sz="1800" kern="1200" dirty="0">
+                          <a:solidFill>
+                            <a:schemeClr val="tx1"/>
+                          </a:solidFill>
+                          <a:effectLst/>
+                          <a:latin typeface="+mn-lt"/>
+                          <a:ea typeface="+mn-ea"/>
+                          <a:cs typeface="+mn-cs"/>
+                        </a:rPr>
+                        <a:t> </a:t>
+                      </a:r>
+                      <a:r>
+                        <a:rPr lang="en-IN" sz="1400" kern="1200" dirty="0" err="1">
+                          <a:solidFill>
+                            <a:schemeClr val="tx1"/>
+                          </a:solidFill>
+                          <a:effectLst/>
+                          <a:latin typeface="Calibri" panose="020F0502020204030204" pitchFamily="34" charset="0"/>
+                          <a:ea typeface="+mn-ea"/>
+                          <a:cs typeface="Calibri" panose="020F0502020204030204" pitchFamily="34" charset="0"/>
+                        </a:rPr>
+                        <a:t>Yogananth</a:t>
+                      </a:r>
+                      <a:r>
+                        <a:rPr lang="en-IN" sz="1400" kern="1200" dirty="0">
+                          <a:solidFill>
+                            <a:schemeClr val="tx1"/>
+                          </a:solidFill>
+                          <a:effectLst/>
+                          <a:latin typeface="Calibri" panose="020F0502020204030204" pitchFamily="34" charset="0"/>
+                          <a:ea typeface="+mn-ea"/>
+                          <a:cs typeface="Calibri" panose="020F0502020204030204" pitchFamily="34" charset="0"/>
+                        </a:rPr>
+                        <a:t>, IEEE(2017).</a:t>
+                      </a:r>
+                      <a:endParaRPr lang="en-IN" sz="1400" dirty="0">
+                        <a:latin typeface="Calibri" panose="020F0502020204030204" pitchFamily="34" charset="0"/>
+                        <a:cs typeface="Calibri" panose="020F0502020204030204" pitchFamily="34" charset="0"/>
+                      </a:endParaRPr>
+                    </a:p>
+                  </a:txBody>
+                  <a:tcPr anchor="ctr"/>
+                </a:tc>
+                <a:tc>
+                  <a:txBody>
+                    <a:bodyPr/>
+                    <a:lstStyle/>
+                    <a:p>
+                      <a:pPr algn="just"/>
+                      <a:r>
+                        <a:rPr lang="en-US" sz="1400" b="0" dirty="0"/>
+                        <a:t>The goal of the task is to develop an interface that will allow users to shop online by placing bids on the items they want to buy and then buying those items. Any seller that receives a sufficient bid rate may sell the item.</a:t>
+                      </a:r>
+                      <a:endParaRPr lang="en-IN" sz="1400" b="0" dirty="0"/>
+                    </a:p>
+                  </a:txBody>
+                  <a:tcPr anchor="ctr"/>
+                </a:tc>
+                <a:extLst>
+                  <a:ext uri="{0D108BD9-81ED-4DB2-BD59-A6C34878D82A}">
+                    <a16:rowId xmlns:a16="http://schemas.microsoft.com/office/drawing/2014/main" val="28950705"/>
+                  </a:ext>
+                </a:extLst>
+              </a:tr>
+            </a:tbl>
+          </a:graphicData>
+        </a:graphic>
+      </p:graphicFrame>
+    </p:spTree>
   </p:cSld>
   <p:clrMapOvr>
     <a:masterClrMapping/>
